--- a/CrianzaRespetuosa.pptx
+++ b/CrianzaRespetuosa.pptx
@@ -191,7 +191,7 @@
 <file path=ppt/charts/chart1.xml><?xml version="1.0" encoding="utf-8"?>
 <c:chartSpace xmlns:c="http://schemas.openxmlformats.org/drawingml/2006/chart" xmlns:a="http://schemas.openxmlformats.org/drawingml/2006/main" xmlns:r="http://schemas.openxmlformats.org/officeDocument/2006/relationships" xmlns:c16r2="http://schemas.microsoft.com/office/drawing/2015/06/chart">
   <c:date1904 val="0"/>
-  <c:lang val="en-US"/>
+  <c:lang val="es-ES"/>
   <c:roundedCorners val="1"/>
   <c:style val="2"/>
   <c:chart>
@@ -561,7 +561,7 @@
           </a:lstStyle>
           <a:p>
             <a:fld id="{9FD07F91-E64D-4646-9EEF-09B568070F09}" type="datetimeFigureOut">
-              <a:t>3/30/2026</a:t>
+              <a:t>30/03/2026</a:t>
             </a:fld>
             <a:endParaRPr lang="en-US"/>
           </a:p>
@@ -718,7 +718,7 @@
           </a:lstStyle>
           <a:p>
             <a:fld id="{A69E24B3-206D-4CEC-9C05-171CD157F221}" type="slidenum">
-              <a:t>‹#›</a:t>
+              <a:t>‹Nº›</a:t>
             </a:fld>
             <a:endParaRPr lang="en-US"/>
           </a:p>
@@ -1780,6 +1780,13 @@
             <a:prstDash val="solid"/>
           </a:ln>
         </p:spPr>
+        <p:txBody>
+          <a:bodyPr/>
+          <a:lstStyle/>
+          <a:p>
+            <a:endParaRPr lang="es-CO"/>
+          </a:p>
+        </p:txBody>
       </p:sp>
       <p:sp>
         <p:nvSpPr>
@@ -1809,6 +1816,13 @@
             <a:prstDash val="solid"/>
           </a:ln>
         </p:spPr>
+        <p:txBody>
+          <a:bodyPr/>
+          <a:lstStyle/>
+          <a:p>
+            <a:endParaRPr lang="es-CO"/>
+          </a:p>
+        </p:txBody>
       </p:sp>
       <p:sp>
         <p:nvSpPr>
@@ -1834,6 +1848,52 @@
             <a:prstDash val="solid"/>
           </a:ln>
         </p:spPr>
+        <p:txBody>
+          <a:bodyPr/>
+          <a:lstStyle/>
+          <a:p>
+            <a:endParaRPr lang="es-CO"/>
+          </a:p>
+        </p:txBody>
+      </p:sp>
+      <p:sp>
+        <p:nvSpPr>
+          <p:cNvPr id="7" name="Text 5"/>
+          <p:cNvSpPr/>
+          <p:nvPr/>
+        </p:nvSpPr>
+        <p:spPr>
+          <a:xfrm>
+            <a:off x="685800" y="1417320"/>
+            <a:ext cx="5303520" cy="777240"/>
+          </a:xfrm>
+          <a:prstGeom prst="rect">
+            <a:avLst/>
+          </a:prstGeom>
+          <a:noFill/>
+          <a:ln/>
+        </p:spPr>
+        <p:txBody>
+          <a:bodyPr wrap="square" rtlCol="0" anchor="ctr"/>
+          <a:lstStyle/>
+          <a:p>
+            <a:pPr marL="0" indent="0" algn="l">
+              <a:buNone/>
+            </a:pPr>
+            <a:r>
+              <a:rPr lang="en-US" sz="4000" dirty="0">
+                <a:solidFill>
+                  <a:srgbClr val="FFFFFF"/>
+                </a:solidFill>
+                <a:latin typeface="Calibri Light" pitchFamily="34" charset="0"/>
+                <a:ea typeface="Calibri Light" pitchFamily="34" charset="-122"/>
+                <a:cs typeface="Calibri Light" pitchFamily="34" charset="-120"/>
+              </a:rPr>
+              <a:t>Crianza Respetuosa</a:t>
+            </a:r>
+            <a:endParaRPr lang="en-US" sz="4000" dirty="0"/>
+          </a:p>
+        </p:txBody>
       </p:sp>
       <p:sp>
         <p:nvSpPr>
@@ -1859,6 +1919,13 @@
             <a:prstDash val="solid"/>
           </a:ln>
         </p:spPr>
+        <p:txBody>
+          <a:bodyPr/>
+          <a:lstStyle/>
+          <a:p>
+            <a:endParaRPr lang="es-CO" dirty="0"/>
+          </a:p>
+        </p:txBody>
       </p:sp>
       <p:sp>
         <p:nvSpPr>
@@ -1896,45 +1963,6 @@
               <a:t>EDUCACION INICIAL</a:t>
             </a:r>
             <a:endParaRPr lang="en-US" sz="850" dirty="0"/>
-          </a:p>
-        </p:txBody>
-      </p:sp>
-      <p:sp>
-        <p:nvSpPr>
-          <p:cNvPr id="7" name="Text 5"/>
-          <p:cNvSpPr/>
-          <p:nvPr/>
-        </p:nvSpPr>
-        <p:spPr>
-          <a:xfrm>
-            <a:off x="685800" y="1417320"/>
-            <a:ext cx="5303520" cy="777240"/>
-          </a:xfrm>
-          <a:prstGeom prst="rect">
-            <a:avLst/>
-          </a:prstGeom>
-          <a:noFill/>
-          <a:ln/>
-        </p:spPr>
-        <p:txBody>
-          <a:bodyPr wrap="square" rtlCol="0" anchor="ctr"/>
-          <a:lstStyle/>
-          <a:p>
-            <a:pPr marL="0" indent="0" algn="l">
-              <a:buNone/>
-            </a:pPr>
-            <a:r>
-              <a:rPr lang="en-US" sz="4000" dirty="0">
-                <a:solidFill>
-                  <a:srgbClr val="FFFFFF"/>
-                </a:solidFill>
-                <a:latin typeface="Calibri Light" pitchFamily="34" charset="0"/>
-                <a:ea typeface="Calibri Light" pitchFamily="34" charset="-122"/>
-                <a:cs typeface="Calibri Light" pitchFamily="34" charset="-120"/>
-              </a:rPr>
-              <a:t>Crianza Respetuosa</a:t>
-            </a:r>
-            <a:endParaRPr lang="en-US" sz="4000" dirty="0"/>
           </a:p>
         </p:txBody>
       </p:sp>
@@ -2042,7 +2070,7 @@
                 <a:ea typeface="Calibri"/>
                 <a:cs typeface="Calibri"/>
               </a:rPr>
-              <a:t>acompanar</a:t>
+              <a:t>acompañar</a:t>
             </a:r>
             <a:r>
               <a:rPr lang="en-US" sz="1250" dirty="0">
@@ -2075,9 +2103,20 @@
                 <a:ea typeface="Calibri"/>
                 <a:cs typeface="Calibri"/>
               </a:rPr>
-              <a:t> 3 anos</a:t>
+              <a:t> 3 </a:t>
             </a:r>
-            <a:endParaRPr lang="en-US" sz="1250" dirty="0" err="1">
+            <a:r>
+              <a:rPr lang="en-US" sz="1250" dirty="0" err="1">
+                <a:solidFill>
+                  <a:srgbClr val="AABFB0"/>
+                </a:solidFill>
+                <a:latin typeface="Calibri"/>
+                <a:ea typeface="Calibri"/>
+                <a:cs typeface="Calibri"/>
+              </a:rPr>
+              <a:t>años</a:t>
+            </a:r>
+            <a:endParaRPr lang="en-US" sz="1250" dirty="0">
               <a:ea typeface="Calibri"/>
               <a:cs typeface="Calibri"/>
             </a:endParaRPr>
@@ -2106,6 +2145,13 @@
             <a:prstDash val="solid"/>
           </a:ln>
         </p:spPr>
+        <p:txBody>
+          <a:bodyPr/>
+          <a:lstStyle/>
+          <a:p>
+            <a:endParaRPr lang="es-CO"/>
+          </a:p>
+        </p:txBody>
       </p:sp>
       <p:sp>
         <p:nvSpPr>
@@ -2181,6 +2227,13 @@
             <a:prstDash val="solid"/>
           </a:ln>
         </p:spPr>
+        <p:txBody>
+          <a:bodyPr/>
+          <a:lstStyle/>
+          <a:p>
+            <a:endParaRPr lang="es-CO"/>
+          </a:p>
+        </p:txBody>
       </p:sp>
       <p:sp>
         <p:nvSpPr>
@@ -2210,6 +2263,13 @@
             <a:prstDash val="solid"/>
           </a:ln>
         </p:spPr>
+        <p:txBody>
+          <a:bodyPr/>
+          <a:lstStyle/>
+          <a:p>
+            <a:endParaRPr lang="es-CO"/>
+          </a:p>
+        </p:txBody>
       </p:sp>
       <p:sp>
         <p:nvSpPr>
@@ -2239,6 +2299,13 @@
             <a:prstDash val="solid"/>
           </a:ln>
         </p:spPr>
+        <p:txBody>
+          <a:bodyPr/>
+          <a:lstStyle/>
+          <a:p>
+            <a:endParaRPr lang="es-CO"/>
+          </a:p>
+        </p:txBody>
       </p:sp>
       <p:sp>
         <p:nvSpPr>
@@ -2268,6 +2335,13 @@
             <a:prstDash val="solid"/>
           </a:ln>
         </p:spPr>
+        <p:txBody>
+          <a:bodyPr/>
+          <a:lstStyle/>
+          <a:p>
+            <a:endParaRPr lang="es-CO"/>
+          </a:p>
+        </p:txBody>
       </p:sp>
       <p:sp>
         <p:nvSpPr>
@@ -2297,6 +2371,13 @@
             <a:prstDash val="solid"/>
           </a:ln>
         </p:spPr>
+        <p:txBody>
+          <a:bodyPr/>
+          <a:lstStyle/>
+          <a:p>
+            <a:endParaRPr lang="es-CO"/>
+          </a:p>
+        </p:txBody>
       </p:sp>
       <p:sp>
         <p:nvSpPr>
@@ -2326,6 +2407,13 @@
             <a:prstDash val="solid"/>
           </a:ln>
         </p:spPr>
+        <p:txBody>
+          <a:bodyPr/>
+          <a:lstStyle/>
+          <a:p>
+            <a:endParaRPr lang="es-CO"/>
+          </a:p>
+        </p:txBody>
       </p:sp>
       <p:sp>
         <p:nvSpPr>
@@ -2355,6 +2443,13 @@
             <a:prstDash val="solid"/>
           </a:ln>
         </p:spPr>
+        <p:txBody>
+          <a:bodyPr/>
+          <a:lstStyle/>
+          <a:p>
+            <a:endParaRPr lang="es-CO"/>
+          </a:p>
+        </p:txBody>
       </p:sp>
       <p:sp>
         <p:nvSpPr>
@@ -2384,6 +2479,13 @@
             <a:prstDash val="solid"/>
           </a:ln>
         </p:spPr>
+        <p:txBody>
+          <a:bodyPr/>
+          <a:lstStyle/>
+          <a:p>
+            <a:endParaRPr lang="es-CO"/>
+          </a:p>
+        </p:txBody>
       </p:sp>
       <p:sp>
         <p:nvSpPr>
@@ -2413,6 +2515,13 @@
             <a:prstDash val="solid"/>
           </a:ln>
         </p:spPr>
+        <p:txBody>
+          <a:bodyPr/>
+          <a:lstStyle/>
+          <a:p>
+            <a:endParaRPr lang="es-CO"/>
+          </a:p>
+        </p:txBody>
       </p:sp>
       <p:sp>
         <p:nvSpPr>
@@ -2442,6 +2551,13 @@
             <a:prstDash val="solid"/>
           </a:ln>
         </p:spPr>
+        <p:txBody>
+          <a:bodyPr/>
+          <a:lstStyle/>
+          <a:p>
+            <a:endParaRPr lang="es-CO"/>
+          </a:p>
+        </p:txBody>
       </p:sp>
       <p:sp>
         <p:nvSpPr>
@@ -2471,6 +2587,13 @@
             <a:prstDash val="solid"/>
           </a:ln>
         </p:spPr>
+        <p:txBody>
+          <a:bodyPr/>
+          <a:lstStyle/>
+          <a:p>
+            <a:endParaRPr lang="es-CO"/>
+          </a:p>
+        </p:txBody>
       </p:sp>
       <p:sp>
         <p:nvSpPr>
@@ -2500,16 +2623,23 @@
             <a:prstDash val="solid"/>
           </a:ln>
         </p:spPr>
-      </p:sp>
-      <p:sp>
-        <p:nvSpPr>
-          <p:cNvPr id="24" name="Shape 22"/>
-          <p:cNvSpPr/>
-          <p:nvPr/>
-        </p:nvSpPr>
-        <p:spPr>
-          <a:xfrm>
-            <a:off x="137160" y="996696"/>
+        <p:txBody>
+          <a:bodyPr/>
+          <a:lstStyle/>
+          <a:p>
+            <a:endParaRPr lang="es-CO"/>
+          </a:p>
+        </p:txBody>
+      </p:sp>
+      <p:sp>
+        <p:nvSpPr>
+          <p:cNvPr id="26" name="Shape 24"/>
+          <p:cNvSpPr/>
+          <p:nvPr/>
+        </p:nvSpPr>
+        <p:spPr>
+          <a:xfrm>
+            <a:off x="649224" y="996696"/>
             <a:ext cx="64008" cy="64008"/>
           </a:xfrm>
           <a:prstGeom prst="ellipse">
@@ -2529,16 +2659,23 @@
             <a:prstDash val="solid"/>
           </a:ln>
         </p:spPr>
-      </p:sp>
-      <p:sp>
-        <p:nvSpPr>
-          <p:cNvPr id="25" name="Shape 23"/>
-          <p:cNvSpPr/>
-          <p:nvPr/>
-        </p:nvSpPr>
-        <p:spPr>
-          <a:xfrm>
-            <a:off x="393192" y="996696"/>
+        <p:txBody>
+          <a:bodyPr/>
+          <a:lstStyle/>
+          <a:p>
+            <a:endParaRPr lang="es-CO"/>
+          </a:p>
+        </p:txBody>
+      </p:sp>
+      <p:sp>
+        <p:nvSpPr>
+          <p:cNvPr id="24" name="Shape 22"/>
+          <p:cNvSpPr/>
+          <p:nvPr/>
+        </p:nvSpPr>
+        <p:spPr>
+          <a:xfrm>
+            <a:off x="137160" y="996696"/>
             <a:ext cx="64008" cy="64008"/>
           </a:xfrm>
           <a:prstGeom prst="ellipse">
@@ -2558,16 +2695,23 @@
             <a:prstDash val="solid"/>
           </a:ln>
         </p:spPr>
-      </p:sp>
-      <p:sp>
-        <p:nvSpPr>
-          <p:cNvPr id="26" name="Shape 24"/>
-          <p:cNvSpPr/>
-          <p:nvPr/>
-        </p:nvSpPr>
-        <p:spPr>
-          <a:xfrm>
-            <a:off x="649224" y="996696"/>
+        <p:txBody>
+          <a:bodyPr/>
+          <a:lstStyle/>
+          <a:p>
+            <a:endParaRPr lang="es-CO"/>
+          </a:p>
+        </p:txBody>
+      </p:sp>
+      <p:sp>
+        <p:nvSpPr>
+          <p:cNvPr id="27" name="Shape 25"/>
+          <p:cNvSpPr/>
+          <p:nvPr/>
+        </p:nvSpPr>
+        <p:spPr>
+          <a:xfrm>
+            <a:off x="905256" y="996696"/>
             <a:ext cx="64008" cy="64008"/>
           </a:xfrm>
           <a:prstGeom prst="ellipse">
@@ -2587,16 +2731,23 @@
             <a:prstDash val="solid"/>
           </a:ln>
         </p:spPr>
-      </p:sp>
-      <p:sp>
-        <p:nvSpPr>
-          <p:cNvPr id="27" name="Shape 25"/>
-          <p:cNvSpPr/>
-          <p:nvPr/>
-        </p:nvSpPr>
-        <p:spPr>
-          <a:xfrm>
-            <a:off x="905256" y="996696"/>
+        <p:txBody>
+          <a:bodyPr/>
+          <a:lstStyle/>
+          <a:p>
+            <a:endParaRPr lang="es-CO"/>
+          </a:p>
+        </p:txBody>
+      </p:sp>
+      <p:sp>
+        <p:nvSpPr>
+          <p:cNvPr id="25" name="Shape 23"/>
+          <p:cNvSpPr/>
+          <p:nvPr/>
+        </p:nvSpPr>
+        <p:spPr>
+          <a:xfrm>
+            <a:off x="393192" y="996696"/>
             <a:ext cx="64008" cy="64008"/>
           </a:xfrm>
           <a:prstGeom prst="ellipse">
@@ -2616,12 +2767,358 @@
             <a:prstDash val="solid"/>
           </a:ln>
         </p:spPr>
+        <p:txBody>
+          <a:bodyPr/>
+          <a:lstStyle/>
+          <a:p>
+            <a:endParaRPr lang="es-CO"/>
+          </a:p>
+        </p:txBody>
       </p:sp>
     </p:spTree>
   </p:cSld>
   <p:clrMapOvr>
     <a:masterClrMapping/>
   </p:clrMapOvr>
+  <mc:AlternateContent xmlns:mc="http://schemas.openxmlformats.org/markup-compatibility/2006">
+    <mc:Choice xmlns:p14="http://schemas.microsoft.com/office/powerpoint/2010/main" Requires="p14">
+      <p:transition spd="slow" p14:dur="1200">
+        <p:dissolve/>
+      </p:transition>
+    </mc:Choice>
+    <mc:Fallback>
+      <p:transition spd="slow">
+        <p:dissolve/>
+      </p:transition>
+    </mc:Fallback>
+  </mc:AlternateContent>
+  <p:timing>
+    <p:tnLst>
+      <p:par>
+        <p:cTn id="1" dur="indefinite" restart="never" nodeType="tmRoot">
+          <p:childTnLst>
+            <p:seq concurrent="1" nextAc="seek">
+              <p:cTn id="2" dur="indefinite" nodeType="mainSeq">
+                <p:childTnLst>
+                  <p:par>
+                    <p:cTn id="3" fill="hold">
+                      <p:stCondLst>
+                        <p:cond delay="indefinite"/>
+                        <p:cond evt="onBegin" delay="0">
+                          <p:tn val="2"/>
+                        </p:cond>
+                      </p:stCondLst>
+                      <p:childTnLst>
+                        <p:par>
+                          <p:cTn id="4" fill="hold">
+                            <p:stCondLst>
+                              <p:cond delay="0"/>
+                            </p:stCondLst>
+                            <p:childTnLst>
+                              <p:par>
+                                <p:cTn id="5" presetID="2" presetClass="entr" presetSubtype="1" fill="hold" grpId="0" nodeType="withEffect">
+                                  <p:stCondLst>
+                                    <p:cond delay="0"/>
+                                  </p:stCondLst>
+                                  <p:childTnLst>
+                                    <p:set>
+                                      <p:cBhvr>
+                                        <p:cTn id="6" dur="1" fill="hold">
+                                          <p:stCondLst>
+                                            <p:cond delay="0"/>
+                                          </p:stCondLst>
+                                        </p:cTn>
+                                        <p:tgtEl>
+                                          <p:spTgt spid="5"/>
+                                        </p:tgtEl>
+                                        <p:attrNameLst>
+                                          <p:attrName>style.visibility</p:attrName>
+                                        </p:attrNameLst>
+                                      </p:cBhvr>
+                                      <p:to>
+                                        <p:strVal val="visible"/>
+                                      </p:to>
+                                    </p:set>
+                                    <p:anim calcmode="lin" valueType="num">
+                                      <p:cBhvr additive="base">
+                                        <p:cTn id="7" dur="500" fill="hold"/>
+                                        <p:tgtEl>
+                                          <p:spTgt spid="5"/>
+                                        </p:tgtEl>
+                                        <p:attrNameLst>
+                                          <p:attrName>ppt_x</p:attrName>
+                                        </p:attrNameLst>
+                                      </p:cBhvr>
+                                      <p:tavLst>
+                                        <p:tav tm="0">
+                                          <p:val>
+                                            <p:strVal val="#ppt_x"/>
+                                          </p:val>
+                                        </p:tav>
+                                        <p:tav tm="100000">
+                                          <p:val>
+                                            <p:strVal val="#ppt_x"/>
+                                          </p:val>
+                                        </p:tav>
+                                      </p:tavLst>
+                                    </p:anim>
+                                    <p:anim calcmode="lin" valueType="num">
+                                      <p:cBhvr additive="base">
+                                        <p:cTn id="8" dur="500" fill="hold"/>
+                                        <p:tgtEl>
+                                          <p:spTgt spid="5"/>
+                                        </p:tgtEl>
+                                        <p:attrNameLst>
+                                          <p:attrName>ppt_y</p:attrName>
+                                        </p:attrNameLst>
+                                      </p:cBhvr>
+                                      <p:tavLst>
+                                        <p:tav tm="0">
+                                          <p:val>
+                                            <p:strVal val="0-#ppt_h/2"/>
+                                          </p:val>
+                                        </p:tav>
+                                        <p:tav tm="100000">
+                                          <p:val>
+                                            <p:strVal val="#ppt_y"/>
+                                          </p:val>
+                                        </p:tav>
+                                      </p:tavLst>
+                                    </p:anim>
+                                  </p:childTnLst>
+                                </p:cTn>
+                              </p:par>
+                              <p:par>
+                                <p:cTn id="9" presetID="2" presetClass="entr" presetSubtype="1" fill="hold" grpId="0" nodeType="withEffect">
+                                  <p:stCondLst>
+                                    <p:cond delay="0"/>
+                                  </p:stCondLst>
+                                  <p:childTnLst>
+                                    <p:set>
+                                      <p:cBhvr>
+                                        <p:cTn id="10" dur="1" fill="hold">
+                                          <p:stCondLst>
+                                            <p:cond delay="0"/>
+                                          </p:stCondLst>
+                                        </p:cTn>
+                                        <p:tgtEl>
+                                          <p:spTgt spid="6"/>
+                                        </p:tgtEl>
+                                        <p:attrNameLst>
+                                          <p:attrName>style.visibility</p:attrName>
+                                        </p:attrNameLst>
+                                      </p:cBhvr>
+                                      <p:to>
+                                        <p:strVal val="visible"/>
+                                      </p:to>
+                                    </p:set>
+                                    <p:anim calcmode="lin" valueType="num">
+                                      <p:cBhvr additive="base">
+                                        <p:cTn id="11" dur="500" fill="hold"/>
+                                        <p:tgtEl>
+                                          <p:spTgt spid="6"/>
+                                        </p:tgtEl>
+                                        <p:attrNameLst>
+                                          <p:attrName>ppt_x</p:attrName>
+                                        </p:attrNameLst>
+                                      </p:cBhvr>
+                                      <p:tavLst>
+                                        <p:tav tm="0">
+                                          <p:val>
+                                            <p:strVal val="#ppt_x"/>
+                                          </p:val>
+                                        </p:tav>
+                                        <p:tav tm="100000">
+                                          <p:val>
+                                            <p:strVal val="#ppt_x"/>
+                                          </p:val>
+                                        </p:tav>
+                                      </p:tavLst>
+                                    </p:anim>
+                                    <p:anim calcmode="lin" valueType="num">
+                                      <p:cBhvr additive="base">
+                                        <p:cTn id="12" dur="500" fill="hold"/>
+                                        <p:tgtEl>
+                                          <p:spTgt spid="6"/>
+                                        </p:tgtEl>
+                                        <p:attrNameLst>
+                                          <p:attrName>ppt_y</p:attrName>
+                                        </p:attrNameLst>
+                                      </p:cBhvr>
+                                      <p:tavLst>
+                                        <p:tav tm="0">
+                                          <p:val>
+                                            <p:strVal val="0-#ppt_h/2"/>
+                                          </p:val>
+                                        </p:tav>
+                                        <p:tav tm="100000">
+                                          <p:val>
+                                            <p:strVal val="#ppt_y"/>
+                                          </p:val>
+                                        </p:tav>
+                                      </p:tavLst>
+                                    </p:anim>
+                                  </p:childTnLst>
+                                </p:cTn>
+                              </p:par>
+                            </p:childTnLst>
+                          </p:cTn>
+                        </p:par>
+                        <p:par>
+                          <p:cTn id="13" fill="hold">
+                            <p:stCondLst>
+                              <p:cond delay="500"/>
+                            </p:stCondLst>
+                            <p:childTnLst>
+                              <p:par>
+                                <p:cTn id="14" presetID="10" presetClass="entr" presetSubtype="0" fill="hold" grpId="0" nodeType="afterEffect">
+                                  <p:stCondLst>
+                                    <p:cond delay="0"/>
+                                  </p:stCondLst>
+                                  <p:childTnLst>
+                                    <p:set>
+                                      <p:cBhvr>
+                                        <p:cTn id="15" dur="1" fill="hold">
+                                          <p:stCondLst>
+                                            <p:cond delay="0"/>
+                                          </p:stCondLst>
+                                        </p:cTn>
+                                        <p:tgtEl>
+                                          <p:spTgt spid="7"/>
+                                        </p:tgtEl>
+                                        <p:attrNameLst>
+                                          <p:attrName>style.visibility</p:attrName>
+                                        </p:attrNameLst>
+                                      </p:cBhvr>
+                                      <p:to>
+                                        <p:strVal val="visible"/>
+                                      </p:to>
+                                    </p:set>
+                                    <p:animEffect transition="in" filter="fade">
+                                      <p:cBhvr>
+                                        <p:cTn id="16" dur="500"/>
+                                        <p:tgtEl>
+                                          <p:spTgt spid="7"/>
+                                        </p:tgtEl>
+                                      </p:cBhvr>
+                                    </p:animEffect>
+                                  </p:childTnLst>
+                                </p:cTn>
+                              </p:par>
+                              <p:par>
+                                <p:cTn id="17" presetID="10" presetClass="entr" presetSubtype="0" fill="hold" grpId="0" nodeType="withEffect">
+                                  <p:stCondLst>
+                                    <p:cond delay="0"/>
+                                  </p:stCondLst>
+                                  <p:childTnLst>
+                                    <p:set>
+                                      <p:cBhvr>
+                                        <p:cTn id="18" dur="1" fill="hold">
+                                          <p:stCondLst>
+                                            <p:cond delay="0"/>
+                                          </p:stCondLst>
+                                        </p:cTn>
+                                        <p:tgtEl>
+                                          <p:spTgt spid="8"/>
+                                        </p:tgtEl>
+                                        <p:attrNameLst>
+                                          <p:attrName>style.visibility</p:attrName>
+                                        </p:attrNameLst>
+                                      </p:cBhvr>
+                                      <p:to>
+                                        <p:strVal val="visible"/>
+                                      </p:to>
+                                    </p:set>
+                                    <p:animEffect transition="in" filter="fade">
+                                      <p:cBhvr>
+                                        <p:cTn id="19" dur="500"/>
+                                        <p:tgtEl>
+                                          <p:spTgt spid="8"/>
+                                        </p:tgtEl>
+                                      </p:cBhvr>
+                                    </p:animEffect>
+                                  </p:childTnLst>
+                                </p:cTn>
+                              </p:par>
+                            </p:childTnLst>
+                          </p:cTn>
+                        </p:par>
+                        <p:par>
+                          <p:cTn id="20" fill="hold">
+                            <p:stCondLst>
+                              <p:cond delay="1000"/>
+                            </p:stCondLst>
+                            <p:childTnLst>
+                              <p:par>
+                                <p:cTn id="21" presetID="10" presetClass="entr" presetSubtype="0" fill="hold" grpId="0" nodeType="afterEffect">
+                                  <p:stCondLst>
+                                    <p:cond delay="0"/>
+                                  </p:stCondLst>
+                                  <p:childTnLst>
+                                    <p:set>
+                                      <p:cBhvr>
+                                        <p:cTn id="22" dur="1" fill="hold">
+                                          <p:stCondLst>
+                                            <p:cond delay="0"/>
+                                          </p:stCondLst>
+                                        </p:cTn>
+                                        <p:tgtEl>
+                                          <p:spTgt spid="9"/>
+                                        </p:tgtEl>
+                                        <p:attrNameLst>
+                                          <p:attrName>style.visibility</p:attrName>
+                                        </p:attrNameLst>
+                                      </p:cBhvr>
+                                      <p:to>
+                                        <p:strVal val="visible"/>
+                                      </p:to>
+                                    </p:set>
+                                    <p:animEffect transition="in" filter="fade">
+                                      <p:cBhvr>
+                                        <p:cTn id="23" dur="500"/>
+                                        <p:tgtEl>
+                                          <p:spTgt spid="9"/>
+                                        </p:tgtEl>
+                                      </p:cBhvr>
+                                    </p:animEffect>
+                                  </p:childTnLst>
+                                </p:cTn>
+                              </p:par>
+                            </p:childTnLst>
+                          </p:cTn>
+                        </p:par>
+                      </p:childTnLst>
+                    </p:cTn>
+                  </p:par>
+                </p:childTnLst>
+              </p:cTn>
+              <p:prevCondLst>
+                <p:cond evt="onPrev" delay="0">
+                  <p:tgtEl>
+                    <p:sldTgt/>
+                  </p:tgtEl>
+                </p:cond>
+              </p:prevCondLst>
+              <p:nextCondLst>
+                <p:cond evt="onNext" delay="0">
+                  <p:tgtEl>
+                    <p:sldTgt/>
+                  </p:tgtEl>
+                </p:cond>
+              </p:nextCondLst>
+            </p:seq>
+          </p:childTnLst>
+        </p:cTn>
+      </p:par>
+    </p:tnLst>
+    <p:bldLst>
+      <p:bldP spid="7" grpId="0" animBg="1"/>
+      <p:bldP spid="5" grpId="0" animBg="1"/>
+      <p:bldP spid="6" grpId="0" animBg="1"/>
+      <p:bldP spid="8" grpId="0" animBg="1"/>
+      <p:bldP spid="9" grpId="0" animBg="1"/>
+    </p:bldLst>
+  </p:timing>
 </p:sld>
 </file>
 
@@ -2674,6 +3171,13 @@
             <a:prstDash val="solid"/>
           </a:ln>
         </p:spPr>
+        <p:txBody>
+          <a:bodyPr/>
+          <a:lstStyle/>
+          <a:p>
+            <a:endParaRPr lang="es-CO"/>
+          </a:p>
+        </p:txBody>
       </p:sp>
       <p:sp>
         <p:nvSpPr>
@@ -2699,6 +3203,13 @@
             <a:prstDash val="solid"/>
           </a:ln>
         </p:spPr>
+        <p:txBody>
+          <a:bodyPr/>
+          <a:lstStyle/>
+          <a:p>
+            <a:endParaRPr lang="es-CO"/>
+          </a:p>
+        </p:txBody>
       </p:sp>
       <p:sp>
         <p:nvSpPr>
@@ -2770,6 +3281,13 @@
             </a:outerShdw>
           </a:effectLst>
         </p:spPr>
+        <p:txBody>
+          <a:bodyPr/>
+          <a:lstStyle/>
+          <a:p>
+            <a:endParaRPr lang="es-CO"/>
+          </a:p>
+        </p:txBody>
       </p:sp>
       <p:sp>
         <p:nvSpPr>
@@ -2841,6 +3359,13 @@
             </a:outerShdw>
           </a:effectLst>
         </p:spPr>
+        <p:txBody>
+          <a:bodyPr/>
+          <a:lstStyle/>
+          <a:p>
+            <a:endParaRPr lang="es-CO"/>
+          </a:p>
+        </p:txBody>
       </p:sp>
       <p:sp>
         <p:nvSpPr>
@@ -2866,6 +3391,13 @@
             <a:prstDash val="solid"/>
           </a:ln>
         </p:spPr>
+        <p:txBody>
+          <a:bodyPr/>
+          <a:lstStyle/>
+          <a:p>
+            <a:endParaRPr lang="es-CO"/>
+          </a:p>
+        </p:txBody>
       </p:sp>
       <p:sp>
         <p:nvSpPr>
@@ -2993,6 +3525,13 @@
             </a:outerShdw>
           </a:effectLst>
         </p:spPr>
+        <p:txBody>
+          <a:bodyPr/>
+          <a:lstStyle/>
+          <a:p>
+            <a:endParaRPr lang="es-CO"/>
+          </a:p>
+        </p:txBody>
       </p:sp>
       <p:sp>
         <p:nvSpPr>
@@ -3018,6 +3557,13 @@
             <a:prstDash val="solid"/>
           </a:ln>
         </p:spPr>
+        <p:txBody>
+          <a:bodyPr/>
+          <a:lstStyle/>
+          <a:p>
+            <a:endParaRPr lang="es-CO"/>
+          </a:p>
+        </p:txBody>
       </p:sp>
       <p:sp>
         <p:nvSpPr>
@@ -3145,6 +3691,13 @@
             </a:outerShdw>
           </a:effectLst>
         </p:spPr>
+        <p:txBody>
+          <a:bodyPr/>
+          <a:lstStyle/>
+          <a:p>
+            <a:endParaRPr lang="es-CO"/>
+          </a:p>
+        </p:txBody>
       </p:sp>
       <p:sp>
         <p:nvSpPr>
@@ -3170,6 +3723,13 @@
             <a:prstDash val="solid"/>
           </a:ln>
         </p:spPr>
+        <p:txBody>
+          <a:bodyPr/>
+          <a:lstStyle/>
+          <a:p>
+            <a:endParaRPr lang="es-CO"/>
+          </a:p>
+        </p:txBody>
       </p:sp>
       <p:sp>
         <p:nvSpPr>
@@ -3290,6 +3850,13 @@
             <a:prstDash val="solid"/>
           </a:ln>
         </p:spPr>
+        <p:txBody>
+          <a:bodyPr/>
+          <a:lstStyle/>
+          <a:p>
+            <a:endParaRPr lang="es-CO"/>
+          </a:p>
+        </p:txBody>
       </p:sp>
       <p:sp>
         <p:nvSpPr>
@@ -3374,6 +3941,1234 @@
   <p:clrMapOvr>
     <a:masterClrMapping/>
   </p:clrMapOvr>
+  <p:transition spd="slow">
+    <p:push dir="u"/>
+  </p:transition>
+  <p:timing>
+    <p:tnLst>
+      <p:par>
+        <p:cTn id="1" dur="indefinite" restart="never" nodeType="tmRoot">
+          <p:childTnLst>
+            <p:seq concurrent="1" nextAc="seek">
+              <p:cTn id="2" dur="indefinite" nodeType="mainSeq">
+                <p:childTnLst>
+                  <p:par>
+                    <p:cTn id="3" fill="hold">
+                      <p:stCondLst>
+                        <p:cond delay="indefinite"/>
+                      </p:stCondLst>
+                      <p:childTnLst>
+                        <p:par>
+                          <p:cTn id="4" fill="hold">
+                            <p:stCondLst>
+                              <p:cond delay="0"/>
+                            </p:stCondLst>
+                            <p:childTnLst>
+                              <p:par>
+                                <p:cTn id="5" presetID="42" presetClass="entr" presetSubtype="0" fill="hold" grpId="0" nodeType="clickEffect">
+                                  <p:stCondLst>
+                                    <p:cond delay="0"/>
+                                  </p:stCondLst>
+                                  <p:childTnLst>
+                                    <p:set>
+                                      <p:cBhvr>
+                                        <p:cTn id="6" dur="1" fill="hold">
+                                          <p:stCondLst>
+                                            <p:cond delay="0"/>
+                                          </p:stCondLst>
+                                        </p:cTn>
+                                        <p:tgtEl>
+                                          <p:spTgt spid="4"/>
+                                        </p:tgtEl>
+                                        <p:attrNameLst>
+                                          <p:attrName>style.visibility</p:attrName>
+                                        </p:attrNameLst>
+                                      </p:cBhvr>
+                                      <p:to>
+                                        <p:strVal val="visible"/>
+                                      </p:to>
+                                    </p:set>
+                                    <p:animEffect transition="in" filter="fade">
+                                      <p:cBhvr>
+                                        <p:cTn id="7" dur="500"/>
+                                        <p:tgtEl>
+                                          <p:spTgt spid="4"/>
+                                        </p:tgtEl>
+                                      </p:cBhvr>
+                                    </p:animEffect>
+                                    <p:anim calcmode="lin" valueType="num">
+                                      <p:cBhvr>
+                                        <p:cTn id="8" dur="500" fill="hold"/>
+                                        <p:tgtEl>
+                                          <p:spTgt spid="4"/>
+                                        </p:tgtEl>
+                                        <p:attrNameLst>
+                                          <p:attrName>ppt_x</p:attrName>
+                                        </p:attrNameLst>
+                                      </p:cBhvr>
+                                      <p:tavLst>
+                                        <p:tav tm="0">
+                                          <p:val>
+                                            <p:strVal val="#ppt_x"/>
+                                          </p:val>
+                                        </p:tav>
+                                        <p:tav tm="100000">
+                                          <p:val>
+                                            <p:strVal val="#ppt_x"/>
+                                          </p:val>
+                                        </p:tav>
+                                      </p:tavLst>
+                                    </p:anim>
+                                    <p:anim calcmode="lin" valueType="num">
+                                      <p:cBhvr>
+                                        <p:cTn id="9" dur="500" fill="hold"/>
+                                        <p:tgtEl>
+                                          <p:spTgt spid="4"/>
+                                        </p:tgtEl>
+                                        <p:attrNameLst>
+                                          <p:attrName>ppt_y</p:attrName>
+                                        </p:attrNameLst>
+                                      </p:cBhvr>
+                                      <p:tavLst>
+                                        <p:tav tm="0">
+                                          <p:val>
+                                            <p:strVal val="#ppt_y+.1"/>
+                                          </p:val>
+                                        </p:tav>
+                                        <p:tav tm="100000">
+                                          <p:val>
+                                            <p:strVal val="#ppt_y"/>
+                                          </p:val>
+                                        </p:tav>
+                                      </p:tavLst>
+                                    </p:anim>
+                                  </p:childTnLst>
+                                </p:cTn>
+                              </p:par>
+                            </p:childTnLst>
+                          </p:cTn>
+                        </p:par>
+                      </p:childTnLst>
+                    </p:cTn>
+                  </p:par>
+                  <p:par>
+                    <p:cTn id="10" fill="hold">
+                      <p:stCondLst>
+                        <p:cond delay="indefinite"/>
+                      </p:stCondLst>
+                      <p:childTnLst>
+                        <p:par>
+                          <p:cTn id="11" fill="hold">
+                            <p:stCondLst>
+                              <p:cond delay="0"/>
+                            </p:stCondLst>
+                            <p:childTnLst>
+                              <p:par>
+                                <p:cTn id="12" presetID="1" presetClass="entr" presetSubtype="0" fill="hold" grpId="0" nodeType="clickEffect">
+                                  <p:stCondLst>
+                                    <p:cond delay="0"/>
+                                  </p:stCondLst>
+                                  <p:childTnLst>
+                                    <p:set>
+                                      <p:cBhvr>
+                                        <p:cTn id="13" dur="1" fill="hold">
+                                          <p:stCondLst>
+                                            <p:cond delay="0"/>
+                                          </p:stCondLst>
+                                        </p:cTn>
+                                        <p:tgtEl>
+                                          <p:spTgt spid="5"/>
+                                        </p:tgtEl>
+                                        <p:attrNameLst>
+                                          <p:attrName>style.visibility</p:attrName>
+                                        </p:attrNameLst>
+                                      </p:cBhvr>
+                                      <p:to>
+                                        <p:strVal val="visible"/>
+                                      </p:to>
+                                    </p:set>
+                                  </p:childTnLst>
+                                </p:cTn>
+                              </p:par>
+                              <p:par>
+                                <p:cTn id="14" presetID="10" presetClass="entr" presetSubtype="0" fill="hold" grpId="0" nodeType="withEffect">
+                                  <p:stCondLst>
+                                    <p:cond delay="0"/>
+                                  </p:stCondLst>
+                                  <p:childTnLst>
+                                    <p:set>
+                                      <p:cBhvr>
+                                        <p:cTn id="15" dur="1" fill="hold">
+                                          <p:stCondLst>
+                                            <p:cond delay="0"/>
+                                          </p:stCondLst>
+                                        </p:cTn>
+                                        <p:tgtEl>
+                                          <p:spTgt spid="6"/>
+                                        </p:tgtEl>
+                                        <p:attrNameLst>
+                                          <p:attrName>style.visibility</p:attrName>
+                                        </p:attrNameLst>
+                                      </p:cBhvr>
+                                      <p:to>
+                                        <p:strVal val="visible"/>
+                                      </p:to>
+                                    </p:set>
+                                    <p:animEffect transition="in" filter="fade">
+                                      <p:cBhvr>
+                                        <p:cTn id="16" dur="500"/>
+                                        <p:tgtEl>
+                                          <p:spTgt spid="6"/>
+                                        </p:tgtEl>
+                                      </p:cBhvr>
+                                    </p:animEffect>
+                                  </p:childTnLst>
+                                </p:cTn>
+                              </p:par>
+                            </p:childTnLst>
+                          </p:cTn>
+                        </p:par>
+                        <p:par>
+                          <p:cTn id="17" fill="hold">
+                            <p:stCondLst>
+                              <p:cond delay="500"/>
+                            </p:stCondLst>
+                            <p:childTnLst>
+                              <p:par>
+                                <p:cTn id="18" presetID="42" presetClass="entr" presetSubtype="0" fill="hold" grpId="0" nodeType="afterEffect">
+                                  <p:stCondLst>
+                                    <p:cond delay="0"/>
+                                  </p:stCondLst>
+                                  <p:childTnLst>
+                                    <p:set>
+                                      <p:cBhvr>
+                                        <p:cTn id="19" dur="1" fill="hold">
+                                          <p:stCondLst>
+                                            <p:cond delay="0"/>
+                                          </p:stCondLst>
+                                        </p:cTn>
+                                        <p:tgtEl>
+                                          <p:spTgt spid="7"/>
+                                        </p:tgtEl>
+                                        <p:attrNameLst>
+                                          <p:attrName>style.visibility</p:attrName>
+                                        </p:attrNameLst>
+                                      </p:cBhvr>
+                                      <p:to>
+                                        <p:strVal val="visible"/>
+                                      </p:to>
+                                    </p:set>
+                                    <p:animEffect transition="in" filter="fade">
+                                      <p:cBhvr>
+                                        <p:cTn id="20" dur="1000"/>
+                                        <p:tgtEl>
+                                          <p:spTgt spid="7"/>
+                                        </p:tgtEl>
+                                      </p:cBhvr>
+                                    </p:animEffect>
+                                    <p:anim calcmode="lin" valueType="num">
+                                      <p:cBhvr>
+                                        <p:cTn id="21" dur="1000" fill="hold"/>
+                                        <p:tgtEl>
+                                          <p:spTgt spid="7"/>
+                                        </p:tgtEl>
+                                        <p:attrNameLst>
+                                          <p:attrName>ppt_x</p:attrName>
+                                        </p:attrNameLst>
+                                      </p:cBhvr>
+                                      <p:tavLst>
+                                        <p:tav tm="0">
+                                          <p:val>
+                                            <p:strVal val="#ppt_x"/>
+                                          </p:val>
+                                        </p:tav>
+                                        <p:tav tm="100000">
+                                          <p:val>
+                                            <p:strVal val="#ppt_x"/>
+                                          </p:val>
+                                        </p:tav>
+                                      </p:tavLst>
+                                    </p:anim>
+                                    <p:anim calcmode="lin" valueType="num">
+                                      <p:cBhvr>
+                                        <p:cTn id="22" dur="1000" fill="hold"/>
+                                        <p:tgtEl>
+                                          <p:spTgt spid="7"/>
+                                        </p:tgtEl>
+                                        <p:attrNameLst>
+                                          <p:attrName>ppt_y</p:attrName>
+                                        </p:attrNameLst>
+                                      </p:cBhvr>
+                                      <p:tavLst>
+                                        <p:tav tm="0">
+                                          <p:val>
+                                            <p:strVal val="#ppt_y+.1"/>
+                                          </p:val>
+                                        </p:tav>
+                                        <p:tav tm="100000">
+                                          <p:val>
+                                            <p:strVal val="#ppt_y"/>
+                                          </p:val>
+                                        </p:tav>
+                                      </p:tavLst>
+                                    </p:anim>
+                                  </p:childTnLst>
+                                </p:cTn>
+                              </p:par>
+                              <p:par>
+                                <p:cTn id="23" presetID="42" presetClass="entr" presetSubtype="0" fill="hold" grpId="0" nodeType="withEffect">
+                                  <p:stCondLst>
+                                    <p:cond delay="0"/>
+                                  </p:stCondLst>
+                                  <p:childTnLst>
+                                    <p:set>
+                                      <p:cBhvr>
+                                        <p:cTn id="24" dur="1" fill="hold">
+                                          <p:stCondLst>
+                                            <p:cond delay="0"/>
+                                          </p:stCondLst>
+                                        </p:cTn>
+                                        <p:tgtEl>
+                                          <p:spTgt spid="8"/>
+                                        </p:tgtEl>
+                                        <p:attrNameLst>
+                                          <p:attrName>style.visibility</p:attrName>
+                                        </p:attrNameLst>
+                                      </p:cBhvr>
+                                      <p:to>
+                                        <p:strVal val="visible"/>
+                                      </p:to>
+                                    </p:set>
+                                    <p:animEffect transition="in" filter="fade">
+                                      <p:cBhvr>
+                                        <p:cTn id="25" dur="1000"/>
+                                        <p:tgtEl>
+                                          <p:spTgt spid="8"/>
+                                        </p:tgtEl>
+                                      </p:cBhvr>
+                                    </p:animEffect>
+                                    <p:anim calcmode="lin" valueType="num">
+                                      <p:cBhvr>
+                                        <p:cTn id="26" dur="1000" fill="hold"/>
+                                        <p:tgtEl>
+                                          <p:spTgt spid="8"/>
+                                        </p:tgtEl>
+                                        <p:attrNameLst>
+                                          <p:attrName>ppt_x</p:attrName>
+                                        </p:attrNameLst>
+                                      </p:cBhvr>
+                                      <p:tavLst>
+                                        <p:tav tm="0">
+                                          <p:val>
+                                            <p:strVal val="#ppt_x"/>
+                                          </p:val>
+                                        </p:tav>
+                                        <p:tav tm="100000">
+                                          <p:val>
+                                            <p:strVal val="#ppt_x"/>
+                                          </p:val>
+                                        </p:tav>
+                                      </p:tavLst>
+                                    </p:anim>
+                                    <p:anim calcmode="lin" valueType="num">
+                                      <p:cBhvr>
+                                        <p:cTn id="27" dur="1000" fill="hold"/>
+                                        <p:tgtEl>
+                                          <p:spTgt spid="8"/>
+                                        </p:tgtEl>
+                                        <p:attrNameLst>
+                                          <p:attrName>ppt_y</p:attrName>
+                                        </p:attrNameLst>
+                                      </p:cBhvr>
+                                      <p:tavLst>
+                                        <p:tav tm="0">
+                                          <p:val>
+                                            <p:strVal val="#ppt_y+.1"/>
+                                          </p:val>
+                                        </p:tav>
+                                        <p:tav tm="100000">
+                                          <p:val>
+                                            <p:strVal val="#ppt_y"/>
+                                          </p:val>
+                                        </p:tav>
+                                      </p:tavLst>
+                                    </p:anim>
+                                  </p:childTnLst>
+                                </p:cTn>
+                              </p:par>
+                              <p:par>
+                                <p:cTn id="28" presetID="42" presetClass="entr" presetSubtype="0" fill="hold" grpId="0" nodeType="withEffect">
+                                  <p:stCondLst>
+                                    <p:cond delay="0"/>
+                                  </p:stCondLst>
+                                  <p:childTnLst>
+                                    <p:set>
+                                      <p:cBhvr>
+                                        <p:cTn id="29" dur="1" fill="hold">
+                                          <p:stCondLst>
+                                            <p:cond delay="0"/>
+                                          </p:stCondLst>
+                                        </p:cTn>
+                                        <p:tgtEl>
+                                          <p:spTgt spid="9"/>
+                                        </p:tgtEl>
+                                        <p:attrNameLst>
+                                          <p:attrName>style.visibility</p:attrName>
+                                        </p:attrNameLst>
+                                      </p:cBhvr>
+                                      <p:to>
+                                        <p:strVal val="visible"/>
+                                      </p:to>
+                                    </p:set>
+                                    <p:animEffect transition="in" filter="fade">
+                                      <p:cBhvr>
+                                        <p:cTn id="30" dur="1000"/>
+                                        <p:tgtEl>
+                                          <p:spTgt spid="9"/>
+                                        </p:tgtEl>
+                                      </p:cBhvr>
+                                    </p:animEffect>
+                                    <p:anim calcmode="lin" valueType="num">
+                                      <p:cBhvr>
+                                        <p:cTn id="31" dur="1000" fill="hold"/>
+                                        <p:tgtEl>
+                                          <p:spTgt spid="9"/>
+                                        </p:tgtEl>
+                                        <p:attrNameLst>
+                                          <p:attrName>ppt_x</p:attrName>
+                                        </p:attrNameLst>
+                                      </p:cBhvr>
+                                      <p:tavLst>
+                                        <p:tav tm="0">
+                                          <p:val>
+                                            <p:strVal val="#ppt_x"/>
+                                          </p:val>
+                                        </p:tav>
+                                        <p:tav tm="100000">
+                                          <p:val>
+                                            <p:strVal val="#ppt_x"/>
+                                          </p:val>
+                                        </p:tav>
+                                      </p:tavLst>
+                                    </p:anim>
+                                    <p:anim calcmode="lin" valueType="num">
+                                      <p:cBhvr>
+                                        <p:cTn id="32" dur="1000" fill="hold"/>
+                                        <p:tgtEl>
+                                          <p:spTgt spid="9"/>
+                                        </p:tgtEl>
+                                        <p:attrNameLst>
+                                          <p:attrName>ppt_y</p:attrName>
+                                        </p:attrNameLst>
+                                      </p:cBhvr>
+                                      <p:tavLst>
+                                        <p:tav tm="0">
+                                          <p:val>
+                                            <p:strVal val="#ppt_y+.1"/>
+                                          </p:val>
+                                        </p:tav>
+                                        <p:tav tm="100000">
+                                          <p:val>
+                                            <p:strVal val="#ppt_y"/>
+                                          </p:val>
+                                        </p:tav>
+                                      </p:tavLst>
+                                    </p:anim>
+                                  </p:childTnLst>
+                                </p:cTn>
+                              </p:par>
+                              <p:par>
+                                <p:cTn id="33" presetID="42" presetClass="entr" presetSubtype="0" fill="hold" grpId="0" nodeType="withEffect">
+                                  <p:stCondLst>
+                                    <p:cond delay="0"/>
+                                  </p:stCondLst>
+                                  <p:childTnLst>
+                                    <p:set>
+                                      <p:cBhvr>
+                                        <p:cTn id="34" dur="1" fill="hold">
+                                          <p:stCondLst>
+                                            <p:cond delay="0"/>
+                                          </p:stCondLst>
+                                        </p:cTn>
+                                        <p:tgtEl>
+                                          <p:spTgt spid="10"/>
+                                        </p:tgtEl>
+                                        <p:attrNameLst>
+                                          <p:attrName>style.visibility</p:attrName>
+                                        </p:attrNameLst>
+                                      </p:cBhvr>
+                                      <p:to>
+                                        <p:strVal val="visible"/>
+                                      </p:to>
+                                    </p:set>
+                                    <p:animEffect transition="in" filter="fade">
+                                      <p:cBhvr>
+                                        <p:cTn id="35" dur="1000"/>
+                                        <p:tgtEl>
+                                          <p:spTgt spid="10"/>
+                                        </p:tgtEl>
+                                      </p:cBhvr>
+                                    </p:animEffect>
+                                    <p:anim calcmode="lin" valueType="num">
+                                      <p:cBhvr>
+                                        <p:cTn id="36" dur="1000" fill="hold"/>
+                                        <p:tgtEl>
+                                          <p:spTgt spid="10"/>
+                                        </p:tgtEl>
+                                        <p:attrNameLst>
+                                          <p:attrName>ppt_x</p:attrName>
+                                        </p:attrNameLst>
+                                      </p:cBhvr>
+                                      <p:tavLst>
+                                        <p:tav tm="0">
+                                          <p:val>
+                                            <p:strVal val="#ppt_x"/>
+                                          </p:val>
+                                        </p:tav>
+                                        <p:tav tm="100000">
+                                          <p:val>
+                                            <p:strVal val="#ppt_x"/>
+                                          </p:val>
+                                        </p:tav>
+                                      </p:tavLst>
+                                    </p:anim>
+                                    <p:anim calcmode="lin" valueType="num">
+                                      <p:cBhvr>
+                                        <p:cTn id="37" dur="1000" fill="hold"/>
+                                        <p:tgtEl>
+                                          <p:spTgt spid="10"/>
+                                        </p:tgtEl>
+                                        <p:attrNameLst>
+                                          <p:attrName>ppt_y</p:attrName>
+                                        </p:attrNameLst>
+                                      </p:cBhvr>
+                                      <p:tavLst>
+                                        <p:tav tm="0">
+                                          <p:val>
+                                            <p:strVal val="#ppt_y+.1"/>
+                                          </p:val>
+                                        </p:tav>
+                                        <p:tav tm="100000">
+                                          <p:val>
+                                            <p:strVal val="#ppt_y"/>
+                                          </p:val>
+                                        </p:tav>
+                                      </p:tavLst>
+                                    </p:anim>
+                                  </p:childTnLst>
+                                </p:cTn>
+                              </p:par>
+                            </p:childTnLst>
+                          </p:cTn>
+                        </p:par>
+                        <p:par>
+                          <p:cTn id="38" fill="hold">
+                            <p:stCondLst>
+                              <p:cond delay="1500"/>
+                            </p:stCondLst>
+                            <p:childTnLst>
+                              <p:par>
+                                <p:cTn id="39" presetID="42" presetClass="entr" presetSubtype="0" fill="hold" grpId="0" nodeType="afterEffect">
+                                  <p:stCondLst>
+                                    <p:cond delay="0"/>
+                                  </p:stCondLst>
+                                  <p:childTnLst>
+                                    <p:set>
+                                      <p:cBhvr>
+                                        <p:cTn id="40" dur="1" fill="hold">
+                                          <p:stCondLst>
+                                            <p:cond delay="0"/>
+                                          </p:stCondLst>
+                                        </p:cTn>
+                                        <p:tgtEl>
+                                          <p:spTgt spid="11"/>
+                                        </p:tgtEl>
+                                        <p:attrNameLst>
+                                          <p:attrName>style.visibility</p:attrName>
+                                        </p:attrNameLst>
+                                      </p:cBhvr>
+                                      <p:to>
+                                        <p:strVal val="visible"/>
+                                      </p:to>
+                                    </p:set>
+                                    <p:animEffect transition="in" filter="fade">
+                                      <p:cBhvr>
+                                        <p:cTn id="41" dur="1000"/>
+                                        <p:tgtEl>
+                                          <p:spTgt spid="11"/>
+                                        </p:tgtEl>
+                                      </p:cBhvr>
+                                    </p:animEffect>
+                                    <p:anim calcmode="lin" valueType="num">
+                                      <p:cBhvr>
+                                        <p:cTn id="42" dur="1000" fill="hold"/>
+                                        <p:tgtEl>
+                                          <p:spTgt spid="11"/>
+                                        </p:tgtEl>
+                                        <p:attrNameLst>
+                                          <p:attrName>ppt_x</p:attrName>
+                                        </p:attrNameLst>
+                                      </p:cBhvr>
+                                      <p:tavLst>
+                                        <p:tav tm="0">
+                                          <p:val>
+                                            <p:strVal val="#ppt_x"/>
+                                          </p:val>
+                                        </p:tav>
+                                        <p:tav tm="100000">
+                                          <p:val>
+                                            <p:strVal val="#ppt_x"/>
+                                          </p:val>
+                                        </p:tav>
+                                      </p:tavLst>
+                                    </p:anim>
+                                    <p:anim calcmode="lin" valueType="num">
+                                      <p:cBhvr>
+                                        <p:cTn id="43" dur="1000" fill="hold"/>
+                                        <p:tgtEl>
+                                          <p:spTgt spid="11"/>
+                                        </p:tgtEl>
+                                        <p:attrNameLst>
+                                          <p:attrName>ppt_y</p:attrName>
+                                        </p:attrNameLst>
+                                      </p:cBhvr>
+                                      <p:tavLst>
+                                        <p:tav tm="0">
+                                          <p:val>
+                                            <p:strVal val="#ppt_y+.1"/>
+                                          </p:val>
+                                        </p:tav>
+                                        <p:tav tm="100000">
+                                          <p:val>
+                                            <p:strVal val="#ppt_y"/>
+                                          </p:val>
+                                        </p:tav>
+                                      </p:tavLst>
+                                    </p:anim>
+                                  </p:childTnLst>
+                                </p:cTn>
+                              </p:par>
+                              <p:par>
+                                <p:cTn id="44" presetID="42" presetClass="entr" presetSubtype="0" fill="hold" grpId="0" nodeType="withEffect">
+                                  <p:stCondLst>
+                                    <p:cond delay="0"/>
+                                  </p:stCondLst>
+                                  <p:childTnLst>
+                                    <p:set>
+                                      <p:cBhvr>
+                                        <p:cTn id="45" dur="1" fill="hold">
+                                          <p:stCondLst>
+                                            <p:cond delay="0"/>
+                                          </p:stCondLst>
+                                        </p:cTn>
+                                        <p:tgtEl>
+                                          <p:spTgt spid="12"/>
+                                        </p:tgtEl>
+                                        <p:attrNameLst>
+                                          <p:attrName>style.visibility</p:attrName>
+                                        </p:attrNameLst>
+                                      </p:cBhvr>
+                                      <p:to>
+                                        <p:strVal val="visible"/>
+                                      </p:to>
+                                    </p:set>
+                                    <p:animEffect transition="in" filter="fade">
+                                      <p:cBhvr>
+                                        <p:cTn id="46" dur="1000"/>
+                                        <p:tgtEl>
+                                          <p:spTgt spid="12"/>
+                                        </p:tgtEl>
+                                      </p:cBhvr>
+                                    </p:animEffect>
+                                    <p:anim calcmode="lin" valueType="num">
+                                      <p:cBhvr>
+                                        <p:cTn id="47" dur="1000" fill="hold"/>
+                                        <p:tgtEl>
+                                          <p:spTgt spid="12"/>
+                                        </p:tgtEl>
+                                        <p:attrNameLst>
+                                          <p:attrName>ppt_x</p:attrName>
+                                        </p:attrNameLst>
+                                      </p:cBhvr>
+                                      <p:tavLst>
+                                        <p:tav tm="0">
+                                          <p:val>
+                                            <p:strVal val="#ppt_x"/>
+                                          </p:val>
+                                        </p:tav>
+                                        <p:tav tm="100000">
+                                          <p:val>
+                                            <p:strVal val="#ppt_x"/>
+                                          </p:val>
+                                        </p:tav>
+                                      </p:tavLst>
+                                    </p:anim>
+                                    <p:anim calcmode="lin" valueType="num">
+                                      <p:cBhvr>
+                                        <p:cTn id="48" dur="1000" fill="hold"/>
+                                        <p:tgtEl>
+                                          <p:spTgt spid="12"/>
+                                        </p:tgtEl>
+                                        <p:attrNameLst>
+                                          <p:attrName>ppt_y</p:attrName>
+                                        </p:attrNameLst>
+                                      </p:cBhvr>
+                                      <p:tavLst>
+                                        <p:tav tm="0">
+                                          <p:val>
+                                            <p:strVal val="#ppt_y+.1"/>
+                                          </p:val>
+                                        </p:tav>
+                                        <p:tav tm="100000">
+                                          <p:val>
+                                            <p:strVal val="#ppt_y"/>
+                                          </p:val>
+                                        </p:tav>
+                                      </p:tavLst>
+                                    </p:anim>
+                                  </p:childTnLst>
+                                </p:cTn>
+                              </p:par>
+                              <p:par>
+                                <p:cTn id="49" presetID="42" presetClass="entr" presetSubtype="0" fill="hold" grpId="0" nodeType="withEffect">
+                                  <p:stCondLst>
+                                    <p:cond delay="0"/>
+                                  </p:stCondLst>
+                                  <p:childTnLst>
+                                    <p:set>
+                                      <p:cBhvr>
+                                        <p:cTn id="50" dur="1" fill="hold">
+                                          <p:stCondLst>
+                                            <p:cond delay="0"/>
+                                          </p:stCondLst>
+                                        </p:cTn>
+                                        <p:tgtEl>
+                                          <p:spTgt spid="13"/>
+                                        </p:tgtEl>
+                                        <p:attrNameLst>
+                                          <p:attrName>style.visibility</p:attrName>
+                                        </p:attrNameLst>
+                                      </p:cBhvr>
+                                      <p:to>
+                                        <p:strVal val="visible"/>
+                                      </p:to>
+                                    </p:set>
+                                    <p:animEffect transition="in" filter="fade">
+                                      <p:cBhvr>
+                                        <p:cTn id="51" dur="1000"/>
+                                        <p:tgtEl>
+                                          <p:spTgt spid="13"/>
+                                        </p:tgtEl>
+                                      </p:cBhvr>
+                                    </p:animEffect>
+                                    <p:anim calcmode="lin" valueType="num">
+                                      <p:cBhvr>
+                                        <p:cTn id="52" dur="1000" fill="hold"/>
+                                        <p:tgtEl>
+                                          <p:spTgt spid="13"/>
+                                        </p:tgtEl>
+                                        <p:attrNameLst>
+                                          <p:attrName>ppt_x</p:attrName>
+                                        </p:attrNameLst>
+                                      </p:cBhvr>
+                                      <p:tavLst>
+                                        <p:tav tm="0">
+                                          <p:val>
+                                            <p:strVal val="#ppt_x"/>
+                                          </p:val>
+                                        </p:tav>
+                                        <p:tav tm="100000">
+                                          <p:val>
+                                            <p:strVal val="#ppt_x"/>
+                                          </p:val>
+                                        </p:tav>
+                                      </p:tavLst>
+                                    </p:anim>
+                                    <p:anim calcmode="lin" valueType="num">
+                                      <p:cBhvr>
+                                        <p:cTn id="53" dur="1000" fill="hold"/>
+                                        <p:tgtEl>
+                                          <p:spTgt spid="13"/>
+                                        </p:tgtEl>
+                                        <p:attrNameLst>
+                                          <p:attrName>ppt_y</p:attrName>
+                                        </p:attrNameLst>
+                                      </p:cBhvr>
+                                      <p:tavLst>
+                                        <p:tav tm="0">
+                                          <p:val>
+                                            <p:strVal val="#ppt_y+.1"/>
+                                          </p:val>
+                                        </p:tav>
+                                        <p:tav tm="100000">
+                                          <p:val>
+                                            <p:strVal val="#ppt_y"/>
+                                          </p:val>
+                                        </p:tav>
+                                      </p:tavLst>
+                                    </p:anim>
+                                  </p:childTnLst>
+                                </p:cTn>
+                              </p:par>
+                              <p:par>
+                                <p:cTn id="54" presetID="42" presetClass="entr" presetSubtype="0" fill="hold" grpId="0" nodeType="withEffect">
+                                  <p:stCondLst>
+                                    <p:cond delay="0"/>
+                                  </p:stCondLst>
+                                  <p:childTnLst>
+                                    <p:set>
+                                      <p:cBhvr>
+                                        <p:cTn id="55" dur="1" fill="hold">
+                                          <p:stCondLst>
+                                            <p:cond delay="0"/>
+                                          </p:stCondLst>
+                                        </p:cTn>
+                                        <p:tgtEl>
+                                          <p:spTgt spid="14"/>
+                                        </p:tgtEl>
+                                        <p:attrNameLst>
+                                          <p:attrName>style.visibility</p:attrName>
+                                        </p:attrNameLst>
+                                      </p:cBhvr>
+                                      <p:to>
+                                        <p:strVal val="visible"/>
+                                      </p:to>
+                                    </p:set>
+                                    <p:animEffect transition="in" filter="fade">
+                                      <p:cBhvr>
+                                        <p:cTn id="56" dur="1000"/>
+                                        <p:tgtEl>
+                                          <p:spTgt spid="14"/>
+                                        </p:tgtEl>
+                                      </p:cBhvr>
+                                    </p:animEffect>
+                                    <p:anim calcmode="lin" valueType="num">
+                                      <p:cBhvr>
+                                        <p:cTn id="57" dur="1000" fill="hold"/>
+                                        <p:tgtEl>
+                                          <p:spTgt spid="14"/>
+                                        </p:tgtEl>
+                                        <p:attrNameLst>
+                                          <p:attrName>ppt_x</p:attrName>
+                                        </p:attrNameLst>
+                                      </p:cBhvr>
+                                      <p:tavLst>
+                                        <p:tav tm="0">
+                                          <p:val>
+                                            <p:strVal val="#ppt_x"/>
+                                          </p:val>
+                                        </p:tav>
+                                        <p:tav tm="100000">
+                                          <p:val>
+                                            <p:strVal val="#ppt_x"/>
+                                          </p:val>
+                                        </p:tav>
+                                      </p:tavLst>
+                                    </p:anim>
+                                    <p:anim calcmode="lin" valueType="num">
+                                      <p:cBhvr>
+                                        <p:cTn id="58" dur="1000" fill="hold"/>
+                                        <p:tgtEl>
+                                          <p:spTgt spid="14"/>
+                                        </p:tgtEl>
+                                        <p:attrNameLst>
+                                          <p:attrName>ppt_y</p:attrName>
+                                        </p:attrNameLst>
+                                      </p:cBhvr>
+                                      <p:tavLst>
+                                        <p:tav tm="0">
+                                          <p:val>
+                                            <p:strVal val="#ppt_y+.1"/>
+                                          </p:val>
+                                        </p:tav>
+                                        <p:tav tm="100000">
+                                          <p:val>
+                                            <p:strVal val="#ppt_y"/>
+                                          </p:val>
+                                        </p:tav>
+                                      </p:tavLst>
+                                    </p:anim>
+                                  </p:childTnLst>
+                                </p:cTn>
+                              </p:par>
+                            </p:childTnLst>
+                          </p:cTn>
+                        </p:par>
+                        <p:par>
+                          <p:cTn id="59" fill="hold">
+                            <p:stCondLst>
+                              <p:cond delay="2500"/>
+                            </p:stCondLst>
+                            <p:childTnLst>
+                              <p:par>
+                                <p:cTn id="60" presetID="42" presetClass="entr" presetSubtype="0" fill="hold" grpId="0" nodeType="afterEffect">
+                                  <p:stCondLst>
+                                    <p:cond delay="0"/>
+                                  </p:stCondLst>
+                                  <p:childTnLst>
+                                    <p:set>
+                                      <p:cBhvr>
+                                        <p:cTn id="61" dur="1" fill="hold">
+                                          <p:stCondLst>
+                                            <p:cond delay="0"/>
+                                          </p:stCondLst>
+                                        </p:cTn>
+                                        <p:tgtEl>
+                                          <p:spTgt spid="15"/>
+                                        </p:tgtEl>
+                                        <p:attrNameLst>
+                                          <p:attrName>style.visibility</p:attrName>
+                                        </p:attrNameLst>
+                                      </p:cBhvr>
+                                      <p:to>
+                                        <p:strVal val="visible"/>
+                                      </p:to>
+                                    </p:set>
+                                    <p:animEffect transition="in" filter="fade">
+                                      <p:cBhvr>
+                                        <p:cTn id="62" dur="1000"/>
+                                        <p:tgtEl>
+                                          <p:spTgt spid="15"/>
+                                        </p:tgtEl>
+                                      </p:cBhvr>
+                                    </p:animEffect>
+                                    <p:anim calcmode="lin" valueType="num">
+                                      <p:cBhvr>
+                                        <p:cTn id="63" dur="1000" fill="hold"/>
+                                        <p:tgtEl>
+                                          <p:spTgt spid="15"/>
+                                        </p:tgtEl>
+                                        <p:attrNameLst>
+                                          <p:attrName>ppt_x</p:attrName>
+                                        </p:attrNameLst>
+                                      </p:cBhvr>
+                                      <p:tavLst>
+                                        <p:tav tm="0">
+                                          <p:val>
+                                            <p:strVal val="#ppt_x"/>
+                                          </p:val>
+                                        </p:tav>
+                                        <p:tav tm="100000">
+                                          <p:val>
+                                            <p:strVal val="#ppt_x"/>
+                                          </p:val>
+                                        </p:tav>
+                                      </p:tavLst>
+                                    </p:anim>
+                                    <p:anim calcmode="lin" valueType="num">
+                                      <p:cBhvr>
+                                        <p:cTn id="64" dur="1000" fill="hold"/>
+                                        <p:tgtEl>
+                                          <p:spTgt spid="15"/>
+                                        </p:tgtEl>
+                                        <p:attrNameLst>
+                                          <p:attrName>ppt_y</p:attrName>
+                                        </p:attrNameLst>
+                                      </p:cBhvr>
+                                      <p:tavLst>
+                                        <p:tav tm="0">
+                                          <p:val>
+                                            <p:strVal val="#ppt_y+.1"/>
+                                          </p:val>
+                                        </p:tav>
+                                        <p:tav tm="100000">
+                                          <p:val>
+                                            <p:strVal val="#ppt_y"/>
+                                          </p:val>
+                                        </p:tav>
+                                      </p:tavLst>
+                                    </p:anim>
+                                  </p:childTnLst>
+                                </p:cTn>
+                              </p:par>
+                              <p:par>
+                                <p:cTn id="65" presetID="42" presetClass="entr" presetSubtype="0" fill="hold" grpId="0" nodeType="withEffect">
+                                  <p:stCondLst>
+                                    <p:cond delay="0"/>
+                                  </p:stCondLst>
+                                  <p:childTnLst>
+                                    <p:set>
+                                      <p:cBhvr>
+                                        <p:cTn id="66" dur="1" fill="hold">
+                                          <p:stCondLst>
+                                            <p:cond delay="0"/>
+                                          </p:stCondLst>
+                                        </p:cTn>
+                                        <p:tgtEl>
+                                          <p:spTgt spid="16"/>
+                                        </p:tgtEl>
+                                        <p:attrNameLst>
+                                          <p:attrName>style.visibility</p:attrName>
+                                        </p:attrNameLst>
+                                      </p:cBhvr>
+                                      <p:to>
+                                        <p:strVal val="visible"/>
+                                      </p:to>
+                                    </p:set>
+                                    <p:animEffect transition="in" filter="fade">
+                                      <p:cBhvr>
+                                        <p:cTn id="67" dur="1000"/>
+                                        <p:tgtEl>
+                                          <p:spTgt spid="16"/>
+                                        </p:tgtEl>
+                                      </p:cBhvr>
+                                    </p:animEffect>
+                                    <p:anim calcmode="lin" valueType="num">
+                                      <p:cBhvr>
+                                        <p:cTn id="68" dur="1000" fill="hold"/>
+                                        <p:tgtEl>
+                                          <p:spTgt spid="16"/>
+                                        </p:tgtEl>
+                                        <p:attrNameLst>
+                                          <p:attrName>ppt_x</p:attrName>
+                                        </p:attrNameLst>
+                                      </p:cBhvr>
+                                      <p:tavLst>
+                                        <p:tav tm="0">
+                                          <p:val>
+                                            <p:strVal val="#ppt_x"/>
+                                          </p:val>
+                                        </p:tav>
+                                        <p:tav tm="100000">
+                                          <p:val>
+                                            <p:strVal val="#ppt_x"/>
+                                          </p:val>
+                                        </p:tav>
+                                      </p:tavLst>
+                                    </p:anim>
+                                    <p:anim calcmode="lin" valueType="num">
+                                      <p:cBhvr>
+                                        <p:cTn id="69" dur="1000" fill="hold"/>
+                                        <p:tgtEl>
+                                          <p:spTgt spid="16"/>
+                                        </p:tgtEl>
+                                        <p:attrNameLst>
+                                          <p:attrName>ppt_y</p:attrName>
+                                        </p:attrNameLst>
+                                      </p:cBhvr>
+                                      <p:tavLst>
+                                        <p:tav tm="0">
+                                          <p:val>
+                                            <p:strVal val="#ppt_y+.1"/>
+                                          </p:val>
+                                        </p:tav>
+                                        <p:tav tm="100000">
+                                          <p:val>
+                                            <p:strVal val="#ppt_y"/>
+                                          </p:val>
+                                        </p:tav>
+                                      </p:tavLst>
+                                    </p:anim>
+                                  </p:childTnLst>
+                                </p:cTn>
+                              </p:par>
+                              <p:par>
+                                <p:cTn id="70" presetID="42" presetClass="entr" presetSubtype="0" fill="hold" grpId="0" nodeType="withEffect">
+                                  <p:stCondLst>
+                                    <p:cond delay="0"/>
+                                  </p:stCondLst>
+                                  <p:childTnLst>
+                                    <p:set>
+                                      <p:cBhvr>
+                                        <p:cTn id="71" dur="1" fill="hold">
+                                          <p:stCondLst>
+                                            <p:cond delay="0"/>
+                                          </p:stCondLst>
+                                        </p:cTn>
+                                        <p:tgtEl>
+                                          <p:spTgt spid="17"/>
+                                        </p:tgtEl>
+                                        <p:attrNameLst>
+                                          <p:attrName>style.visibility</p:attrName>
+                                        </p:attrNameLst>
+                                      </p:cBhvr>
+                                      <p:to>
+                                        <p:strVal val="visible"/>
+                                      </p:to>
+                                    </p:set>
+                                    <p:animEffect transition="in" filter="fade">
+                                      <p:cBhvr>
+                                        <p:cTn id="72" dur="1000"/>
+                                        <p:tgtEl>
+                                          <p:spTgt spid="17"/>
+                                        </p:tgtEl>
+                                      </p:cBhvr>
+                                    </p:animEffect>
+                                    <p:anim calcmode="lin" valueType="num">
+                                      <p:cBhvr>
+                                        <p:cTn id="73" dur="1000" fill="hold"/>
+                                        <p:tgtEl>
+                                          <p:spTgt spid="17"/>
+                                        </p:tgtEl>
+                                        <p:attrNameLst>
+                                          <p:attrName>ppt_x</p:attrName>
+                                        </p:attrNameLst>
+                                      </p:cBhvr>
+                                      <p:tavLst>
+                                        <p:tav tm="0">
+                                          <p:val>
+                                            <p:strVal val="#ppt_x"/>
+                                          </p:val>
+                                        </p:tav>
+                                        <p:tav tm="100000">
+                                          <p:val>
+                                            <p:strVal val="#ppt_x"/>
+                                          </p:val>
+                                        </p:tav>
+                                      </p:tavLst>
+                                    </p:anim>
+                                    <p:anim calcmode="lin" valueType="num">
+                                      <p:cBhvr>
+                                        <p:cTn id="74" dur="1000" fill="hold"/>
+                                        <p:tgtEl>
+                                          <p:spTgt spid="17"/>
+                                        </p:tgtEl>
+                                        <p:attrNameLst>
+                                          <p:attrName>ppt_y</p:attrName>
+                                        </p:attrNameLst>
+                                      </p:cBhvr>
+                                      <p:tavLst>
+                                        <p:tav tm="0">
+                                          <p:val>
+                                            <p:strVal val="#ppt_y+.1"/>
+                                          </p:val>
+                                        </p:tav>
+                                        <p:tav tm="100000">
+                                          <p:val>
+                                            <p:strVal val="#ppt_y"/>
+                                          </p:val>
+                                        </p:tav>
+                                      </p:tavLst>
+                                    </p:anim>
+                                  </p:childTnLst>
+                                </p:cTn>
+                              </p:par>
+                              <p:par>
+                                <p:cTn id="75" presetID="42" presetClass="entr" presetSubtype="0" fill="hold" grpId="0" nodeType="withEffect">
+                                  <p:stCondLst>
+                                    <p:cond delay="0"/>
+                                  </p:stCondLst>
+                                  <p:childTnLst>
+                                    <p:set>
+                                      <p:cBhvr>
+                                        <p:cTn id="76" dur="1" fill="hold">
+                                          <p:stCondLst>
+                                            <p:cond delay="0"/>
+                                          </p:stCondLst>
+                                        </p:cTn>
+                                        <p:tgtEl>
+                                          <p:spTgt spid="18"/>
+                                        </p:tgtEl>
+                                        <p:attrNameLst>
+                                          <p:attrName>style.visibility</p:attrName>
+                                        </p:attrNameLst>
+                                      </p:cBhvr>
+                                      <p:to>
+                                        <p:strVal val="visible"/>
+                                      </p:to>
+                                    </p:set>
+                                    <p:animEffect transition="in" filter="fade">
+                                      <p:cBhvr>
+                                        <p:cTn id="77" dur="1000"/>
+                                        <p:tgtEl>
+                                          <p:spTgt spid="18"/>
+                                        </p:tgtEl>
+                                      </p:cBhvr>
+                                    </p:animEffect>
+                                    <p:anim calcmode="lin" valueType="num">
+                                      <p:cBhvr>
+                                        <p:cTn id="78" dur="1000" fill="hold"/>
+                                        <p:tgtEl>
+                                          <p:spTgt spid="18"/>
+                                        </p:tgtEl>
+                                        <p:attrNameLst>
+                                          <p:attrName>ppt_x</p:attrName>
+                                        </p:attrNameLst>
+                                      </p:cBhvr>
+                                      <p:tavLst>
+                                        <p:tav tm="0">
+                                          <p:val>
+                                            <p:strVal val="#ppt_x"/>
+                                          </p:val>
+                                        </p:tav>
+                                        <p:tav tm="100000">
+                                          <p:val>
+                                            <p:strVal val="#ppt_x"/>
+                                          </p:val>
+                                        </p:tav>
+                                      </p:tavLst>
+                                    </p:anim>
+                                    <p:anim calcmode="lin" valueType="num">
+                                      <p:cBhvr>
+                                        <p:cTn id="79" dur="1000" fill="hold"/>
+                                        <p:tgtEl>
+                                          <p:spTgt spid="18"/>
+                                        </p:tgtEl>
+                                        <p:attrNameLst>
+                                          <p:attrName>ppt_y</p:attrName>
+                                        </p:attrNameLst>
+                                      </p:cBhvr>
+                                      <p:tavLst>
+                                        <p:tav tm="0">
+                                          <p:val>
+                                            <p:strVal val="#ppt_y+.1"/>
+                                          </p:val>
+                                        </p:tav>
+                                        <p:tav tm="100000">
+                                          <p:val>
+                                            <p:strVal val="#ppt_y"/>
+                                          </p:val>
+                                        </p:tav>
+                                      </p:tavLst>
+                                    </p:anim>
+                                  </p:childTnLst>
+                                </p:cTn>
+                              </p:par>
+                            </p:childTnLst>
+                          </p:cTn>
+                        </p:par>
+                      </p:childTnLst>
+                    </p:cTn>
+                  </p:par>
+                </p:childTnLst>
+              </p:cTn>
+              <p:prevCondLst>
+                <p:cond evt="onPrev" delay="0">
+                  <p:tgtEl>
+                    <p:sldTgt/>
+                  </p:tgtEl>
+                </p:cond>
+              </p:prevCondLst>
+              <p:nextCondLst>
+                <p:cond evt="onNext" delay="0">
+                  <p:tgtEl>
+                    <p:sldTgt/>
+                  </p:tgtEl>
+                </p:cond>
+              </p:nextCondLst>
+            </p:seq>
+          </p:childTnLst>
+        </p:cTn>
+      </p:par>
+    </p:tnLst>
+    <p:bldLst>
+      <p:bldP spid="4" grpId="0" animBg="1"/>
+      <p:bldP spid="5" grpId="0" animBg="1"/>
+      <p:bldP spid="6" grpId="0" animBg="1"/>
+      <p:bldP spid="7" grpId="0" animBg="1"/>
+      <p:bldP spid="8" grpId="0" animBg="1"/>
+      <p:bldP spid="9" grpId="0" animBg="1"/>
+      <p:bldP spid="10" grpId="0" animBg="1"/>
+      <p:bldP spid="11" grpId="0" animBg="1"/>
+      <p:bldP spid="12" grpId="0" animBg="1"/>
+      <p:bldP spid="13" grpId="0" animBg="1"/>
+      <p:bldP spid="14" grpId="0" animBg="1"/>
+      <p:bldP spid="15" grpId="0" animBg="1"/>
+      <p:bldP spid="16" grpId="0" animBg="1"/>
+      <p:bldP spid="17" grpId="0" animBg="1"/>
+      <p:bldP spid="18" grpId="0" animBg="1"/>
+    </p:bldLst>
+  </p:timing>
 </p:sld>
 </file>
 
@@ -3426,6 +5221,13 @@
             <a:prstDash val="solid"/>
           </a:ln>
         </p:spPr>
+        <p:txBody>
+          <a:bodyPr/>
+          <a:lstStyle/>
+          <a:p>
+            <a:endParaRPr lang="es-CO"/>
+          </a:p>
+        </p:txBody>
       </p:sp>
       <p:sp>
         <p:nvSpPr>
@@ -3451,6 +5253,13 @@
             <a:prstDash val="solid"/>
           </a:ln>
         </p:spPr>
+        <p:txBody>
+          <a:bodyPr/>
+          <a:lstStyle/>
+          <a:p>
+            <a:endParaRPr lang="es-CO"/>
+          </a:p>
+        </p:txBody>
       </p:sp>
       <p:sp>
         <p:nvSpPr>
@@ -4175,6 +5984,13 @@
             </a:outerShdw>
           </a:effectLst>
         </p:spPr>
+        <p:txBody>
+          <a:bodyPr/>
+          <a:lstStyle/>
+          <a:p>
+            <a:endParaRPr lang="es-CO"/>
+          </a:p>
+        </p:txBody>
       </p:sp>
       <p:sp>
         <p:nvSpPr>
@@ -4200,6 +6016,13 @@
             <a:prstDash val="solid"/>
           </a:ln>
         </p:spPr>
+        <p:txBody>
+          <a:bodyPr/>
+          <a:lstStyle/>
+          <a:p>
+            <a:endParaRPr lang="es-CO"/>
+          </a:p>
+        </p:txBody>
       </p:sp>
       <p:sp>
         <p:nvSpPr>
@@ -4286,6 +6109,13 @@
             <a:prstDash val="solid"/>
           </a:ln>
         </p:spPr>
+        <p:txBody>
+          <a:bodyPr/>
+          <a:lstStyle/>
+          <a:p>
+            <a:endParaRPr lang="es-CO"/>
+          </a:p>
+        </p:txBody>
       </p:sp>
       <p:sp>
         <p:nvSpPr>
@@ -4422,6 +6252,13 @@
             <a:prstDash val="solid"/>
           </a:ln>
         </p:spPr>
+        <p:txBody>
+          <a:bodyPr/>
+          <a:lstStyle/>
+          <a:p>
+            <a:endParaRPr lang="es-CO"/>
+          </a:p>
+        </p:txBody>
       </p:sp>
       <p:sp>
         <p:nvSpPr>
@@ -4447,6 +6284,13 @@
             <a:prstDash val="solid"/>
           </a:ln>
         </p:spPr>
+        <p:txBody>
+          <a:bodyPr/>
+          <a:lstStyle/>
+          <a:p>
+            <a:endParaRPr lang="es-CO"/>
+          </a:p>
+        </p:txBody>
       </p:sp>
       <p:sp>
         <p:nvSpPr>
@@ -4511,6 +6355,13 @@
             <a:prstDash val="solid"/>
           </a:ln>
         </p:spPr>
+        <p:txBody>
+          <a:bodyPr/>
+          <a:lstStyle/>
+          <a:p>
+            <a:endParaRPr lang="es-CO"/>
+          </a:p>
+        </p:txBody>
       </p:sp>
       <p:sp>
         <p:nvSpPr>
@@ -4536,6 +6387,13 @@
             <a:prstDash val="solid"/>
           </a:ln>
         </p:spPr>
+        <p:txBody>
+          <a:bodyPr/>
+          <a:lstStyle/>
+          <a:p>
+            <a:endParaRPr lang="es-CO"/>
+          </a:p>
+        </p:txBody>
       </p:sp>
       <p:sp>
         <p:nvSpPr>
@@ -4622,6 +6480,13 @@
             <a:prstDash val="solid"/>
           </a:ln>
         </p:spPr>
+        <p:txBody>
+          <a:bodyPr/>
+          <a:lstStyle/>
+          <a:p>
+            <a:endParaRPr lang="es-CO"/>
+          </a:p>
+        </p:txBody>
       </p:sp>
       <p:sp>
         <p:nvSpPr>
@@ -4686,6 +6551,13 @@
             <a:prstDash val="solid"/>
           </a:ln>
         </p:spPr>
+        <p:txBody>
+          <a:bodyPr/>
+          <a:lstStyle/>
+          <a:p>
+            <a:endParaRPr lang="es-CO"/>
+          </a:p>
+        </p:txBody>
       </p:sp>
       <p:sp>
         <p:nvSpPr>
@@ -4767,6 +6639,13 @@
             <a:prstDash val="solid"/>
           </a:ln>
         </p:spPr>
+        <p:txBody>
+          <a:bodyPr/>
+          <a:lstStyle/>
+          <a:p>
+            <a:endParaRPr lang="es-CO"/>
+          </a:p>
+        </p:txBody>
       </p:sp>
       <p:sp>
         <p:nvSpPr>
@@ -4848,6 +6727,13 @@
             <a:prstDash val="solid"/>
           </a:ln>
         </p:spPr>
+        <p:txBody>
+          <a:bodyPr/>
+          <a:lstStyle/>
+          <a:p>
+            <a:endParaRPr lang="es-CO"/>
+          </a:p>
+        </p:txBody>
       </p:sp>
       <p:sp>
         <p:nvSpPr>
@@ -4929,6 +6815,13 @@
             <a:prstDash val="solid"/>
           </a:ln>
         </p:spPr>
+        <p:txBody>
+          <a:bodyPr/>
+          <a:lstStyle/>
+          <a:p>
+            <a:endParaRPr lang="es-CO"/>
+          </a:p>
+        </p:txBody>
       </p:sp>
       <p:sp>
         <p:nvSpPr>
@@ -4993,6 +6886,13 @@
             <a:prstDash val="solid"/>
           </a:ln>
         </p:spPr>
+        <p:txBody>
+          <a:bodyPr/>
+          <a:lstStyle/>
+          <a:p>
+            <a:endParaRPr lang="es-CO"/>
+          </a:p>
+        </p:txBody>
       </p:sp>
       <p:sp>
         <p:nvSpPr>
@@ -5091,6 +6991,13 @@
             <a:prstDash val="solid"/>
           </a:ln>
         </p:spPr>
+        <p:txBody>
+          <a:bodyPr/>
+          <a:lstStyle/>
+          <a:p>
+            <a:endParaRPr lang="es-CO"/>
+          </a:p>
+        </p:txBody>
       </p:sp>
       <p:sp>
         <p:nvSpPr>
@@ -5172,6 +7079,13 @@
             <a:prstDash val="solid"/>
           </a:ln>
         </p:spPr>
+        <p:txBody>
+          <a:bodyPr/>
+          <a:lstStyle/>
+          <a:p>
+            <a:endParaRPr lang="es-CO"/>
+          </a:p>
+        </p:txBody>
       </p:sp>
       <p:sp>
         <p:nvSpPr>
@@ -5253,6 +7167,13 @@
             <a:prstDash val="solid"/>
           </a:ln>
         </p:spPr>
+        <p:txBody>
+          <a:bodyPr/>
+          <a:lstStyle/>
+          <a:p>
+            <a:endParaRPr lang="es-CO"/>
+          </a:p>
+        </p:txBody>
       </p:sp>
       <p:sp>
         <p:nvSpPr>
@@ -5389,6 +7310,13 @@
             <a:prstDash val="solid"/>
           </a:ln>
         </p:spPr>
+        <p:txBody>
+          <a:bodyPr/>
+          <a:lstStyle/>
+          <a:p>
+            <a:endParaRPr lang="es-CO"/>
+          </a:p>
+        </p:txBody>
       </p:sp>
       <p:sp>
         <p:nvSpPr>
@@ -5414,6 +7342,13 @@
             <a:prstDash val="solid"/>
           </a:ln>
         </p:spPr>
+        <p:txBody>
+          <a:bodyPr/>
+          <a:lstStyle/>
+          <a:p>
+            <a:endParaRPr lang="es-CO"/>
+          </a:p>
+        </p:txBody>
       </p:sp>
       <p:sp>
         <p:nvSpPr>
@@ -5485,6 +7420,13 @@
             </a:outerShdw>
           </a:effectLst>
         </p:spPr>
+        <p:txBody>
+          <a:bodyPr/>
+          <a:lstStyle/>
+          <a:p>
+            <a:endParaRPr lang="es-CO"/>
+          </a:p>
+        </p:txBody>
       </p:sp>
       <p:sp>
         <p:nvSpPr>
@@ -5510,6 +7452,13 @@
             <a:prstDash val="solid"/>
           </a:ln>
         </p:spPr>
+        <p:txBody>
+          <a:bodyPr/>
+          <a:lstStyle/>
+          <a:p>
+            <a:endParaRPr lang="es-CO"/>
+          </a:p>
+        </p:txBody>
       </p:sp>
       <p:sp>
         <p:nvSpPr>
@@ -5537,6 +7486,13 @@
             <a:prstDash val="solid"/>
           </a:ln>
         </p:spPr>
+        <p:txBody>
+          <a:bodyPr/>
+          <a:lstStyle/>
+          <a:p>
+            <a:endParaRPr lang="es-CO"/>
+          </a:p>
+        </p:txBody>
       </p:sp>
       <p:sp>
         <p:nvSpPr>
@@ -5679,6 +7635,13 @@
             <a:prstDash val="solid"/>
           </a:ln>
         </p:spPr>
+        <p:txBody>
+          <a:bodyPr/>
+          <a:lstStyle/>
+          <a:p>
+            <a:endParaRPr lang="es-CO"/>
+          </a:p>
+        </p:txBody>
       </p:sp>
       <p:sp>
         <p:nvSpPr>
@@ -5750,6 +7713,13 @@
             </a:outerShdw>
           </a:effectLst>
         </p:spPr>
+        <p:txBody>
+          <a:bodyPr/>
+          <a:lstStyle/>
+          <a:p>
+            <a:endParaRPr lang="es-CO"/>
+          </a:p>
+        </p:txBody>
       </p:sp>
       <p:sp>
         <p:nvSpPr>
@@ -5775,6 +7745,13 @@
             <a:prstDash val="solid"/>
           </a:ln>
         </p:spPr>
+        <p:txBody>
+          <a:bodyPr/>
+          <a:lstStyle/>
+          <a:p>
+            <a:endParaRPr lang="es-CO"/>
+          </a:p>
+        </p:txBody>
       </p:sp>
       <p:sp>
         <p:nvSpPr>
@@ -5802,6 +7779,13 @@
             <a:prstDash val="solid"/>
           </a:ln>
         </p:spPr>
+        <p:txBody>
+          <a:bodyPr/>
+          <a:lstStyle/>
+          <a:p>
+            <a:endParaRPr lang="es-CO"/>
+          </a:p>
+        </p:txBody>
       </p:sp>
       <p:sp>
         <p:nvSpPr>
@@ -5944,6 +7928,13 @@
             <a:prstDash val="solid"/>
           </a:ln>
         </p:spPr>
+        <p:txBody>
+          <a:bodyPr/>
+          <a:lstStyle/>
+          <a:p>
+            <a:endParaRPr lang="es-CO"/>
+          </a:p>
+        </p:txBody>
       </p:sp>
       <p:sp>
         <p:nvSpPr>
@@ -6015,6 +8006,13 @@
             </a:outerShdw>
           </a:effectLst>
         </p:spPr>
+        <p:txBody>
+          <a:bodyPr/>
+          <a:lstStyle/>
+          <a:p>
+            <a:endParaRPr lang="es-CO"/>
+          </a:p>
+        </p:txBody>
       </p:sp>
       <p:sp>
         <p:nvSpPr>
@@ -6040,6 +8038,13 @@
             <a:prstDash val="solid"/>
           </a:ln>
         </p:spPr>
+        <p:txBody>
+          <a:bodyPr/>
+          <a:lstStyle/>
+          <a:p>
+            <a:endParaRPr lang="es-CO"/>
+          </a:p>
+        </p:txBody>
       </p:sp>
       <p:sp>
         <p:nvSpPr>
@@ -6067,6 +8072,13 @@
             <a:prstDash val="solid"/>
           </a:ln>
         </p:spPr>
+        <p:txBody>
+          <a:bodyPr/>
+          <a:lstStyle/>
+          <a:p>
+            <a:endParaRPr lang="es-CO"/>
+          </a:p>
+        </p:txBody>
       </p:sp>
       <p:sp>
         <p:nvSpPr>
@@ -6209,6 +8221,13 @@
             <a:prstDash val="solid"/>
           </a:ln>
         </p:spPr>
+        <p:txBody>
+          <a:bodyPr/>
+          <a:lstStyle/>
+          <a:p>
+            <a:endParaRPr lang="es-CO"/>
+          </a:p>
+        </p:txBody>
       </p:sp>
       <p:sp>
         <p:nvSpPr>
@@ -6289,6 +8308,13 @@
             <a:prstDash val="solid"/>
           </a:ln>
         </p:spPr>
+        <p:txBody>
+          <a:bodyPr/>
+          <a:lstStyle/>
+          <a:p>
+            <a:endParaRPr lang="es-CO"/>
+          </a:p>
+        </p:txBody>
       </p:sp>
       <p:sp>
         <p:nvSpPr>
@@ -6425,6 +8451,13 @@
             <a:prstDash val="solid"/>
           </a:ln>
         </p:spPr>
+        <p:txBody>
+          <a:bodyPr/>
+          <a:lstStyle/>
+          <a:p>
+            <a:endParaRPr lang="es-CO"/>
+          </a:p>
+        </p:txBody>
       </p:sp>
       <p:sp>
         <p:nvSpPr>
@@ -6450,6 +8483,13 @@
             <a:prstDash val="solid"/>
           </a:ln>
         </p:spPr>
+        <p:txBody>
+          <a:bodyPr/>
+          <a:lstStyle/>
+          <a:p>
+            <a:endParaRPr lang="es-CO"/>
+          </a:p>
+        </p:txBody>
       </p:sp>
       <p:sp>
         <p:nvSpPr>
@@ -6560,6 +8600,13 @@
             </a:outerShdw>
           </a:effectLst>
         </p:spPr>
+        <p:txBody>
+          <a:bodyPr/>
+          <a:lstStyle/>
+          <a:p>
+            <a:endParaRPr lang="es-CO"/>
+          </a:p>
+        </p:txBody>
       </p:sp>
       <p:sp>
         <p:nvSpPr>
@@ -6585,6 +8632,13 @@
             <a:prstDash val="solid"/>
           </a:ln>
         </p:spPr>
+        <p:txBody>
+          <a:bodyPr/>
+          <a:lstStyle/>
+          <a:p>
+            <a:endParaRPr lang="es-CO"/>
+          </a:p>
+        </p:txBody>
       </p:sp>
       <p:sp>
         <p:nvSpPr>
@@ -6610,6 +8664,13 @@
             <a:prstDash val="solid"/>
           </a:ln>
         </p:spPr>
+        <p:txBody>
+          <a:bodyPr/>
+          <a:lstStyle/>
+          <a:p>
+            <a:endParaRPr lang="es-CO"/>
+          </a:p>
+        </p:txBody>
       </p:sp>
       <p:sp>
         <p:nvSpPr>
@@ -6793,6 +8854,13 @@
             </a:outerShdw>
           </a:effectLst>
         </p:spPr>
+        <p:txBody>
+          <a:bodyPr/>
+          <a:lstStyle/>
+          <a:p>
+            <a:endParaRPr lang="es-CO"/>
+          </a:p>
+        </p:txBody>
       </p:sp>
       <p:sp>
         <p:nvSpPr>
@@ -6818,6 +8886,13 @@
             <a:prstDash val="solid"/>
           </a:ln>
         </p:spPr>
+        <p:txBody>
+          <a:bodyPr/>
+          <a:lstStyle/>
+          <a:p>
+            <a:endParaRPr lang="es-CO"/>
+          </a:p>
+        </p:txBody>
       </p:sp>
       <p:sp>
         <p:nvSpPr>
@@ -6843,6 +8918,13 @@
             <a:prstDash val="solid"/>
           </a:ln>
         </p:spPr>
+        <p:txBody>
+          <a:bodyPr/>
+          <a:lstStyle/>
+          <a:p>
+            <a:endParaRPr lang="es-CO"/>
+          </a:p>
+        </p:txBody>
       </p:sp>
       <p:sp>
         <p:nvSpPr>
@@ -7026,6 +9108,13 @@
             </a:outerShdw>
           </a:effectLst>
         </p:spPr>
+        <p:txBody>
+          <a:bodyPr/>
+          <a:lstStyle/>
+          <a:p>
+            <a:endParaRPr lang="es-CO"/>
+          </a:p>
+        </p:txBody>
       </p:sp>
       <p:sp>
         <p:nvSpPr>
@@ -7051,6 +9140,13 @@
             <a:prstDash val="solid"/>
           </a:ln>
         </p:spPr>
+        <p:txBody>
+          <a:bodyPr/>
+          <a:lstStyle/>
+          <a:p>
+            <a:endParaRPr lang="es-CO"/>
+          </a:p>
+        </p:txBody>
       </p:sp>
       <p:sp>
         <p:nvSpPr>
@@ -7076,6 +9172,13 @@
             <a:prstDash val="solid"/>
           </a:ln>
         </p:spPr>
+        <p:txBody>
+          <a:bodyPr/>
+          <a:lstStyle/>
+          <a:p>
+            <a:endParaRPr lang="es-CO"/>
+          </a:p>
+        </p:txBody>
       </p:sp>
       <p:sp>
         <p:nvSpPr>
@@ -7259,6 +9362,13 @@
             </a:outerShdw>
           </a:effectLst>
         </p:spPr>
+        <p:txBody>
+          <a:bodyPr/>
+          <a:lstStyle/>
+          <a:p>
+            <a:endParaRPr lang="es-CO"/>
+          </a:p>
+        </p:txBody>
       </p:sp>
       <p:sp>
         <p:nvSpPr>
@@ -7284,6 +9394,13 @@
             <a:prstDash val="solid"/>
           </a:ln>
         </p:spPr>
+        <p:txBody>
+          <a:bodyPr/>
+          <a:lstStyle/>
+          <a:p>
+            <a:endParaRPr lang="es-CO"/>
+          </a:p>
+        </p:txBody>
       </p:sp>
       <p:sp>
         <p:nvSpPr>
@@ -7309,6 +9426,13 @@
             <a:prstDash val="solid"/>
           </a:ln>
         </p:spPr>
+        <p:txBody>
+          <a:bodyPr/>
+          <a:lstStyle/>
+          <a:p>
+            <a:endParaRPr lang="es-CO"/>
+          </a:p>
+        </p:txBody>
       </p:sp>
       <p:sp>
         <p:nvSpPr>
@@ -7453,6 +9577,13 @@
             </a:outerShdw>
           </a:effectLst>
         </p:spPr>
+        <p:txBody>
+          <a:bodyPr/>
+          <a:lstStyle/>
+          <a:p>
+            <a:endParaRPr lang="es-CO"/>
+          </a:p>
+        </p:txBody>
       </p:sp>
       <p:sp>
         <p:nvSpPr>
@@ -7478,6 +9609,13 @@
             <a:prstDash val="solid"/>
           </a:ln>
         </p:spPr>
+        <p:txBody>
+          <a:bodyPr/>
+          <a:lstStyle/>
+          <a:p>
+            <a:endParaRPr lang="es-CO"/>
+          </a:p>
+        </p:txBody>
       </p:sp>
       <p:sp>
         <p:nvSpPr>
@@ -7553,6 +9691,13 @@
             <a:prstDash val="solid"/>
           </a:ln>
         </p:spPr>
+        <p:txBody>
+          <a:bodyPr/>
+          <a:lstStyle/>
+          <a:p>
+            <a:endParaRPr lang="es-CO"/>
+          </a:p>
+        </p:txBody>
       </p:sp>
       <p:sp>
         <p:nvSpPr>
@@ -7693,6 +9838,13 @@
             <a:prstDash val="solid"/>
           </a:ln>
         </p:spPr>
+        <p:txBody>
+          <a:bodyPr/>
+          <a:lstStyle/>
+          <a:p>
+            <a:endParaRPr lang="es-CO"/>
+          </a:p>
+        </p:txBody>
       </p:sp>
       <p:sp>
         <p:nvSpPr>
@@ -7722,6 +9874,13 @@
             <a:prstDash val="solid"/>
           </a:ln>
         </p:spPr>
+        <p:txBody>
+          <a:bodyPr/>
+          <a:lstStyle/>
+          <a:p>
+            <a:endParaRPr lang="es-CO"/>
+          </a:p>
+        </p:txBody>
       </p:sp>
       <p:sp>
         <p:nvSpPr>
@@ -7747,6 +9906,13 @@
             <a:prstDash val="solid"/>
           </a:ln>
         </p:spPr>
+        <p:txBody>
+          <a:bodyPr/>
+          <a:lstStyle/>
+          <a:p>
+            <a:endParaRPr lang="es-CO"/>
+          </a:p>
+        </p:txBody>
       </p:sp>
       <p:sp>
         <p:nvSpPr>
@@ -7915,6 +10081,13 @@
             </a:outerShdw>
           </a:effectLst>
         </p:spPr>
+        <p:txBody>
+          <a:bodyPr/>
+          <a:lstStyle/>
+          <a:p>
+            <a:endParaRPr lang="es-CO"/>
+          </a:p>
+        </p:txBody>
       </p:sp>
       <p:sp>
         <p:nvSpPr>
@@ -8025,6 +10198,13 @@
             <a:prstDash val="solid"/>
           </a:ln>
         </p:spPr>
+        <p:txBody>
+          <a:bodyPr/>
+          <a:lstStyle/>
+          <a:p>
+            <a:endParaRPr lang="es-CO"/>
+          </a:p>
+        </p:txBody>
       </p:sp>
       <p:sp>
         <p:nvSpPr>
@@ -8162,6 +10342,13 @@
             <a:prstDash val="solid"/>
           </a:ln>
         </p:spPr>
+        <p:txBody>
+          <a:bodyPr/>
+          <a:lstStyle/>
+          <a:p>
+            <a:endParaRPr lang="es-CO"/>
+          </a:p>
+        </p:txBody>
       </p:sp>
       <p:sp>
         <p:nvSpPr>

--- a/CrianzaRespetuosa.pptx
+++ b/CrianzaRespetuosa.pptx
@@ -561,7 +561,7 @@
           </a:lstStyle>
           <a:p>
             <a:fld id="{9FD07F91-E64D-4646-9EEF-09B568070F09}" type="datetimeFigureOut">
-              <a:t>30/03/2026</a:t>
+              <a:t>1/04/2026</a:t>
             </a:fld>
             <a:endParaRPr lang="en-US"/>
           </a:p>
@@ -855,6 +855,13 @@
           </p:nvPr>
         </p:nvSpPr>
         <p:spPr/>
+        <p:txBody>
+          <a:bodyPr/>
+          <a:lstStyle/>
+          <a:p>
+            <a:endParaRPr lang="es-CO"/>
+          </a:p>
+        </p:txBody>
       </p:sp>
       <p:sp>
         <p:nvSpPr>
@@ -939,6 +946,13 @@
           </p:nvPr>
         </p:nvSpPr>
         <p:spPr/>
+        <p:txBody>
+          <a:bodyPr/>
+          <a:lstStyle/>
+          <a:p>
+            <a:endParaRPr lang="es-CO"/>
+          </a:p>
+        </p:txBody>
       </p:sp>
       <p:sp>
         <p:nvSpPr>
@@ -1023,6 +1037,13 @@
           </p:nvPr>
         </p:nvSpPr>
         <p:spPr/>
+        <p:txBody>
+          <a:bodyPr/>
+          <a:lstStyle/>
+          <a:p>
+            <a:endParaRPr lang="es-CO"/>
+          </a:p>
+        </p:txBody>
       </p:sp>
       <p:sp>
         <p:nvSpPr>
@@ -1107,6 +1128,13 @@
           </p:nvPr>
         </p:nvSpPr>
         <p:spPr/>
+        <p:txBody>
+          <a:bodyPr/>
+          <a:lstStyle/>
+          <a:p>
+            <a:endParaRPr lang="es-CO"/>
+          </a:p>
+        </p:txBody>
       </p:sp>
       <p:sp>
         <p:nvSpPr>
@@ -1191,6 +1219,13 @@
           </p:nvPr>
         </p:nvSpPr>
         <p:spPr/>
+        <p:txBody>
+          <a:bodyPr/>
+          <a:lstStyle/>
+          <a:p>
+            <a:endParaRPr lang="es-CO"/>
+          </a:p>
+        </p:txBody>
       </p:sp>
       <p:sp>
         <p:nvSpPr>
@@ -1275,6 +1310,13 @@
           </p:nvPr>
         </p:nvSpPr>
         <p:spPr/>
+        <p:txBody>
+          <a:bodyPr/>
+          <a:lstStyle/>
+          <a:p>
+            <a:endParaRPr lang="es-CO"/>
+          </a:p>
+        </p:txBody>
       </p:sp>
       <p:sp>
         <p:nvSpPr>
@@ -1359,6 +1401,13 @@
           </p:nvPr>
         </p:nvSpPr>
         <p:spPr/>
+        <p:txBody>
+          <a:bodyPr/>
+          <a:lstStyle/>
+          <a:p>
+            <a:endParaRPr lang="es-CO"/>
+          </a:p>
+        </p:txBody>
       </p:sp>
       <p:sp>
         <p:nvSpPr>
@@ -2059,62 +2108,7 @@
                 <a:ea typeface="Calibri"/>
                 <a:cs typeface="Calibri"/>
               </a:rPr>
-              <a:t>para </a:t>
-            </a:r>
-            <a:r>
-              <a:rPr lang="en-US" sz="1250" dirty="0" err="1">
-                <a:solidFill>
-                  <a:srgbClr val="AABFB0"/>
-                </a:solidFill>
-                <a:latin typeface="Calibri"/>
-                <a:ea typeface="Calibri"/>
-                <a:cs typeface="Calibri"/>
-              </a:rPr>
-              <a:t>acompañar</a:t>
-            </a:r>
-            <a:r>
-              <a:rPr lang="en-US" sz="1250" dirty="0">
-                <a:solidFill>
-                  <a:srgbClr val="AABFB0"/>
-                </a:solidFill>
-                <a:latin typeface="Calibri"/>
-                <a:ea typeface="Calibri"/>
-                <a:cs typeface="Calibri"/>
-              </a:rPr>
-              <a:t> a </a:t>
-            </a:r>
-            <a:r>
-              <a:rPr lang="en-US" sz="1250" dirty="0" err="1">
-                <a:solidFill>
-                  <a:srgbClr val="AABFB0"/>
-                </a:solidFill>
-                <a:latin typeface="Calibri"/>
-                <a:ea typeface="Calibri"/>
-                <a:cs typeface="Calibri"/>
-              </a:rPr>
-              <a:t>los</a:t>
-            </a:r>
-            <a:r>
-              <a:rPr lang="en-US" sz="1250" dirty="0">
-                <a:solidFill>
-                  <a:srgbClr val="AABFB0"/>
-                </a:solidFill>
-                <a:latin typeface="Calibri"/>
-                <a:ea typeface="Calibri"/>
-                <a:cs typeface="Calibri"/>
-              </a:rPr>
-              <a:t> 3 </a:t>
-            </a:r>
-            <a:r>
-              <a:rPr lang="en-US" sz="1250" dirty="0" err="1">
-                <a:solidFill>
-                  <a:srgbClr val="AABFB0"/>
-                </a:solidFill>
-                <a:latin typeface="Calibri"/>
-                <a:ea typeface="Calibri"/>
-                <a:cs typeface="Calibri"/>
-              </a:rPr>
-              <a:t>años</a:t>
+              <a:t>para acompañar a los 3 años</a:t>
             </a:r>
             <a:endParaRPr lang="en-US" sz="1250" dirty="0">
               <a:ea typeface="Calibri"/>
@@ -2186,7 +2180,7 @@
               <a:t>Ginna Paola García Gómez</a:t>
             </a:r>
             <a:r>
-              <a:rPr lang="en-US" sz="1000">
+              <a:rPr lang="en-US" sz="1000" dirty="0">
                 <a:solidFill>
                   <a:srgbClr val="AABFB0"/>
                 </a:solidFill>
@@ -2781,14 +2775,14 @@
     <a:masterClrMapping/>
   </p:clrMapOvr>
   <mc:AlternateContent xmlns:mc="http://schemas.openxmlformats.org/markup-compatibility/2006">
-    <mc:Choice xmlns:p14="http://schemas.microsoft.com/office/powerpoint/2010/main" Requires="p14">
-      <p:transition spd="slow" p14:dur="1200">
-        <p:dissolve/>
+    <mc:Choice xmlns:p15="http://schemas.microsoft.com/office/powerpoint/2012/main" Requires="p15">
+      <p:transition xmlns:p14="http://schemas.microsoft.com/office/powerpoint/2010/main" spd="slow" p14:dur="3250">
+        <p15:prstTrans prst="origami"/>
       </p:transition>
     </mc:Choice>
     <mc:Fallback>
       <p:transition spd="slow">
-        <p:dissolve/>
+        <p:fade/>
       </p:transition>
     </mc:Fallback>
   </mc:AlternateContent>
@@ -3187,8 +3181,8 @@
         </p:nvSpPr>
         <p:spPr>
           <a:xfrm>
-            <a:off x="0" y="64008"/>
-            <a:ext cx="9144000" cy="777240"/>
+            <a:off x="0" y="82296"/>
+            <a:ext cx="8341688" cy="758952"/>
           </a:xfrm>
           <a:prstGeom prst="rect">
             <a:avLst/>
@@ -3207,7 +3201,8 @@
           <a:bodyPr/>
           <a:lstStyle/>
           <a:p>
-            <a:endParaRPr lang="es-CO"/>
+            <a:pPr algn="ctr"/>
+            <a:endParaRPr lang="es-CO" dirty="0"/>
           </a:p>
         </p:txBody>
       </p:sp>
@@ -3232,7 +3227,7 @@
           <a:bodyPr wrap="square" rtlCol="0" anchor="ctr"/>
           <a:lstStyle/>
           <a:p>
-            <a:pPr marL="0" indent="0" algn="l">
+            <a:pPr marL="0" indent="0" algn="ctr">
               <a:buNone/>
             </a:pPr>
             <a:r>
@@ -3244,7 +3239,29 @@
                 <a:ea typeface="Calibri Light" pitchFamily="34" charset="-122"/>
                 <a:cs typeface="Calibri Light" pitchFamily="34" charset="-120"/>
               </a:rPr>
-              <a:t>Que es la Crianza Respetuosa?</a:t>
+              <a:t>Que es la crianza </a:t>
+            </a:r>
+            <a:r>
+              <a:rPr lang="en-US" sz="3000" dirty="0" err="1">
+                <a:solidFill>
+                  <a:srgbClr val="2C3E35"/>
+                </a:solidFill>
+                <a:latin typeface="Calibri Light" pitchFamily="34" charset="0"/>
+                <a:ea typeface="Calibri Light" pitchFamily="34" charset="-122"/>
+                <a:cs typeface="Calibri Light" pitchFamily="34" charset="-120"/>
+              </a:rPr>
+              <a:t>respetuosa</a:t>
+            </a:r>
+            <a:r>
+              <a:rPr lang="en-US" sz="3000" dirty="0">
+                <a:solidFill>
+                  <a:srgbClr val="2C3E35"/>
+                </a:solidFill>
+                <a:latin typeface="Calibri Light" pitchFamily="34" charset="0"/>
+                <a:ea typeface="Calibri Light" pitchFamily="34" charset="-122"/>
+                <a:cs typeface="Calibri Light" pitchFamily="34" charset="-120"/>
+              </a:rPr>
+              <a:t>?</a:t>
             </a:r>
             <a:endParaRPr lang="en-US" sz="3000" dirty="0"/>
           </a:p>
@@ -3471,7 +3488,18 @@
                 <a:ea typeface="Calibri" pitchFamily="34" charset="-122"/>
                 <a:cs typeface="Calibri" pitchFamily="34" charset="-120"/>
               </a:rPr>
-              <a:t>Relacion adulto-nino</a:t>
+              <a:t>Relacion </a:t>
+            </a:r>
+            <a:r>
+              <a:rPr lang="en-US" sz="1300" dirty="0" err="1">
+                <a:solidFill>
+                  <a:srgbClr val="2D2D2D"/>
+                </a:solidFill>
+                <a:latin typeface="Calibri" pitchFamily="34" charset="0"/>
+                <a:ea typeface="Calibri" pitchFamily="34" charset="-122"/>
+                <a:cs typeface="Calibri" pitchFamily="34" charset="-120"/>
+              </a:rPr>
+              <a:t>adulto-niño</a:t>
             </a:r>
             <a:endParaRPr lang="en-US" sz="1300" dirty="0"/>
           </a:p>
@@ -3654,7 +3682,7 @@
                 <a:ea typeface="Calibri" pitchFamily="34" charset="-122"/>
                 <a:cs typeface="Calibri" pitchFamily="34" charset="-120"/>
               </a:rPr>
-              <a:t>madurativo del nino</a:t>
+              <a:t>madurativo del niño</a:t>
             </a:r>
             <a:endParaRPr lang="en-US" sz="1300" dirty="0"/>
           </a:p>
@@ -3820,7 +3848,7 @@
                 <a:ea typeface="Calibri" pitchFamily="34" charset="-122"/>
                 <a:cs typeface="Calibri" pitchFamily="34" charset="-120"/>
               </a:rPr>
-              <a:t>que correccion</a:t>
+              <a:t>que corrección</a:t>
             </a:r>
             <a:endParaRPr lang="en-US" sz="1300" dirty="0"/>
           </a:p>
@@ -5294,7 +5322,51 @@
                 <a:ea typeface="Calibri Light" pitchFamily="34" charset="-122"/>
                 <a:cs typeface="Calibri Light" pitchFamily="34" charset="-120"/>
               </a:rPr>
-              <a:t>La Neurociencia del Desarrollo a los 3 Anos</a:t>
+              <a:t>La </a:t>
+            </a:r>
+            <a:r>
+              <a:rPr lang="en-US" sz="2800" dirty="0" err="1">
+                <a:solidFill>
+                  <a:srgbClr val="2C3E35"/>
+                </a:solidFill>
+                <a:latin typeface="Calibri Light" pitchFamily="34" charset="0"/>
+                <a:ea typeface="Calibri Light" pitchFamily="34" charset="-122"/>
+                <a:cs typeface="Calibri Light" pitchFamily="34" charset="-120"/>
+              </a:rPr>
+              <a:t>neurociencia</a:t>
+            </a:r>
+            <a:r>
+              <a:rPr lang="en-US" sz="2800" dirty="0">
+                <a:solidFill>
+                  <a:srgbClr val="2C3E35"/>
+                </a:solidFill>
+                <a:latin typeface="Calibri Light" pitchFamily="34" charset="0"/>
+                <a:ea typeface="Calibri Light" pitchFamily="34" charset="-122"/>
+                <a:cs typeface="Calibri Light" pitchFamily="34" charset="-120"/>
+              </a:rPr>
+              <a:t> del </a:t>
+            </a:r>
+            <a:r>
+              <a:rPr lang="en-US" sz="2800" dirty="0" err="1">
+                <a:solidFill>
+                  <a:srgbClr val="2C3E35"/>
+                </a:solidFill>
+                <a:latin typeface="Calibri Light" pitchFamily="34" charset="0"/>
+                <a:ea typeface="Calibri Light" pitchFamily="34" charset="-122"/>
+                <a:cs typeface="Calibri Light" pitchFamily="34" charset="-120"/>
+              </a:rPr>
+              <a:t>desarrollo</a:t>
+            </a:r>
+            <a:r>
+              <a:rPr lang="en-US" sz="2800" dirty="0">
+                <a:solidFill>
+                  <a:srgbClr val="2C3E35"/>
+                </a:solidFill>
+                <a:latin typeface="Calibri Light" pitchFamily="34" charset="0"/>
+                <a:ea typeface="Calibri Light" pitchFamily="34" charset="-122"/>
+                <a:cs typeface="Calibri Light" pitchFamily="34" charset="-120"/>
+              </a:rPr>
+              <a:t> a los 3 años</a:t>
             </a:r>
             <a:endParaRPr lang="en-US" sz="2800" dirty="0"/>
           </a:p>
@@ -5333,7 +5405,29 @@
                 <a:ea typeface="Calibri" pitchFamily="34" charset="-122"/>
                 <a:cs typeface="Calibri" pitchFamily="34" charset="-120"/>
               </a:rPr>
-              <a:t>Por que actua asi? La biologia lo explica.</a:t>
+              <a:t>¿Por que actua asi? La </a:t>
+            </a:r>
+            <a:r>
+              <a:rPr lang="en-US" sz="1200" i="1" dirty="0" err="1">
+                <a:solidFill>
+                  <a:srgbClr val="C97D5B"/>
+                </a:solidFill>
+                <a:latin typeface="Calibri" pitchFamily="34" charset="0"/>
+                <a:ea typeface="Calibri" pitchFamily="34" charset="-122"/>
+                <a:cs typeface="Calibri" pitchFamily="34" charset="-120"/>
+              </a:rPr>
+              <a:t>biología</a:t>
+            </a:r>
+            <a:r>
+              <a:rPr lang="en-US" sz="1200" i="1" dirty="0">
+                <a:solidFill>
+                  <a:srgbClr val="C97D5B"/>
+                </a:solidFill>
+                <a:latin typeface="Calibri" pitchFamily="34" charset="0"/>
+                <a:ea typeface="Calibri" pitchFamily="34" charset="-122"/>
+                <a:cs typeface="Calibri" pitchFamily="34" charset="-120"/>
+              </a:rPr>
+              <a:t> lo explica.</a:t>
             </a:r>
             <a:endParaRPr lang="en-US" sz="1200" dirty="0"/>
           </a:p>
@@ -5348,7 +5442,7 @@
           <p:nvPr>
             <p:extLst>
               <p:ext uri="{D42A27DB-BD31-4B8C-83A1-F6EECF244321}">
-                <p14:modId xmlns:p14="http://schemas.microsoft.com/office/powerpoint/2010/main" val="1579011935"/>
+                <p14:modId xmlns:p14="http://schemas.microsoft.com/office/powerpoint/2010/main" val="2069881095"/>
               </p:ext>
             </p:extLst>
           </p:nvPr>
@@ -5395,7 +5489,29 @@
                           <a:ea typeface="Calibri" pitchFamily="34" charset="-122"/>
                           <a:cs typeface="Calibri" pitchFamily="34" charset="-120"/>
                         </a:rPr>
-                        <a:t>Sistema Limbico (Dominante)</a:t>
+                        <a:t>Sistema </a:t>
+                      </a:r>
+                      <a:r>
+                        <a:rPr lang="en-US" sz="1300" b="1" dirty="0" err="1">
+                          <a:solidFill>
+                            <a:srgbClr val="FFFFFF"/>
+                          </a:solidFill>
+                          <a:latin typeface="Calibri" pitchFamily="34" charset="0"/>
+                          <a:ea typeface="Calibri" pitchFamily="34" charset="-122"/>
+                          <a:cs typeface="Calibri" pitchFamily="34" charset="-120"/>
+                        </a:rPr>
+                        <a:t>limbico</a:t>
+                      </a:r>
+                      <a:r>
+                        <a:rPr lang="en-US" sz="1300" b="1" dirty="0">
+                          <a:solidFill>
+                            <a:srgbClr val="FFFFFF"/>
+                          </a:solidFill>
+                          <a:latin typeface="Calibri" pitchFamily="34" charset="0"/>
+                          <a:ea typeface="Calibri" pitchFamily="34" charset="-122"/>
+                          <a:cs typeface="Calibri" pitchFamily="34" charset="-120"/>
+                        </a:rPr>
+                        <a:t> (Dominante)</a:t>
                       </a:r>
                       <a:endParaRPr lang="en-US" sz="1300" dirty="0">
                         <a:latin typeface="Calibri" charset="0"/>
@@ -5455,6 +5571,17 @@
                         <a:buNone/>
                       </a:pPr>
                       <a:r>
+                        <a:rPr lang="en-US" sz="1300" b="1" dirty="0" err="1">
+                          <a:solidFill>
+                            <a:srgbClr val="FFFFFF"/>
+                          </a:solidFill>
+                          <a:latin typeface="Calibri" pitchFamily="34" charset="0"/>
+                          <a:ea typeface="Calibri" pitchFamily="34" charset="-122"/>
+                          <a:cs typeface="Calibri" pitchFamily="34" charset="-120"/>
+                        </a:rPr>
+                        <a:t>Corteza</a:t>
+                      </a:r>
+                      <a:r>
                         <a:rPr lang="en-US" sz="1300" b="1" dirty="0">
                           <a:solidFill>
                             <a:srgbClr val="FFFFFF"/>
@@ -5463,7 +5590,29 @@
                           <a:ea typeface="Calibri" pitchFamily="34" charset="-122"/>
                           <a:cs typeface="Calibri" pitchFamily="34" charset="-120"/>
                         </a:rPr>
-                        <a:t>Corteza Prefrontal (En Desarrollo)</a:t>
+                        <a:t> prefrontal (En </a:t>
+                      </a:r>
+                      <a:r>
+                        <a:rPr lang="en-US" sz="1300" b="1" dirty="0" err="1">
+                          <a:solidFill>
+                            <a:srgbClr val="FFFFFF"/>
+                          </a:solidFill>
+                          <a:latin typeface="Calibri" pitchFamily="34" charset="0"/>
+                          <a:ea typeface="Calibri" pitchFamily="34" charset="-122"/>
+                          <a:cs typeface="Calibri" pitchFamily="34" charset="-120"/>
+                        </a:rPr>
+                        <a:t>desarrollo</a:t>
+                      </a:r>
+                      <a:r>
+                        <a:rPr lang="en-US" sz="1300" b="1" dirty="0">
+                          <a:solidFill>
+                            <a:srgbClr val="FFFFFF"/>
+                          </a:solidFill>
+                          <a:latin typeface="Calibri" pitchFamily="34" charset="0"/>
+                          <a:ea typeface="Calibri" pitchFamily="34" charset="-122"/>
+                          <a:cs typeface="Calibri" pitchFamily="34" charset="-120"/>
+                        </a:rPr>
+                        <a:t>)</a:t>
                       </a:r>
                       <a:endParaRPr lang="en-US" sz="1300" dirty="0">
                         <a:latin typeface="Calibri" charset="0"/>
@@ -5606,7 +5755,7 @@
                           <a:ea typeface="Calibri" pitchFamily="34" charset="-122"/>
                           <a:cs typeface="Calibri" pitchFamily="34" charset="-120"/>
                         </a:rPr>
-                        <a:t>Razonamiento logico</a:t>
+                        <a:t>Razonamiento lógico</a:t>
                       </a:r>
                       <a:endParaRPr lang="en-US" sz="1200" dirty="0">
                         <a:latin typeface="Calibri" charset="0"/>
@@ -5892,7 +6041,7 @@
                           <a:ea typeface="Calibri" pitchFamily="34" charset="-122"/>
                           <a:cs typeface="Calibri" pitchFamily="34" charset="-120"/>
                         </a:rPr>
-                        <a:t>Empatia y planificacion</a:t>
+                        <a:t>Empatia y planificación</a:t>
                       </a:r>
                       <a:endParaRPr lang="en-US" sz="1200" dirty="0">
                         <a:latin typeface="Calibri" charset="0"/>
@@ -6068,7 +6217,7 @@
                 <a:ea typeface="Calibri" pitchFamily="34" charset="-122"/>
                 <a:cs typeface="Calibri" pitchFamily="34" charset="-120"/>
               </a:rPr>
-              <a:t>Las rabietas no son manipulacion. Pedir calma racional en ese momento es biologicamente imposible. Las neuronas espejo copian tu modelo: </a:t>
+              <a:t>Las rabietas no son manipulacion. Pedir calma racional en ese momento es biológicamente imposible. Las neuronas espejo copian tu modelo: </a:t>
             </a:r>
             <a:r>
               <a:rPr lang="en-US" sz="1200" b="1" i="1" dirty="0">
@@ -6200,6 +6349,265 @@
   <p:clrMapOvr>
     <a:masterClrMapping/>
   </p:clrMapOvr>
+  <mc:AlternateContent xmlns:mc="http://schemas.openxmlformats.org/markup-compatibility/2006">
+    <mc:Choice xmlns:p15="http://schemas.microsoft.com/office/powerpoint/2012/main" Requires="p15">
+      <p:transition xmlns:p14="http://schemas.microsoft.com/office/powerpoint/2010/main" spd="slow" p14:dur="2000">
+        <p15:prstTrans prst="fallOver"/>
+      </p:transition>
+    </mc:Choice>
+    <mc:Fallback>
+      <p:transition spd="slow">
+        <p:fade/>
+      </p:transition>
+    </mc:Fallback>
+  </mc:AlternateContent>
+  <p:timing>
+    <p:tnLst>
+      <p:par>
+        <p:cTn id="1" dur="indefinite" restart="never" nodeType="tmRoot">
+          <p:childTnLst>
+            <p:seq concurrent="1" nextAc="seek">
+              <p:cTn id="2" dur="indefinite" nodeType="mainSeq">
+                <p:childTnLst>
+                  <p:par>
+                    <p:cTn id="3" fill="hold">
+                      <p:stCondLst>
+                        <p:cond delay="indefinite"/>
+                      </p:stCondLst>
+                      <p:childTnLst>
+                        <p:par>
+                          <p:cTn id="4" fill="hold">
+                            <p:stCondLst>
+                              <p:cond delay="0"/>
+                            </p:stCondLst>
+                            <p:childTnLst>
+                              <p:par>
+                                <p:cTn id="5" presetID="21" presetClass="entr" presetSubtype="1" fill="hold" grpId="0" nodeType="clickEffect">
+                                  <p:stCondLst>
+                                    <p:cond delay="0"/>
+                                  </p:stCondLst>
+                                  <p:childTnLst>
+                                    <p:set>
+                                      <p:cBhvr>
+                                        <p:cTn id="6" dur="1" fill="hold">
+                                          <p:stCondLst>
+                                            <p:cond delay="0"/>
+                                          </p:stCondLst>
+                                        </p:cTn>
+                                        <p:tgtEl>
+                                          <p:spTgt spid="3"/>
+                                        </p:tgtEl>
+                                        <p:attrNameLst>
+                                          <p:attrName>style.visibility</p:attrName>
+                                        </p:attrNameLst>
+                                      </p:cBhvr>
+                                      <p:to>
+                                        <p:strVal val="visible"/>
+                                      </p:to>
+                                    </p:set>
+                                    <p:animEffect transition="in" filter="wheel(1)">
+                                      <p:cBhvr>
+                                        <p:cTn id="7" dur="2000"/>
+                                        <p:tgtEl>
+                                          <p:spTgt spid="3"/>
+                                        </p:tgtEl>
+                                      </p:cBhvr>
+                                    </p:animEffect>
+                                  </p:childTnLst>
+                                </p:cTn>
+                              </p:par>
+                            </p:childTnLst>
+                          </p:cTn>
+                        </p:par>
+                      </p:childTnLst>
+                    </p:cTn>
+                  </p:par>
+                  <p:par>
+                    <p:cTn id="8" fill="hold">
+                      <p:stCondLst>
+                        <p:cond delay="indefinite"/>
+                      </p:stCondLst>
+                      <p:childTnLst>
+                        <p:par>
+                          <p:cTn id="9" fill="hold">
+                            <p:stCondLst>
+                              <p:cond delay="0"/>
+                            </p:stCondLst>
+                            <p:childTnLst>
+                              <p:par>
+                                <p:cTn id="10" presetID="21" presetClass="entr" presetSubtype="1" fill="hold" grpId="0" nodeType="clickEffect">
+                                  <p:stCondLst>
+                                    <p:cond delay="0"/>
+                                  </p:stCondLst>
+                                  <p:childTnLst>
+                                    <p:set>
+                                      <p:cBhvr>
+                                        <p:cTn id="11" dur="1" fill="hold">
+                                          <p:stCondLst>
+                                            <p:cond delay="0"/>
+                                          </p:stCondLst>
+                                        </p:cTn>
+                                        <p:tgtEl>
+                                          <p:spTgt spid="5"/>
+                                        </p:tgtEl>
+                                        <p:attrNameLst>
+                                          <p:attrName>style.visibility</p:attrName>
+                                        </p:attrNameLst>
+                                      </p:cBhvr>
+                                      <p:to>
+                                        <p:strVal val="visible"/>
+                                      </p:to>
+                                    </p:set>
+                                    <p:animEffect transition="in" filter="wheel(1)">
+                                      <p:cBhvr>
+                                        <p:cTn id="12" dur="2000"/>
+                                        <p:tgtEl>
+                                          <p:spTgt spid="5"/>
+                                        </p:tgtEl>
+                                      </p:cBhvr>
+                                    </p:animEffect>
+                                  </p:childTnLst>
+                                </p:cTn>
+                              </p:par>
+                            </p:childTnLst>
+                          </p:cTn>
+                        </p:par>
+                      </p:childTnLst>
+                    </p:cTn>
+                  </p:par>
+                  <p:par>
+                    <p:cTn id="13" fill="hold">
+                      <p:stCondLst>
+                        <p:cond delay="indefinite"/>
+                      </p:stCondLst>
+                      <p:childTnLst>
+                        <p:par>
+                          <p:cTn id="14" fill="hold">
+                            <p:stCondLst>
+                              <p:cond delay="0"/>
+                            </p:stCondLst>
+                            <p:childTnLst>
+                              <p:par>
+                                <p:cTn id="15" presetID="21" presetClass="entr" presetSubtype="1" fill="hold" nodeType="clickEffect">
+                                  <p:stCondLst>
+                                    <p:cond delay="0"/>
+                                  </p:stCondLst>
+                                  <p:childTnLst>
+                                    <p:set>
+                                      <p:cBhvr>
+                                        <p:cTn id="16" dur="1" fill="hold">
+                                          <p:stCondLst>
+                                            <p:cond delay="0"/>
+                                          </p:stCondLst>
+                                        </p:cTn>
+                                        <p:tgtEl>
+                                          <p:spTgt spid="6"/>
+                                        </p:tgtEl>
+                                        <p:attrNameLst>
+                                          <p:attrName>style.visibility</p:attrName>
+                                        </p:attrNameLst>
+                                      </p:cBhvr>
+                                      <p:to>
+                                        <p:strVal val="visible"/>
+                                      </p:to>
+                                    </p:set>
+                                    <p:animEffect transition="in" filter="wheel(1)">
+                                      <p:cBhvr>
+                                        <p:cTn id="17" dur="2000"/>
+                                        <p:tgtEl>
+                                          <p:spTgt spid="6"/>
+                                        </p:tgtEl>
+                                      </p:cBhvr>
+                                    </p:animEffect>
+                                  </p:childTnLst>
+                                </p:cTn>
+                              </p:par>
+                            </p:childTnLst>
+                          </p:cTn>
+                        </p:par>
+                      </p:childTnLst>
+                    </p:cTn>
+                  </p:par>
+                  <p:par>
+                    <p:cTn id="18" fill="hold">
+                      <p:stCondLst>
+                        <p:cond delay="indefinite"/>
+                      </p:stCondLst>
+                      <p:childTnLst>
+                        <p:par>
+                          <p:cTn id="19" fill="hold">
+                            <p:stCondLst>
+                              <p:cond delay="0"/>
+                            </p:stCondLst>
+                            <p:childTnLst>
+                              <p:par>
+                                <p:cTn id="20" presetID="21" presetClass="entr" presetSubtype="1" fill="hold" grpId="0" nodeType="clickEffect">
+                                  <p:stCondLst>
+                                    <p:cond delay="0"/>
+                                  </p:stCondLst>
+                                  <p:childTnLst>
+                                    <p:set>
+                                      <p:cBhvr>
+                                        <p:cTn id="21" dur="1" fill="hold">
+                                          <p:stCondLst>
+                                            <p:cond delay="0"/>
+                                          </p:stCondLst>
+                                        </p:cTn>
+                                        <p:tgtEl>
+                                          <p:spTgt spid="9"/>
+                                        </p:tgtEl>
+                                        <p:attrNameLst>
+                                          <p:attrName>style.visibility</p:attrName>
+                                        </p:attrNameLst>
+                                      </p:cBhvr>
+                                      <p:to>
+                                        <p:strVal val="visible"/>
+                                      </p:to>
+                                    </p:set>
+                                    <p:animEffect transition="in" filter="wheel(1)">
+                                      <p:cBhvr>
+                                        <p:cTn id="22" dur="2000"/>
+                                        <p:tgtEl>
+                                          <p:spTgt spid="9"/>
+                                        </p:tgtEl>
+                                      </p:cBhvr>
+                                    </p:animEffect>
+                                  </p:childTnLst>
+                                </p:cTn>
+                              </p:par>
+                            </p:childTnLst>
+                          </p:cTn>
+                        </p:par>
+                      </p:childTnLst>
+                    </p:cTn>
+                  </p:par>
+                </p:childTnLst>
+              </p:cTn>
+              <p:prevCondLst>
+                <p:cond evt="onPrev" delay="0">
+                  <p:tgtEl>
+                    <p:sldTgt/>
+                  </p:tgtEl>
+                </p:cond>
+              </p:prevCondLst>
+              <p:nextCondLst>
+                <p:cond evt="onNext" delay="0">
+                  <p:tgtEl>
+                    <p:sldTgt/>
+                  </p:tgtEl>
+                </p:cond>
+              </p:nextCondLst>
+            </p:seq>
+          </p:childTnLst>
+        </p:cTn>
+      </p:par>
+    </p:tnLst>
+    <p:bldLst>
+      <p:bldP spid="3" grpId="0" animBg="1"/>
+      <p:bldP spid="5" grpId="0" animBg="1"/>
+      <p:bldP spid="9" grpId="0" animBg="1"/>
+    </p:bldLst>
+  </p:timing>
 </p:sld>
 </file>
 
@@ -6325,7 +6733,29 @@
                 <a:ea typeface="Calibri Light" pitchFamily="34" charset="-122"/>
                 <a:cs typeface="Calibri Light" pitchFamily="34" charset="-120"/>
               </a:rPr>
-              <a:t>La Validacion Emocional: El Pilar Fundamental</a:t>
+              <a:t>La </a:t>
+            </a:r>
+            <a:r>
+              <a:rPr lang="en-US" sz="2400" dirty="0" err="1">
+                <a:solidFill>
+                  <a:srgbClr val="2C3E35"/>
+                </a:solidFill>
+                <a:latin typeface="Calibri Light" pitchFamily="34" charset="0"/>
+                <a:ea typeface="Calibri Light" pitchFamily="34" charset="-122"/>
+                <a:cs typeface="Calibri Light" pitchFamily="34" charset="-120"/>
+              </a:rPr>
+              <a:t>Validación</a:t>
+            </a:r>
+            <a:r>
+              <a:rPr lang="en-US" sz="2400" dirty="0">
+                <a:solidFill>
+                  <a:srgbClr val="2C3E35"/>
+                </a:solidFill>
+                <a:latin typeface="Calibri Light" pitchFamily="34" charset="0"/>
+                <a:ea typeface="Calibri Light" pitchFamily="34" charset="-122"/>
+                <a:cs typeface="Calibri Light" pitchFamily="34" charset="-120"/>
+              </a:rPr>
+              <a:t> Emocional: El Pilar Fundamental</a:t>
             </a:r>
             <a:endParaRPr lang="en-US" sz="2400" dirty="0"/>
           </a:p>
@@ -6439,7 +6869,7 @@
                 <a:ea typeface="Calibri" pitchFamily="34" charset="-122"/>
                 <a:cs typeface="Calibri" pitchFamily="34" charset="-120"/>
               </a:rPr>
-              <a:t>Reconocer la realidad interna del nino. No es estar de acuerdo con la conducta, es decirle: </a:t>
+              <a:t>Reconocer la realidad interna del niño. No es estar de acuerdo con la conducta, es decirle: </a:t>
             </a:r>
             <a:r>
               <a:rPr lang="en-US" sz="1250" b="1" i="1" dirty="0">
@@ -6484,7 +6914,7 @@
           <a:bodyPr/>
           <a:lstStyle/>
           <a:p>
-            <a:endParaRPr lang="es-CO"/>
+            <a:endParaRPr lang="es-CO" dirty="0"/>
           </a:p>
         </p:txBody>
       </p:sp>
@@ -6521,7 +6951,18 @@
                 <a:ea typeface="Calibri" pitchFamily="34" charset="-122"/>
                 <a:cs typeface="Calibri" pitchFamily="34" charset="-120"/>
               </a:rPr>
-              <a:t>CON Validacion</a:t>
+              <a:t>CON </a:t>
+            </a:r>
+            <a:r>
+              <a:rPr lang="en-US" sz="1300" b="1" dirty="0" err="1">
+                <a:solidFill>
+                  <a:srgbClr val="FFFFFF"/>
+                </a:solidFill>
+                <a:latin typeface="Calibri" pitchFamily="34" charset="0"/>
+                <a:ea typeface="Calibri" pitchFamily="34" charset="-122"/>
+                <a:cs typeface="Calibri" pitchFamily="34" charset="-120"/>
+              </a:rPr>
+              <a:t>Validación</a:t>
             </a:r>
             <a:endParaRPr lang="en-US" sz="1300" dirty="0"/>
           </a:p>
@@ -6535,7 +6976,7 @@
         </p:nvSpPr>
         <p:spPr>
           <a:xfrm>
-            <a:off x="457200" y="2240280"/>
+            <a:off x="457200" y="2263140"/>
             <a:ext cx="4114800" cy="868680"/>
           </a:xfrm>
           <a:prstGeom prst="rect">
@@ -6643,7 +7084,7 @@
           <a:bodyPr/>
           <a:lstStyle/>
           <a:p>
-            <a:endParaRPr lang="es-CO"/>
+            <a:endParaRPr lang="es-CO" dirty="0"/>
           </a:p>
         </p:txBody>
       </p:sp>
@@ -6697,7 +7138,29 @@
                 <a:ea typeface="Calibri" pitchFamily="34" charset="-122"/>
                 <a:cs typeface="Calibri" pitchFamily="34" charset="-120"/>
               </a:rPr>
-              <a:t>emociones son validas.</a:t>
+              <a:t>emociones son </a:t>
+            </a:r>
+            <a:r>
+              <a:rPr lang="en-US" sz="1100" dirty="0" err="1">
+                <a:solidFill>
+                  <a:srgbClr val="2D2D2D"/>
+                </a:solidFill>
+                <a:latin typeface="Calibri" pitchFamily="34" charset="0"/>
+                <a:ea typeface="Calibri" pitchFamily="34" charset="-122"/>
+                <a:cs typeface="Calibri" pitchFamily="34" charset="-120"/>
+              </a:rPr>
+              <a:t>válidas</a:t>
+            </a:r>
+            <a:r>
+              <a:rPr lang="en-US" sz="1100" dirty="0">
+                <a:solidFill>
+                  <a:srgbClr val="2D2D2D"/>
+                </a:solidFill>
+                <a:latin typeface="Calibri" pitchFamily="34" charset="0"/>
+                <a:ea typeface="Calibri" pitchFamily="34" charset="-122"/>
+                <a:cs typeface="Calibri" pitchFamily="34" charset="-120"/>
+              </a:rPr>
+              <a:t>.</a:t>
             </a:r>
             <a:endParaRPr lang="en-US" sz="1100" dirty="0"/>
           </a:p>
@@ -6777,7 +7240,7 @@
               <a:buNone/>
             </a:pPr>
             <a:r>
-              <a:rPr lang="en-US" sz="1100" dirty="0">
+              <a:rPr lang="en-US" sz="1100" dirty="0" err="1">
                 <a:solidFill>
                   <a:srgbClr val="2D2D2D"/>
                 </a:solidFill>
@@ -6785,7 +7248,18 @@
                 <a:ea typeface="Calibri" pitchFamily="34" charset="-122"/>
                 <a:cs typeface="Calibri" pitchFamily="34" charset="-120"/>
               </a:rPr>
-              <a:t>regulacion emocional.</a:t>
+              <a:t>regulación</a:t>
+            </a:r>
+            <a:r>
+              <a:rPr lang="en-US" sz="1100" dirty="0">
+                <a:solidFill>
+                  <a:srgbClr val="2D2D2D"/>
+                </a:solidFill>
+                <a:latin typeface="Calibri" pitchFamily="34" charset="0"/>
+                <a:ea typeface="Calibri" pitchFamily="34" charset="-122"/>
+                <a:cs typeface="Calibri" pitchFamily="34" charset="-120"/>
+              </a:rPr>
+              <a:t> emocional.</a:t>
             </a:r>
             <a:endParaRPr lang="en-US" sz="1100" dirty="0"/>
           </a:p>
@@ -6856,7 +7330,18 @@
                 <a:ea typeface="Calibri" pitchFamily="34" charset="-122"/>
                 <a:cs typeface="Calibri" pitchFamily="34" charset="-120"/>
               </a:rPr>
-              <a:t>SIN Validacion</a:t>
+              <a:t>SIN </a:t>
+            </a:r>
+            <a:r>
+              <a:rPr lang="en-US" sz="1300" b="1" dirty="0" err="1">
+                <a:solidFill>
+                  <a:srgbClr val="FFFFFF"/>
+                </a:solidFill>
+                <a:latin typeface="Calibri" pitchFamily="34" charset="0"/>
+                <a:ea typeface="Calibri" pitchFamily="34" charset="-122"/>
+                <a:cs typeface="Calibri" pitchFamily="34" charset="-120"/>
+              </a:rPr>
+              <a:t>Validación</a:t>
             </a:r>
             <a:endParaRPr lang="en-US" sz="1300" dirty="0"/>
           </a:p>
@@ -7032,7 +7517,7 @@
                 <a:ea typeface="Calibri" pitchFamily="34" charset="-122"/>
                 <a:cs typeface="Calibri" pitchFamily="34" charset="-120"/>
               </a:rPr>
-              <a:t>El nino aprende: "mis</a:t>
+              <a:t>El niño aprende: "mis</a:t>
             </a:r>
             <a:endParaRPr lang="en-US" sz="1100" dirty="0"/>
           </a:p>
@@ -7120,16 +7605,10 @@
                 <a:ea typeface="Calibri" pitchFamily="34" charset="-122"/>
                 <a:cs typeface="Calibri" pitchFamily="34" charset="-120"/>
               </a:rPr>
-              <a:t>Baja autoestima, represion</a:t>
-            </a:r>
-            <a:endParaRPr lang="en-US" sz="1100" dirty="0"/>
-          </a:p>
-          <a:p>
-            <a:pPr marL="0" indent="0" algn="l">
-              <a:buNone/>
-            </a:pPr>
-            <a:r>
-              <a:rPr lang="en-US" sz="1100" dirty="0">
+              <a:t>Baja autoestima, </a:t>
+            </a:r>
+            <a:r>
+              <a:rPr lang="en-US" sz="1100" dirty="0" err="1">
                 <a:solidFill>
                   <a:srgbClr val="2D2D2D"/>
                 </a:solidFill>
@@ -7137,7 +7616,46 @@
                 <a:ea typeface="Calibri" pitchFamily="34" charset="-122"/>
                 <a:cs typeface="Calibri" pitchFamily="34" charset="-120"/>
               </a:rPr>
-              <a:t>emocional, desconexion.</a:t>
+              <a:t>represión</a:t>
+            </a:r>
+            <a:endParaRPr lang="en-US" sz="1100" dirty="0"/>
+          </a:p>
+          <a:p>
+            <a:pPr marL="0" indent="0" algn="l">
+              <a:buNone/>
+            </a:pPr>
+            <a:r>
+              <a:rPr lang="en-US" sz="1100" dirty="0">
+                <a:solidFill>
+                  <a:srgbClr val="2D2D2D"/>
+                </a:solidFill>
+                <a:latin typeface="Calibri" pitchFamily="34" charset="0"/>
+                <a:ea typeface="Calibri" pitchFamily="34" charset="-122"/>
+                <a:cs typeface="Calibri" pitchFamily="34" charset="-120"/>
+              </a:rPr>
+              <a:t>emocional, </a:t>
+            </a:r>
+            <a:r>
+              <a:rPr lang="en-US" sz="1100" dirty="0" err="1">
+                <a:solidFill>
+                  <a:srgbClr val="2D2D2D"/>
+                </a:solidFill>
+                <a:latin typeface="Calibri" pitchFamily="34" charset="0"/>
+                <a:ea typeface="Calibri" pitchFamily="34" charset="-122"/>
+                <a:cs typeface="Calibri" pitchFamily="34" charset="-120"/>
+              </a:rPr>
+              <a:t>desconexión</a:t>
+            </a:r>
+            <a:r>
+              <a:rPr lang="en-US" sz="1100" dirty="0">
+                <a:solidFill>
+                  <a:srgbClr val="2D2D2D"/>
+                </a:solidFill>
+                <a:latin typeface="Calibri" pitchFamily="34" charset="0"/>
+                <a:ea typeface="Calibri" pitchFamily="34" charset="-122"/>
+                <a:cs typeface="Calibri" pitchFamily="34" charset="-120"/>
+              </a:rPr>
+              <a:t>.</a:t>
             </a:r>
             <a:endParaRPr lang="en-US" sz="1100" dirty="0"/>
           </a:p>
@@ -7258,6 +7776,320 @@
   <p:clrMapOvr>
     <a:masterClrMapping/>
   </p:clrMapOvr>
+  <mc:AlternateContent xmlns:mc="http://schemas.openxmlformats.org/markup-compatibility/2006">
+    <mc:Choice xmlns:p14="http://schemas.microsoft.com/office/powerpoint/2010/main" Requires="p14">
+      <p:transition spd="slow">
+        <p14:flash/>
+      </p:transition>
+    </mc:Choice>
+    <mc:Fallback>
+      <p:transition spd="slow">
+        <p:fade/>
+      </p:transition>
+    </mc:Fallback>
+  </mc:AlternateContent>
+  <p:timing>
+    <p:tnLst>
+      <p:par>
+        <p:cTn id="1" dur="indefinite" restart="never" nodeType="tmRoot">
+          <p:childTnLst>
+            <p:seq concurrent="1" nextAc="seek">
+              <p:cTn id="2" dur="indefinite" nodeType="mainSeq">
+                <p:childTnLst>
+                  <p:par>
+                    <p:cTn id="3" fill="hold">
+                      <p:stCondLst>
+                        <p:cond delay="indefinite"/>
+                      </p:stCondLst>
+                      <p:childTnLst>
+                        <p:par>
+                          <p:cTn id="4" fill="hold">
+                            <p:stCondLst>
+                              <p:cond delay="0"/>
+                            </p:stCondLst>
+                            <p:childTnLst>
+                              <p:par>
+                                <p:cTn id="5" presetID="16" presetClass="entr" presetSubtype="21" fill="hold" grpId="0" nodeType="clickEffect">
+                                  <p:stCondLst>
+                                    <p:cond delay="0"/>
+                                  </p:stCondLst>
+                                  <p:childTnLst>
+                                    <p:set>
+                                      <p:cBhvr>
+                                        <p:cTn id="6" dur="1" fill="hold">
+                                          <p:stCondLst>
+                                            <p:cond delay="0"/>
+                                          </p:stCondLst>
+                                        </p:cTn>
+                                        <p:tgtEl>
+                                          <p:spTgt spid="4"/>
+                                        </p:tgtEl>
+                                        <p:attrNameLst>
+                                          <p:attrName>style.visibility</p:attrName>
+                                        </p:attrNameLst>
+                                      </p:cBhvr>
+                                      <p:to>
+                                        <p:strVal val="visible"/>
+                                      </p:to>
+                                    </p:set>
+                                    <p:animEffect transition="in" filter="barn(inVertical)">
+                                      <p:cBhvr>
+                                        <p:cTn id="7" dur="500"/>
+                                        <p:tgtEl>
+                                          <p:spTgt spid="4"/>
+                                        </p:tgtEl>
+                                      </p:cBhvr>
+                                    </p:animEffect>
+                                  </p:childTnLst>
+                                </p:cTn>
+                              </p:par>
+                            </p:childTnLst>
+                          </p:cTn>
+                        </p:par>
+                      </p:childTnLst>
+                    </p:cTn>
+                  </p:par>
+                  <p:par>
+                    <p:cTn id="8" fill="hold">
+                      <p:stCondLst>
+                        <p:cond delay="indefinite"/>
+                      </p:stCondLst>
+                      <p:childTnLst>
+                        <p:par>
+                          <p:cTn id="9" fill="hold">
+                            <p:stCondLst>
+                              <p:cond delay="0"/>
+                            </p:stCondLst>
+                            <p:childTnLst>
+                              <p:par>
+                                <p:cTn id="10" presetID="16" presetClass="entr" presetSubtype="21" fill="hold" grpId="0" nodeType="clickEffect">
+                                  <p:stCondLst>
+                                    <p:cond delay="0"/>
+                                  </p:stCondLst>
+                                  <p:childTnLst>
+                                    <p:set>
+                                      <p:cBhvr>
+                                        <p:cTn id="11" dur="1" fill="hold">
+                                          <p:stCondLst>
+                                            <p:cond delay="0"/>
+                                          </p:stCondLst>
+                                        </p:cTn>
+                                        <p:tgtEl>
+                                          <p:spTgt spid="7"/>
+                                        </p:tgtEl>
+                                        <p:attrNameLst>
+                                          <p:attrName>style.visibility</p:attrName>
+                                        </p:attrNameLst>
+                                      </p:cBhvr>
+                                      <p:to>
+                                        <p:strVal val="visible"/>
+                                      </p:to>
+                                    </p:set>
+                                    <p:animEffect transition="in" filter="barn(inVertical)">
+                                      <p:cBhvr>
+                                        <p:cTn id="12" dur="500"/>
+                                        <p:tgtEl>
+                                          <p:spTgt spid="7"/>
+                                        </p:tgtEl>
+                                      </p:cBhvr>
+                                    </p:animEffect>
+                                  </p:childTnLst>
+                                </p:cTn>
+                              </p:par>
+                            </p:childTnLst>
+                          </p:cTn>
+                        </p:par>
+                      </p:childTnLst>
+                    </p:cTn>
+                  </p:par>
+                  <p:par>
+                    <p:cTn id="13" fill="hold">
+                      <p:stCondLst>
+                        <p:cond delay="indefinite"/>
+                      </p:stCondLst>
+                      <p:childTnLst>
+                        <p:par>
+                          <p:cTn id="14" fill="hold">
+                            <p:stCondLst>
+                              <p:cond delay="0"/>
+                            </p:stCondLst>
+                            <p:childTnLst>
+                              <p:par>
+                                <p:cTn id="15" presetID="16" presetClass="entr" presetSubtype="21" fill="hold" grpId="0" nodeType="clickEffect">
+                                  <p:stCondLst>
+                                    <p:cond delay="0"/>
+                                  </p:stCondLst>
+                                  <p:childTnLst>
+                                    <p:set>
+                                      <p:cBhvr>
+                                        <p:cTn id="16" dur="1" fill="hold">
+                                          <p:stCondLst>
+                                            <p:cond delay="0"/>
+                                          </p:stCondLst>
+                                        </p:cTn>
+                                        <p:tgtEl>
+                                          <p:spTgt spid="8"/>
+                                        </p:tgtEl>
+                                        <p:attrNameLst>
+                                          <p:attrName>style.visibility</p:attrName>
+                                        </p:attrNameLst>
+                                      </p:cBhvr>
+                                      <p:to>
+                                        <p:strVal val="visible"/>
+                                      </p:to>
+                                    </p:set>
+                                    <p:animEffect transition="in" filter="barn(inVertical)">
+                                      <p:cBhvr>
+                                        <p:cTn id="17" dur="500"/>
+                                        <p:tgtEl>
+                                          <p:spTgt spid="8"/>
+                                        </p:tgtEl>
+                                      </p:cBhvr>
+                                    </p:animEffect>
+                                  </p:childTnLst>
+                                </p:cTn>
+                              </p:par>
+                            </p:childTnLst>
+                          </p:cTn>
+                        </p:par>
+                      </p:childTnLst>
+                    </p:cTn>
+                  </p:par>
+                  <p:par>
+                    <p:cTn id="18" fill="hold">
+                      <p:stCondLst>
+                        <p:cond delay="indefinite"/>
+                      </p:stCondLst>
+                      <p:childTnLst>
+                        <p:par>
+                          <p:cTn id="19" fill="hold">
+                            <p:stCondLst>
+                              <p:cond delay="0"/>
+                            </p:stCondLst>
+                            <p:childTnLst>
+                              <p:par>
+                                <p:cTn id="20" presetID="16" presetClass="entr" presetSubtype="21" fill="hold" grpId="0" nodeType="clickEffect">
+                                  <p:stCondLst>
+                                    <p:cond delay="0"/>
+                                  </p:stCondLst>
+                                  <p:childTnLst>
+                                    <p:set>
+                                      <p:cBhvr>
+                                        <p:cTn id="21" dur="1" fill="hold">
+                                          <p:stCondLst>
+                                            <p:cond delay="0"/>
+                                          </p:stCondLst>
+                                        </p:cTn>
+                                        <p:tgtEl>
+                                          <p:spTgt spid="10"/>
+                                        </p:tgtEl>
+                                        <p:attrNameLst>
+                                          <p:attrName>style.visibility</p:attrName>
+                                        </p:attrNameLst>
+                                      </p:cBhvr>
+                                      <p:to>
+                                        <p:strVal val="visible"/>
+                                      </p:to>
+                                    </p:set>
+                                    <p:animEffect transition="in" filter="barn(inVertical)">
+                                      <p:cBhvr>
+                                        <p:cTn id="22" dur="500"/>
+                                        <p:tgtEl>
+                                          <p:spTgt spid="10"/>
+                                        </p:tgtEl>
+                                      </p:cBhvr>
+                                    </p:animEffect>
+                                  </p:childTnLst>
+                                </p:cTn>
+                              </p:par>
+                            </p:childTnLst>
+                          </p:cTn>
+                        </p:par>
+                      </p:childTnLst>
+                    </p:cTn>
+                  </p:par>
+                  <p:par>
+                    <p:cTn id="23" fill="hold">
+                      <p:stCondLst>
+                        <p:cond delay="indefinite"/>
+                      </p:stCondLst>
+                      <p:childTnLst>
+                        <p:par>
+                          <p:cTn id="24" fill="hold">
+                            <p:stCondLst>
+                              <p:cond delay="0"/>
+                            </p:stCondLst>
+                            <p:childTnLst>
+                              <p:par>
+                                <p:cTn id="25" presetID="16" presetClass="entr" presetSubtype="21" fill="hold" grpId="0" nodeType="clickEffect">
+                                  <p:stCondLst>
+                                    <p:cond delay="0"/>
+                                  </p:stCondLst>
+                                  <p:childTnLst>
+                                    <p:set>
+                                      <p:cBhvr>
+                                        <p:cTn id="26" dur="1" fill="hold">
+                                          <p:stCondLst>
+                                            <p:cond delay="0"/>
+                                          </p:stCondLst>
+                                        </p:cTn>
+                                        <p:tgtEl>
+                                          <p:spTgt spid="20"/>
+                                        </p:tgtEl>
+                                        <p:attrNameLst>
+                                          <p:attrName>style.visibility</p:attrName>
+                                        </p:attrNameLst>
+                                      </p:cBhvr>
+                                      <p:to>
+                                        <p:strVal val="visible"/>
+                                      </p:to>
+                                    </p:set>
+                                    <p:animEffect transition="in" filter="barn(inVertical)">
+                                      <p:cBhvr>
+                                        <p:cTn id="27" dur="500"/>
+                                        <p:tgtEl>
+                                          <p:spTgt spid="20"/>
+                                        </p:tgtEl>
+                                      </p:cBhvr>
+                                    </p:animEffect>
+                                  </p:childTnLst>
+                                </p:cTn>
+                              </p:par>
+                            </p:childTnLst>
+                          </p:cTn>
+                        </p:par>
+                      </p:childTnLst>
+                    </p:cTn>
+                  </p:par>
+                </p:childTnLst>
+              </p:cTn>
+              <p:prevCondLst>
+                <p:cond evt="onPrev" delay="0">
+                  <p:tgtEl>
+                    <p:sldTgt/>
+                  </p:tgtEl>
+                </p:cond>
+              </p:prevCondLst>
+              <p:nextCondLst>
+                <p:cond evt="onNext" delay="0">
+                  <p:tgtEl>
+                    <p:sldTgt/>
+                  </p:tgtEl>
+                </p:cond>
+              </p:nextCondLst>
+            </p:seq>
+          </p:childTnLst>
+        </p:cTn>
+      </p:par>
+    </p:tnLst>
+    <p:bldLst>
+      <p:bldP spid="4" grpId="0" animBg="1"/>
+      <p:bldP spid="7" grpId="0" animBg="1"/>
+      <p:bldP spid="8" grpId="0" animBg="1"/>
+      <p:bldP spid="10" grpId="0" animBg="1"/>
+      <p:bldP spid="20" grpId="0" animBg="1"/>
+    </p:bldLst>
+  </p:timing>
 </p:sld>
 </file>
 
@@ -7346,7 +8178,8 @@
           <a:bodyPr/>
           <a:lstStyle/>
           <a:p>
-            <a:endParaRPr lang="es-CO"/>
+            <a:pPr algn="ctr"/>
+            <a:endParaRPr lang="es-CO" dirty="0"/>
           </a:p>
         </p:txBody>
       </p:sp>
@@ -7371,7 +8204,7 @@
           <a:bodyPr wrap="square" rtlCol="0" anchor="ctr"/>
           <a:lstStyle/>
           <a:p>
-            <a:pPr marL="0" indent="0" algn="l">
+            <a:pPr marL="0" indent="0" algn="ctr">
               <a:buNone/>
             </a:pPr>
             <a:r>
@@ -7383,7 +8216,73 @@
                 <a:ea typeface="Calibri Light" pitchFamily="34" charset="-122"/>
                 <a:cs typeface="Calibri Light" pitchFamily="34" charset="-120"/>
               </a:rPr>
-              <a:t>Estrategias para Acompanar en Momentos de Crisis</a:t>
+              <a:t>Estrategias para </a:t>
+            </a:r>
+            <a:r>
+              <a:rPr lang="en-US" sz="2200" dirty="0" err="1">
+                <a:solidFill>
+                  <a:srgbClr val="2C3E35"/>
+                </a:solidFill>
+                <a:latin typeface="Calibri Light" pitchFamily="34" charset="0"/>
+                <a:ea typeface="Calibri Light" pitchFamily="34" charset="-122"/>
+                <a:cs typeface="Calibri Light" pitchFamily="34" charset="-120"/>
+              </a:rPr>
+              <a:t>acompanar</a:t>
+            </a:r>
+            <a:r>
+              <a:rPr lang="en-US" sz="2200" dirty="0">
+                <a:solidFill>
+                  <a:srgbClr val="2C3E35"/>
+                </a:solidFill>
+                <a:latin typeface="Calibri Light" pitchFamily="34" charset="0"/>
+                <a:ea typeface="Calibri Light" pitchFamily="34" charset="-122"/>
+                <a:cs typeface="Calibri Light" pitchFamily="34" charset="-120"/>
+              </a:rPr>
+              <a:t> </a:t>
+            </a:r>
+            <a:r>
+              <a:rPr lang="en-US" sz="2200" dirty="0" err="1">
+                <a:solidFill>
+                  <a:srgbClr val="2C3E35"/>
+                </a:solidFill>
+                <a:latin typeface="Calibri Light" pitchFamily="34" charset="0"/>
+                <a:ea typeface="Calibri Light" pitchFamily="34" charset="-122"/>
+                <a:cs typeface="Calibri Light" pitchFamily="34" charset="-120"/>
+              </a:rPr>
+              <a:t>en</a:t>
+            </a:r>
+            <a:r>
+              <a:rPr lang="en-US" sz="2200" dirty="0">
+                <a:solidFill>
+                  <a:srgbClr val="2C3E35"/>
+                </a:solidFill>
+                <a:latin typeface="Calibri Light" pitchFamily="34" charset="0"/>
+                <a:ea typeface="Calibri Light" pitchFamily="34" charset="-122"/>
+                <a:cs typeface="Calibri Light" pitchFamily="34" charset="-120"/>
+              </a:rPr>
+              <a:t> </a:t>
+            </a:r>
+            <a:r>
+              <a:rPr lang="en-US" sz="2200" dirty="0" err="1">
+                <a:solidFill>
+                  <a:srgbClr val="2C3E35"/>
+                </a:solidFill>
+                <a:latin typeface="Calibri Light" pitchFamily="34" charset="0"/>
+                <a:ea typeface="Calibri Light" pitchFamily="34" charset="-122"/>
+                <a:cs typeface="Calibri Light" pitchFamily="34" charset="-120"/>
+              </a:rPr>
+              <a:t>momentos</a:t>
+            </a:r>
+            <a:r>
+              <a:rPr lang="en-US" sz="2200" dirty="0">
+                <a:solidFill>
+                  <a:srgbClr val="2C3E35"/>
+                </a:solidFill>
+                <a:latin typeface="Calibri Light" pitchFamily="34" charset="0"/>
+                <a:ea typeface="Calibri Light" pitchFamily="34" charset="-122"/>
+                <a:cs typeface="Calibri Light" pitchFamily="34" charset="-120"/>
+              </a:rPr>
+              <a:t> de crisis</a:t>
             </a:r>
             <a:endParaRPr lang="en-US" sz="2200" dirty="0"/>
           </a:p>
@@ -7749,7 +8648,7 @@
           <a:bodyPr/>
           <a:lstStyle/>
           <a:p>
-            <a:endParaRPr lang="es-CO"/>
+            <a:endParaRPr lang="es-CO" dirty="0"/>
           </a:p>
         </p:txBody>
       </p:sp>
@@ -8042,7 +8941,7 @@
           <a:bodyPr/>
           <a:lstStyle/>
           <a:p>
-            <a:endParaRPr lang="es-CO"/>
+            <a:endParaRPr lang="es-CO" dirty="0"/>
           </a:p>
         </p:txBody>
       </p:sp>
@@ -8399,6 +9298,1036 @@
   <p:clrMapOvr>
     <a:masterClrMapping/>
   </p:clrMapOvr>
+  <mc:AlternateContent xmlns:mc="http://schemas.openxmlformats.org/markup-compatibility/2006">
+    <mc:Choice xmlns:p14="http://schemas.microsoft.com/office/powerpoint/2010/main" Requires="p14">
+      <p:transition spd="slow" p14:dur="1200">
+        <p14:prism/>
+      </p:transition>
+    </mc:Choice>
+    <mc:Fallback>
+      <p:transition spd="slow">
+        <p:fade/>
+      </p:transition>
+    </mc:Fallback>
+  </mc:AlternateContent>
+  <p:timing>
+    <p:tnLst>
+      <p:par>
+        <p:cTn id="1" dur="indefinite" restart="never" nodeType="tmRoot">
+          <p:childTnLst>
+            <p:seq concurrent="1" nextAc="seek">
+              <p:cTn id="2" dur="indefinite" nodeType="mainSeq">
+                <p:childTnLst>
+                  <p:par>
+                    <p:cTn id="3" fill="hold">
+                      <p:stCondLst>
+                        <p:cond delay="indefinite"/>
+                      </p:stCondLst>
+                      <p:childTnLst>
+                        <p:par>
+                          <p:cTn id="4" fill="hold">
+                            <p:stCondLst>
+                              <p:cond delay="0"/>
+                            </p:stCondLst>
+                            <p:childTnLst>
+                              <p:par>
+                                <p:cTn id="5" presetID="31" presetClass="entr" presetSubtype="0" fill="hold" grpId="0" nodeType="clickEffect">
+                                  <p:stCondLst>
+                                    <p:cond delay="0"/>
+                                  </p:stCondLst>
+                                  <p:childTnLst>
+                                    <p:set>
+                                      <p:cBhvr>
+                                        <p:cTn id="6" dur="1" fill="hold">
+                                          <p:stCondLst>
+                                            <p:cond delay="0"/>
+                                          </p:stCondLst>
+                                        </p:cTn>
+                                        <p:tgtEl>
+                                          <p:spTgt spid="4"/>
+                                        </p:tgtEl>
+                                        <p:attrNameLst>
+                                          <p:attrName>style.visibility</p:attrName>
+                                        </p:attrNameLst>
+                                      </p:cBhvr>
+                                      <p:to>
+                                        <p:strVal val="visible"/>
+                                      </p:to>
+                                    </p:set>
+                                    <p:anim calcmode="lin" valueType="num">
+                                      <p:cBhvr>
+                                        <p:cTn id="7" dur="1000" fill="hold"/>
+                                        <p:tgtEl>
+                                          <p:spTgt spid="4"/>
+                                        </p:tgtEl>
+                                        <p:attrNameLst>
+                                          <p:attrName>ppt_w</p:attrName>
+                                        </p:attrNameLst>
+                                      </p:cBhvr>
+                                      <p:tavLst>
+                                        <p:tav tm="0">
+                                          <p:val>
+                                            <p:fltVal val="0"/>
+                                          </p:val>
+                                        </p:tav>
+                                        <p:tav tm="100000">
+                                          <p:val>
+                                            <p:strVal val="#ppt_w"/>
+                                          </p:val>
+                                        </p:tav>
+                                      </p:tavLst>
+                                    </p:anim>
+                                    <p:anim calcmode="lin" valueType="num">
+                                      <p:cBhvr>
+                                        <p:cTn id="8" dur="1000" fill="hold"/>
+                                        <p:tgtEl>
+                                          <p:spTgt spid="4"/>
+                                        </p:tgtEl>
+                                        <p:attrNameLst>
+                                          <p:attrName>ppt_h</p:attrName>
+                                        </p:attrNameLst>
+                                      </p:cBhvr>
+                                      <p:tavLst>
+                                        <p:tav tm="0">
+                                          <p:val>
+                                            <p:fltVal val="0"/>
+                                          </p:val>
+                                        </p:tav>
+                                        <p:tav tm="100000">
+                                          <p:val>
+                                            <p:strVal val="#ppt_h"/>
+                                          </p:val>
+                                        </p:tav>
+                                      </p:tavLst>
+                                    </p:anim>
+                                    <p:anim calcmode="lin" valueType="num">
+                                      <p:cBhvr>
+                                        <p:cTn id="9" dur="1000" fill="hold"/>
+                                        <p:tgtEl>
+                                          <p:spTgt spid="4"/>
+                                        </p:tgtEl>
+                                        <p:attrNameLst>
+                                          <p:attrName>style.rotation</p:attrName>
+                                        </p:attrNameLst>
+                                      </p:cBhvr>
+                                      <p:tavLst>
+                                        <p:tav tm="0">
+                                          <p:val>
+                                            <p:fltVal val="90"/>
+                                          </p:val>
+                                        </p:tav>
+                                        <p:tav tm="100000">
+                                          <p:val>
+                                            <p:fltVal val="0"/>
+                                          </p:val>
+                                        </p:tav>
+                                      </p:tavLst>
+                                    </p:anim>
+                                    <p:animEffect transition="in" filter="fade">
+                                      <p:cBhvr>
+                                        <p:cTn id="10" dur="1000"/>
+                                        <p:tgtEl>
+                                          <p:spTgt spid="4"/>
+                                        </p:tgtEl>
+                                      </p:cBhvr>
+                                    </p:animEffect>
+                                  </p:childTnLst>
+                                </p:cTn>
+                              </p:par>
+                            </p:childTnLst>
+                          </p:cTn>
+                        </p:par>
+                      </p:childTnLst>
+                    </p:cTn>
+                  </p:par>
+                  <p:par>
+                    <p:cTn id="11" fill="hold">
+                      <p:stCondLst>
+                        <p:cond delay="indefinite"/>
+                      </p:stCondLst>
+                      <p:childTnLst>
+                        <p:par>
+                          <p:cTn id="12" fill="hold">
+                            <p:stCondLst>
+                              <p:cond delay="0"/>
+                            </p:stCondLst>
+                            <p:childTnLst>
+                              <p:par>
+                                <p:cTn id="13" presetID="31" presetClass="entr" presetSubtype="0" fill="hold" grpId="0" nodeType="clickEffect">
+                                  <p:stCondLst>
+                                    <p:cond delay="0"/>
+                                  </p:stCondLst>
+                                  <p:childTnLst>
+                                    <p:set>
+                                      <p:cBhvr>
+                                        <p:cTn id="14" dur="1" fill="hold">
+                                          <p:stCondLst>
+                                            <p:cond delay="0"/>
+                                          </p:stCondLst>
+                                        </p:cTn>
+                                        <p:tgtEl>
+                                          <p:spTgt spid="27"/>
+                                        </p:tgtEl>
+                                        <p:attrNameLst>
+                                          <p:attrName>style.visibility</p:attrName>
+                                        </p:attrNameLst>
+                                      </p:cBhvr>
+                                      <p:to>
+                                        <p:strVal val="visible"/>
+                                      </p:to>
+                                    </p:set>
+                                    <p:anim calcmode="lin" valueType="num">
+                                      <p:cBhvr>
+                                        <p:cTn id="15" dur="1000" fill="hold"/>
+                                        <p:tgtEl>
+                                          <p:spTgt spid="27"/>
+                                        </p:tgtEl>
+                                        <p:attrNameLst>
+                                          <p:attrName>ppt_w</p:attrName>
+                                        </p:attrNameLst>
+                                      </p:cBhvr>
+                                      <p:tavLst>
+                                        <p:tav tm="0">
+                                          <p:val>
+                                            <p:fltVal val="0"/>
+                                          </p:val>
+                                        </p:tav>
+                                        <p:tav tm="100000">
+                                          <p:val>
+                                            <p:strVal val="#ppt_w"/>
+                                          </p:val>
+                                        </p:tav>
+                                      </p:tavLst>
+                                    </p:anim>
+                                    <p:anim calcmode="lin" valueType="num">
+                                      <p:cBhvr>
+                                        <p:cTn id="16" dur="1000" fill="hold"/>
+                                        <p:tgtEl>
+                                          <p:spTgt spid="27"/>
+                                        </p:tgtEl>
+                                        <p:attrNameLst>
+                                          <p:attrName>ppt_h</p:attrName>
+                                        </p:attrNameLst>
+                                      </p:cBhvr>
+                                      <p:tavLst>
+                                        <p:tav tm="0">
+                                          <p:val>
+                                            <p:fltVal val="0"/>
+                                          </p:val>
+                                        </p:tav>
+                                        <p:tav tm="100000">
+                                          <p:val>
+                                            <p:strVal val="#ppt_h"/>
+                                          </p:val>
+                                        </p:tav>
+                                      </p:tavLst>
+                                    </p:anim>
+                                    <p:anim calcmode="lin" valueType="num">
+                                      <p:cBhvr>
+                                        <p:cTn id="17" dur="1000" fill="hold"/>
+                                        <p:tgtEl>
+                                          <p:spTgt spid="27"/>
+                                        </p:tgtEl>
+                                        <p:attrNameLst>
+                                          <p:attrName>style.rotation</p:attrName>
+                                        </p:attrNameLst>
+                                      </p:cBhvr>
+                                      <p:tavLst>
+                                        <p:tav tm="0">
+                                          <p:val>
+                                            <p:fltVal val="90"/>
+                                          </p:val>
+                                        </p:tav>
+                                        <p:tav tm="100000">
+                                          <p:val>
+                                            <p:fltVal val="0"/>
+                                          </p:val>
+                                        </p:tav>
+                                      </p:tavLst>
+                                    </p:anim>
+                                    <p:animEffect transition="in" filter="fade">
+                                      <p:cBhvr>
+                                        <p:cTn id="18" dur="1000"/>
+                                        <p:tgtEl>
+                                          <p:spTgt spid="27"/>
+                                        </p:tgtEl>
+                                      </p:cBhvr>
+                                    </p:animEffect>
+                                  </p:childTnLst>
+                                </p:cTn>
+                              </p:par>
+                            </p:childTnLst>
+                          </p:cTn>
+                        </p:par>
+                      </p:childTnLst>
+                    </p:cTn>
+                  </p:par>
+                  <p:par>
+                    <p:cTn id="19" fill="hold">
+                      <p:stCondLst>
+                        <p:cond delay="indefinite"/>
+                      </p:stCondLst>
+                      <p:childTnLst>
+                        <p:par>
+                          <p:cTn id="20" fill="hold">
+                            <p:stCondLst>
+                              <p:cond delay="0"/>
+                            </p:stCondLst>
+                            <p:childTnLst>
+                              <p:par>
+                                <p:cTn id="21" presetID="31" presetClass="entr" presetSubtype="0" fill="hold" grpId="0" nodeType="clickEffect">
+                                  <p:stCondLst>
+                                    <p:cond delay="0"/>
+                                  </p:stCondLst>
+                                  <p:childTnLst>
+                                    <p:set>
+                                      <p:cBhvr>
+                                        <p:cTn id="22" dur="1" fill="hold">
+                                          <p:stCondLst>
+                                            <p:cond delay="0"/>
+                                          </p:stCondLst>
+                                        </p:cTn>
+                                        <p:tgtEl>
+                                          <p:spTgt spid="11"/>
+                                        </p:tgtEl>
+                                        <p:attrNameLst>
+                                          <p:attrName>style.visibility</p:attrName>
+                                        </p:attrNameLst>
+                                      </p:cBhvr>
+                                      <p:to>
+                                        <p:strVal val="visible"/>
+                                      </p:to>
+                                    </p:set>
+                                    <p:anim calcmode="lin" valueType="num">
+                                      <p:cBhvr>
+                                        <p:cTn id="23" dur="1000" fill="hold"/>
+                                        <p:tgtEl>
+                                          <p:spTgt spid="11"/>
+                                        </p:tgtEl>
+                                        <p:attrNameLst>
+                                          <p:attrName>ppt_w</p:attrName>
+                                        </p:attrNameLst>
+                                      </p:cBhvr>
+                                      <p:tavLst>
+                                        <p:tav tm="0">
+                                          <p:val>
+                                            <p:fltVal val="0"/>
+                                          </p:val>
+                                        </p:tav>
+                                        <p:tav tm="100000">
+                                          <p:val>
+                                            <p:strVal val="#ppt_w"/>
+                                          </p:val>
+                                        </p:tav>
+                                      </p:tavLst>
+                                    </p:anim>
+                                    <p:anim calcmode="lin" valueType="num">
+                                      <p:cBhvr>
+                                        <p:cTn id="24" dur="1000" fill="hold"/>
+                                        <p:tgtEl>
+                                          <p:spTgt spid="11"/>
+                                        </p:tgtEl>
+                                        <p:attrNameLst>
+                                          <p:attrName>ppt_h</p:attrName>
+                                        </p:attrNameLst>
+                                      </p:cBhvr>
+                                      <p:tavLst>
+                                        <p:tav tm="0">
+                                          <p:val>
+                                            <p:fltVal val="0"/>
+                                          </p:val>
+                                        </p:tav>
+                                        <p:tav tm="100000">
+                                          <p:val>
+                                            <p:strVal val="#ppt_h"/>
+                                          </p:val>
+                                        </p:tav>
+                                      </p:tavLst>
+                                    </p:anim>
+                                    <p:anim calcmode="lin" valueType="num">
+                                      <p:cBhvr>
+                                        <p:cTn id="25" dur="1000" fill="hold"/>
+                                        <p:tgtEl>
+                                          <p:spTgt spid="11"/>
+                                        </p:tgtEl>
+                                        <p:attrNameLst>
+                                          <p:attrName>style.rotation</p:attrName>
+                                        </p:attrNameLst>
+                                      </p:cBhvr>
+                                      <p:tavLst>
+                                        <p:tav tm="0">
+                                          <p:val>
+                                            <p:fltVal val="90"/>
+                                          </p:val>
+                                        </p:tav>
+                                        <p:tav tm="100000">
+                                          <p:val>
+                                            <p:fltVal val="0"/>
+                                          </p:val>
+                                        </p:tav>
+                                      </p:tavLst>
+                                    </p:anim>
+                                    <p:animEffect transition="in" filter="fade">
+                                      <p:cBhvr>
+                                        <p:cTn id="26" dur="1000"/>
+                                        <p:tgtEl>
+                                          <p:spTgt spid="11"/>
+                                        </p:tgtEl>
+                                      </p:cBhvr>
+                                    </p:animEffect>
+                                  </p:childTnLst>
+                                </p:cTn>
+                              </p:par>
+                            </p:childTnLst>
+                          </p:cTn>
+                        </p:par>
+                      </p:childTnLst>
+                    </p:cTn>
+                  </p:par>
+                  <p:par>
+                    <p:cTn id="27" fill="hold">
+                      <p:stCondLst>
+                        <p:cond delay="indefinite"/>
+                      </p:stCondLst>
+                      <p:childTnLst>
+                        <p:par>
+                          <p:cTn id="28" fill="hold">
+                            <p:stCondLst>
+                              <p:cond delay="0"/>
+                            </p:stCondLst>
+                            <p:childTnLst>
+                              <p:par>
+                                <p:cTn id="29" presetID="31" presetClass="entr" presetSubtype="0" fill="hold" grpId="0" nodeType="clickEffect">
+                                  <p:stCondLst>
+                                    <p:cond delay="0"/>
+                                  </p:stCondLst>
+                                  <p:childTnLst>
+                                    <p:set>
+                                      <p:cBhvr>
+                                        <p:cTn id="30" dur="1" fill="hold">
+                                          <p:stCondLst>
+                                            <p:cond delay="0"/>
+                                          </p:stCondLst>
+                                        </p:cTn>
+                                        <p:tgtEl>
+                                          <p:spTgt spid="19"/>
+                                        </p:tgtEl>
+                                        <p:attrNameLst>
+                                          <p:attrName>style.visibility</p:attrName>
+                                        </p:attrNameLst>
+                                      </p:cBhvr>
+                                      <p:to>
+                                        <p:strVal val="visible"/>
+                                      </p:to>
+                                    </p:set>
+                                    <p:anim calcmode="lin" valueType="num">
+                                      <p:cBhvr>
+                                        <p:cTn id="31" dur="1000" fill="hold"/>
+                                        <p:tgtEl>
+                                          <p:spTgt spid="19"/>
+                                        </p:tgtEl>
+                                        <p:attrNameLst>
+                                          <p:attrName>ppt_w</p:attrName>
+                                        </p:attrNameLst>
+                                      </p:cBhvr>
+                                      <p:tavLst>
+                                        <p:tav tm="0">
+                                          <p:val>
+                                            <p:fltVal val="0"/>
+                                          </p:val>
+                                        </p:tav>
+                                        <p:tav tm="100000">
+                                          <p:val>
+                                            <p:strVal val="#ppt_w"/>
+                                          </p:val>
+                                        </p:tav>
+                                      </p:tavLst>
+                                    </p:anim>
+                                    <p:anim calcmode="lin" valueType="num">
+                                      <p:cBhvr>
+                                        <p:cTn id="32" dur="1000" fill="hold"/>
+                                        <p:tgtEl>
+                                          <p:spTgt spid="19"/>
+                                        </p:tgtEl>
+                                        <p:attrNameLst>
+                                          <p:attrName>ppt_h</p:attrName>
+                                        </p:attrNameLst>
+                                      </p:cBhvr>
+                                      <p:tavLst>
+                                        <p:tav tm="0">
+                                          <p:val>
+                                            <p:fltVal val="0"/>
+                                          </p:val>
+                                        </p:tav>
+                                        <p:tav tm="100000">
+                                          <p:val>
+                                            <p:strVal val="#ppt_h"/>
+                                          </p:val>
+                                        </p:tav>
+                                      </p:tavLst>
+                                    </p:anim>
+                                    <p:anim calcmode="lin" valueType="num">
+                                      <p:cBhvr>
+                                        <p:cTn id="33" dur="1000" fill="hold"/>
+                                        <p:tgtEl>
+                                          <p:spTgt spid="19"/>
+                                        </p:tgtEl>
+                                        <p:attrNameLst>
+                                          <p:attrName>style.rotation</p:attrName>
+                                        </p:attrNameLst>
+                                      </p:cBhvr>
+                                      <p:tavLst>
+                                        <p:tav tm="0">
+                                          <p:val>
+                                            <p:fltVal val="90"/>
+                                          </p:val>
+                                        </p:tav>
+                                        <p:tav tm="100000">
+                                          <p:val>
+                                            <p:fltVal val="0"/>
+                                          </p:val>
+                                        </p:tav>
+                                      </p:tavLst>
+                                    </p:anim>
+                                    <p:animEffect transition="in" filter="fade">
+                                      <p:cBhvr>
+                                        <p:cTn id="34" dur="1000"/>
+                                        <p:tgtEl>
+                                          <p:spTgt spid="19"/>
+                                        </p:tgtEl>
+                                      </p:cBhvr>
+                                    </p:animEffect>
+                                  </p:childTnLst>
+                                </p:cTn>
+                              </p:par>
+                            </p:childTnLst>
+                          </p:cTn>
+                        </p:par>
+                      </p:childTnLst>
+                    </p:cTn>
+                  </p:par>
+                  <p:par>
+                    <p:cTn id="35" fill="hold">
+                      <p:stCondLst>
+                        <p:cond delay="indefinite"/>
+                      </p:stCondLst>
+                      <p:childTnLst>
+                        <p:par>
+                          <p:cTn id="36" fill="hold">
+                            <p:stCondLst>
+                              <p:cond delay="0"/>
+                            </p:stCondLst>
+                            <p:childTnLst>
+                              <p:par>
+                                <p:cTn id="37" presetID="31" presetClass="entr" presetSubtype="0" fill="hold" grpId="0" nodeType="clickEffect">
+                                  <p:stCondLst>
+                                    <p:cond delay="0"/>
+                                  </p:stCondLst>
+                                  <p:childTnLst>
+                                    <p:set>
+                                      <p:cBhvr>
+                                        <p:cTn id="38" dur="1" fill="hold">
+                                          <p:stCondLst>
+                                            <p:cond delay="0"/>
+                                          </p:stCondLst>
+                                        </p:cTn>
+                                        <p:tgtEl>
+                                          <p:spTgt spid="6"/>
+                                        </p:tgtEl>
+                                        <p:attrNameLst>
+                                          <p:attrName>style.visibility</p:attrName>
+                                        </p:attrNameLst>
+                                      </p:cBhvr>
+                                      <p:to>
+                                        <p:strVal val="visible"/>
+                                      </p:to>
+                                    </p:set>
+                                    <p:anim calcmode="lin" valueType="num">
+                                      <p:cBhvr>
+                                        <p:cTn id="39" dur="1000" fill="hold"/>
+                                        <p:tgtEl>
+                                          <p:spTgt spid="6"/>
+                                        </p:tgtEl>
+                                        <p:attrNameLst>
+                                          <p:attrName>ppt_w</p:attrName>
+                                        </p:attrNameLst>
+                                      </p:cBhvr>
+                                      <p:tavLst>
+                                        <p:tav tm="0">
+                                          <p:val>
+                                            <p:fltVal val="0"/>
+                                          </p:val>
+                                        </p:tav>
+                                        <p:tav tm="100000">
+                                          <p:val>
+                                            <p:strVal val="#ppt_w"/>
+                                          </p:val>
+                                        </p:tav>
+                                      </p:tavLst>
+                                    </p:anim>
+                                    <p:anim calcmode="lin" valueType="num">
+                                      <p:cBhvr>
+                                        <p:cTn id="40" dur="1000" fill="hold"/>
+                                        <p:tgtEl>
+                                          <p:spTgt spid="6"/>
+                                        </p:tgtEl>
+                                        <p:attrNameLst>
+                                          <p:attrName>ppt_h</p:attrName>
+                                        </p:attrNameLst>
+                                      </p:cBhvr>
+                                      <p:tavLst>
+                                        <p:tav tm="0">
+                                          <p:val>
+                                            <p:fltVal val="0"/>
+                                          </p:val>
+                                        </p:tav>
+                                        <p:tav tm="100000">
+                                          <p:val>
+                                            <p:strVal val="#ppt_h"/>
+                                          </p:val>
+                                        </p:tav>
+                                      </p:tavLst>
+                                    </p:anim>
+                                    <p:anim calcmode="lin" valueType="num">
+                                      <p:cBhvr>
+                                        <p:cTn id="41" dur="1000" fill="hold"/>
+                                        <p:tgtEl>
+                                          <p:spTgt spid="6"/>
+                                        </p:tgtEl>
+                                        <p:attrNameLst>
+                                          <p:attrName>style.rotation</p:attrName>
+                                        </p:attrNameLst>
+                                      </p:cBhvr>
+                                      <p:tavLst>
+                                        <p:tav tm="0">
+                                          <p:val>
+                                            <p:fltVal val="90"/>
+                                          </p:val>
+                                        </p:tav>
+                                        <p:tav tm="100000">
+                                          <p:val>
+                                            <p:fltVal val="0"/>
+                                          </p:val>
+                                        </p:tav>
+                                      </p:tavLst>
+                                    </p:anim>
+                                    <p:animEffect transition="in" filter="fade">
+                                      <p:cBhvr>
+                                        <p:cTn id="42" dur="1000"/>
+                                        <p:tgtEl>
+                                          <p:spTgt spid="6"/>
+                                        </p:tgtEl>
+                                      </p:cBhvr>
+                                    </p:animEffect>
+                                  </p:childTnLst>
+                                </p:cTn>
+                              </p:par>
+                            </p:childTnLst>
+                          </p:cTn>
+                        </p:par>
+                      </p:childTnLst>
+                    </p:cTn>
+                  </p:par>
+                  <p:par>
+                    <p:cTn id="43" fill="hold">
+                      <p:stCondLst>
+                        <p:cond delay="indefinite"/>
+                      </p:stCondLst>
+                      <p:childTnLst>
+                        <p:par>
+                          <p:cTn id="44" fill="hold">
+                            <p:stCondLst>
+                              <p:cond delay="0"/>
+                            </p:stCondLst>
+                            <p:childTnLst>
+                              <p:par>
+                                <p:cTn id="45" presetID="31" presetClass="entr" presetSubtype="0" fill="hold" grpId="0" nodeType="clickEffect">
+                                  <p:stCondLst>
+                                    <p:cond delay="0"/>
+                                  </p:stCondLst>
+                                  <p:childTnLst>
+                                    <p:set>
+                                      <p:cBhvr>
+                                        <p:cTn id="46" dur="1" fill="hold">
+                                          <p:stCondLst>
+                                            <p:cond delay="0"/>
+                                          </p:stCondLst>
+                                        </p:cTn>
+                                        <p:tgtEl>
+                                          <p:spTgt spid="14"/>
+                                        </p:tgtEl>
+                                        <p:attrNameLst>
+                                          <p:attrName>style.visibility</p:attrName>
+                                        </p:attrNameLst>
+                                      </p:cBhvr>
+                                      <p:to>
+                                        <p:strVal val="visible"/>
+                                      </p:to>
+                                    </p:set>
+                                    <p:anim calcmode="lin" valueType="num">
+                                      <p:cBhvr>
+                                        <p:cTn id="47" dur="1000" fill="hold"/>
+                                        <p:tgtEl>
+                                          <p:spTgt spid="14"/>
+                                        </p:tgtEl>
+                                        <p:attrNameLst>
+                                          <p:attrName>ppt_w</p:attrName>
+                                        </p:attrNameLst>
+                                      </p:cBhvr>
+                                      <p:tavLst>
+                                        <p:tav tm="0">
+                                          <p:val>
+                                            <p:fltVal val="0"/>
+                                          </p:val>
+                                        </p:tav>
+                                        <p:tav tm="100000">
+                                          <p:val>
+                                            <p:strVal val="#ppt_w"/>
+                                          </p:val>
+                                        </p:tav>
+                                      </p:tavLst>
+                                    </p:anim>
+                                    <p:anim calcmode="lin" valueType="num">
+                                      <p:cBhvr>
+                                        <p:cTn id="48" dur="1000" fill="hold"/>
+                                        <p:tgtEl>
+                                          <p:spTgt spid="14"/>
+                                        </p:tgtEl>
+                                        <p:attrNameLst>
+                                          <p:attrName>ppt_h</p:attrName>
+                                        </p:attrNameLst>
+                                      </p:cBhvr>
+                                      <p:tavLst>
+                                        <p:tav tm="0">
+                                          <p:val>
+                                            <p:fltVal val="0"/>
+                                          </p:val>
+                                        </p:tav>
+                                        <p:tav tm="100000">
+                                          <p:val>
+                                            <p:strVal val="#ppt_h"/>
+                                          </p:val>
+                                        </p:tav>
+                                      </p:tavLst>
+                                    </p:anim>
+                                    <p:anim calcmode="lin" valueType="num">
+                                      <p:cBhvr>
+                                        <p:cTn id="49" dur="1000" fill="hold"/>
+                                        <p:tgtEl>
+                                          <p:spTgt spid="14"/>
+                                        </p:tgtEl>
+                                        <p:attrNameLst>
+                                          <p:attrName>style.rotation</p:attrName>
+                                        </p:attrNameLst>
+                                      </p:cBhvr>
+                                      <p:tavLst>
+                                        <p:tav tm="0">
+                                          <p:val>
+                                            <p:fltVal val="90"/>
+                                          </p:val>
+                                        </p:tav>
+                                        <p:tav tm="100000">
+                                          <p:val>
+                                            <p:fltVal val="0"/>
+                                          </p:val>
+                                        </p:tav>
+                                      </p:tavLst>
+                                    </p:anim>
+                                    <p:animEffect transition="in" filter="fade">
+                                      <p:cBhvr>
+                                        <p:cTn id="50" dur="1000"/>
+                                        <p:tgtEl>
+                                          <p:spTgt spid="14"/>
+                                        </p:tgtEl>
+                                      </p:cBhvr>
+                                    </p:animEffect>
+                                  </p:childTnLst>
+                                </p:cTn>
+                              </p:par>
+                            </p:childTnLst>
+                          </p:cTn>
+                        </p:par>
+                      </p:childTnLst>
+                    </p:cTn>
+                  </p:par>
+                  <p:par>
+                    <p:cTn id="51" fill="hold">
+                      <p:stCondLst>
+                        <p:cond delay="indefinite"/>
+                      </p:stCondLst>
+                      <p:childTnLst>
+                        <p:par>
+                          <p:cTn id="52" fill="hold">
+                            <p:stCondLst>
+                              <p:cond delay="0"/>
+                            </p:stCondLst>
+                            <p:childTnLst>
+                              <p:par>
+                                <p:cTn id="53" presetID="31" presetClass="entr" presetSubtype="0" fill="hold" grpId="0" nodeType="clickEffect">
+                                  <p:stCondLst>
+                                    <p:cond delay="0"/>
+                                  </p:stCondLst>
+                                  <p:childTnLst>
+                                    <p:set>
+                                      <p:cBhvr>
+                                        <p:cTn id="54" dur="1" fill="hold">
+                                          <p:stCondLst>
+                                            <p:cond delay="0"/>
+                                          </p:stCondLst>
+                                        </p:cTn>
+                                        <p:tgtEl>
+                                          <p:spTgt spid="22"/>
+                                        </p:tgtEl>
+                                        <p:attrNameLst>
+                                          <p:attrName>style.visibility</p:attrName>
+                                        </p:attrNameLst>
+                                      </p:cBhvr>
+                                      <p:to>
+                                        <p:strVal val="visible"/>
+                                      </p:to>
+                                    </p:set>
+                                    <p:anim calcmode="lin" valueType="num">
+                                      <p:cBhvr>
+                                        <p:cTn id="55" dur="1000" fill="hold"/>
+                                        <p:tgtEl>
+                                          <p:spTgt spid="22"/>
+                                        </p:tgtEl>
+                                        <p:attrNameLst>
+                                          <p:attrName>ppt_w</p:attrName>
+                                        </p:attrNameLst>
+                                      </p:cBhvr>
+                                      <p:tavLst>
+                                        <p:tav tm="0">
+                                          <p:val>
+                                            <p:fltVal val="0"/>
+                                          </p:val>
+                                        </p:tav>
+                                        <p:tav tm="100000">
+                                          <p:val>
+                                            <p:strVal val="#ppt_w"/>
+                                          </p:val>
+                                        </p:tav>
+                                      </p:tavLst>
+                                    </p:anim>
+                                    <p:anim calcmode="lin" valueType="num">
+                                      <p:cBhvr>
+                                        <p:cTn id="56" dur="1000" fill="hold"/>
+                                        <p:tgtEl>
+                                          <p:spTgt spid="22"/>
+                                        </p:tgtEl>
+                                        <p:attrNameLst>
+                                          <p:attrName>ppt_h</p:attrName>
+                                        </p:attrNameLst>
+                                      </p:cBhvr>
+                                      <p:tavLst>
+                                        <p:tav tm="0">
+                                          <p:val>
+                                            <p:fltVal val="0"/>
+                                          </p:val>
+                                        </p:tav>
+                                        <p:tav tm="100000">
+                                          <p:val>
+                                            <p:strVal val="#ppt_h"/>
+                                          </p:val>
+                                        </p:tav>
+                                      </p:tavLst>
+                                    </p:anim>
+                                    <p:anim calcmode="lin" valueType="num">
+                                      <p:cBhvr>
+                                        <p:cTn id="57" dur="1000" fill="hold"/>
+                                        <p:tgtEl>
+                                          <p:spTgt spid="22"/>
+                                        </p:tgtEl>
+                                        <p:attrNameLst>
+                                          <p:attrName>style.rotation</p:attrName>
+                                        </p:attrNameLst>
+                                      </p:cBhvr>
+                                      <p:tavLst>
+                                        <p:tav tm="0">
+                                          <p:val>
+                                            <p:fltVal val="90"/>
+                                          </p:val>
+                                        </p:tav>
+                                        <p:tav tm="100000">
+                                          <p:val>
+                                            <p:fltVal val="0"/>
+                                          </p:val>
+                                        </p:tav>
+                                      </p:tavLst>
+                                    </p:anim>
+                                    <p:animEffect transition="in" filter="fade">
+                                      <p:cBhvr>
+                                        <p:cTn id="58" dur="1000"/>
+                                        <p:tgtEl>
+                                          <p:spTgt spid="22"/>
+                                        </p:tgtEl>
+                                      </p:cBhvr>
+                                    </p:animEffect>
+                                  </p:childTnLst>
+                                </p:cTn>
+                              </p:par>
+                            </p:childTnLst>
+                          </p:cTn>
+                        </p:par>
+                      </p:childTnLst>
+                    </p:cTn>
+                  </p:par>
+                  <p:par>
+                    <p:cTn id="59" fill="hold">
+                      <p:stCondLst>
+                        <p:cond delay="indefinite"/>
+                      </p:stCondLst>
+                      <p:childTnLst>
+                        <p:par>
+                          <p:cTn id="60" fill="hold">
+                            <p:stCondLst>
+                              <p:cond delay="0"/>
+                            </p:stCondLst>
+                            <p:childTnLst>
+                              <p:par>
+                                <p:cTn id="61" presetID="31" presetClass="entr" presetSubtype="0" fill="hold" grpId="0" nodeType="clickEffect">
+                                  <p:stCondLst>
+                                    <p:cond delay="0"/>
+                                  </p:stCondLst>
+                                  <p:childTnLst>
+                                    <p:set>
+                                      <p:cBhvr>
+                                        <p:cTn id="62" dur="1" fill="hold">
+                                          <p:stCondLst>
+                                            <p:cond delay="0"/>
+                                          </p:stCondLst>
+                                        </p:cTn>
+                                        <p:tgtEl>
+                                          <p:spTgt spid="29"/>
+                                        </p:tgtEl>
+                                        <p:attrNameLst>
+                                          <p:attrName>style.visibility</p:attrName>
+                                        </p:attrNameLst>
+                                      </p:cBhvr>
+                                      <p:to>
+                                        <p:strVal val="visible"/>
+                                      </p:to>
+                                    </p:set>
+                                    <p:anim calcmode="lin" valueType="num">
+                                      <p:cBhvr>
+                                        <p:cTn id="63" dur="1000" fill="hold"/>
+                                        <p:tgtEl>
+                                          <p:spTgt spid="29"/>
+                                        </p:tgtEl>
+                                        <p:attrNameLst>
+                                          <p:attrName>ppt_w</p:attrName>
+                                        </p:attrNameLst>
+                                      </p:cBhvr>
+                                      <p:tavLst>
+                                        <p:tav tm="0">
+                                          <p:val>
+                                            <p:fltVal val="0"/>
+                                          </p:val>
+                                        </p:tav>
+                                        <p:tav tm="100000">
+                                          <p:val>
+                                            <p:strVal val="#ppt_w"/>
+                                          </p:val>
+                                        </p:tav>
+                                      </p:tavLst>
+                                    </p:anim>
+                                    <p:anim calcmode="lin" valueType="num">
+                                      <p:cBhvr>
+                                        <p:cTn id="64" dur="1000" fill="hold"/>
+                                        <p:tgtEl>
+                                          <p:spTgt spid="29"/>
+                                        </p:tgtEl>
+                                        <p:attrNameLst>
+                                          <p:attrName>ppt_h</p:attrName>
+                                        </p:attrNameLst>
+                                      </p:cBhvr>
+                                      <p:tavLst>
+                                        <p:tav tm="0">
+                                          <p:val>
+                                            <p:fltVal val="0"/>
+                                          </p:val>
+                                        </p:tav>
+                                        <p:tav tm="100000">
+                                          <p:val>
+                                            <p:strVal val="#ppt_h"/>
+                                          </p:val>
+                                        </p:tav>
+                                      </p:tavLst>
+                                    </p:anim>
+                                    <p:anim calcmode="lin" valueType="num">
+                                      <p:cBhvr>
+                                        <p:cTn id="65" dur="1000" fill="hold"/>
+                                        <p:tgtEl>
+                                          <p:spTgt spid="29"/>
+                                        </p:tgtEl>
+                                        <p:attrNameLst>
+                                          <p:attrName>style.rotation</p:attrName>
+                                        </p:attrNameLst>
+                                      </p:cBhvr>
+                                      <p:tavLst>
+                                        <p:tav tm="0">
+                                          <p:val>
+                                            <p:fltVal val="90"/>
+                                          </p:val>
+                                        </p:tav>
+                                        <p:tav tm="100000">
+                                          <p:val>
+                                            <p:fltVal val="0"/>
+                                          </p:val>
+                                        </p:tav>
+                                      </p:tavLst>
+                                    </p:anim>
+                                    <p:animEffect transition="in" filter="fade">
+                                      <p:cBhvr>
+                                        <p:cTn id="66" dur="1000"/>
+                                        <p:tgtEl>
+                                          <p:spTgt spid="29"/>
+                                        </p:tgtEl>
+                                      </p:cBhvr>
+                                    </p:animEffect>
+                                  </p:childTnLst>
+                                </p:cTn>
+                              </p:par>
+                            </p:childTnLst>
+                          </p:cTn>
+                        </p:par>
+                      </p:childTnLst>
+                    </p:cTn>
+                  </p:par>
+                </p:childTnLst>
+              </p:cTn>
+              <p:prevCondLst>
+                <p:cond evt="onPrev" delay="0">
+                  <p:tgtEl>
+                    <p:sldTgt/>
+                  </p:tgtEl>
+                </p:cond>
+              </p:prevCondLst>
+              <p:nextCondLst>
+                <p:cond evt="onNext" delay="0">
+                  <p:tgtEl>
+                    <p:sldTgt/>
+                  </p:tgtEl>
+                </p:cond>
+              </p:nextCondLst>
+            </p:seq>
+          </p:childTnLst>
+        </p:cTn>
+      </p:par>
+    </p:tnLst>
+    <p:bldLst>
+      <p:bldP spid="4" grpId="0" animBg="1"/>
+      <p:bldP spid="6" grpId="0" animBg="1"/>
+      <p:bldP spid="11" grpId="0" animBg="1"/>
+      <p:bldP spid="14" grpId="0" animBg="1"/>
+      <p:bldP spid="19" grpId="0" animBg="1"/>
+      <p:bldP spid="22" grpId="0" animBg="1"/>
+      <p:bldP spid="27" grpId="0" animBg="1"/>
+      <p:bldGraphic spid="29" grpId="0">
+        <p:bldAsOne/>
+      </p:bldGraphic>
+    </p:bldLst>
+  </p:timing>
 </p:sld>
 </file>
 
@@ -8524,7 +10453,84 @@
                 <a:ea typeface="Calibri Light" pitchFamily="34" charset="-122"/>
                 <a:cs typeface="Calibri Light" pitchFamily="34" charset="-120"/>
               </a:rPr>
-              <a:t>Autonomia y Limites: El Equilibrio Necesario</a:t>
+              <a:t>Autonomia y </a:t>
+            </a:r>
+            <a:r>
+              <a:rPr lang="en-US" sz="2800" dirty="0" err="1">
+                <a:solidFill>
+                  <a:srgbClr val="2C3E35"/>
+                </a:solidFill>
+                <a:latin typeface="Calibri Light" pitchFamily="34" charset="0"/>
+                <a:ea typeface="Calibri Light" pitchFamily="34" charset="-122"/>
+                <a:cs typeface="Calibri Light" pitchFamily="34" charset="-120"/>
+              </a:rPr>
+              <a:t>limites</a:t>
+            </a:r>
+            <a:r>
+              <a:rPr lang="en-US" sz="2800" dirty="0">
+                <a:solidFill>
+                  <a:srgbClr val="2C3E35"/>
+                </a:solidFill>
+                <a:latin typeface="Calibri Light" pitchFamily="34" charset="0"/>
+                <a:ea typeface="Calibri Light" pitchFamily="34" charset="-122"/>
+                <a:cs typeface="Calibri Light" pitchFamily="34" charset="-120"/>
+              </a:rPr>
+              <a:t>: </a:t>
+            </a:r>
+            <a:r>
+              <a:rPr lang="en-US" sz="2800" dirty="0" err="1">
+                <a:solidFill>
+                  <a:srgbClr val="2C3E35"/>
+                </a:solidFill>
+                <a:latin typeface="Calibri Light" pitchFamily="34" charset="0"/>
+                <a:ea typeface="Calibri Light" pitchFamily="34" charset="-122"/>
+                <a:cs typeface="Calibri Light" pitchFamily="34" charset="-120"/>
+              </a:rPr>
+              <a:t>el</a:t>
+            </a:r>
+            <a:r>
+              <a:rPr lang="en-US" sz="2800" dirty="0">
+                <a:solidFill>
+                  <a:srgbClr val="2C3E35"/>
+                </a:solidFill>
+                <a:latin typeface="Calibri Light" pitchFamily="34" charset="0"/>
+                <a:ea typeface="Calibri Light" pitchFamily="34" charset="-122"/>
+                <a:cs typeface="Calibri Light" pitchFamily="34" charset="-120"/>
+              </a:rPr>
+              <a:t> </a:t>
+            </a:r>
+            <a:r>
+              <a:rPr lang="en-US" sz="2800" dirty="0" err="1">
+                <a:solidFill>
+                  <a:srgbClr val="2C3E35"/>
+                </a:solidFill>
+                <a:latin typeface="Calibri Light" pitchFamily="34" charset="0"/>
+                <a:ea typeface="Calibri Light" pitchFamily="34" charset="-122"/>
+                <a:cs typeface="Calibri Light" pitchFamily="34" charset="-120"/>
+              </a:rPr>
+              <a:t>equilibrio</a:t>
+            </a:r>
+            <a:r>
+              <a:rPr lang="en-US" sz="2800" dirty="0">
+                <a:solidFill>
+                  <a:srgbClr val="2C3E35"/>
+                </a:solidFill>
+                <a:latin typeface="Calibri Light" pitchFamily="34" charset="0"/>
+                <a:ea typeface="Calibri Light" pitchFamily="34" charset="-122"/>
+                <a:cs typeface="Calibri Light" pitchFamily="34" charset="-120"/>
+              </a:rPr>
+              <a:t> </a:t>
+            </a:r>
+            <a:r>
+              <a:rPr lang="en-US" sz="2800" dirty="0" err="1">
+                <a:solidFill>
+                  <a:srgbClr val="2C3E35"/>
+                </a:solidFill>
+                <a:latin typeface="Calibri Light" pitchFamily="34" charset="0"/>
+                <a:ea typeface="Calibri Light" pitchFamily="34" charset="-122"/>
+                <a:cs typeface="Calibri Light" pitchFamily="34" charset="-120"/>
+              </a:rPr>
+              <a:t>necesario</a:t>
             </a:r>
             <a:endParaRPr lang="en-US" sz="2800" dirty="0"/>
           </a:p>
@@ -8563,7 +10569,29 @@
                 <a:ea typeface="Calibri" pitchFamily="34" charset="-122"/>
                 <a:cs typeface="Calibri" pitchFamily="34" charset="-120"/>
               </a:rPr>
-              <a:t>A los 3 anos el nino vive su "primera adolescencia": necesita sentir poder sobre su vida dentro de un marco seguro establecido por el adulto.</a:t>
+              <a:t>A los 3 años </a:t>
+            </a:r>
+            <a:r>
+              <a:rPr lang="en-US" sz="1250" dirty="0" err="1">
+                <a:solidFill>
+                  <a:srgbClr val="2D2D2D"/>
+                </a:solidFill>
+                <a:latin typeface="Calibri" pitchFamily="34" charset="0"/>
+                <a:ea typeface="Calibri" pitchFamily="34" charset="-122"/>
+                <a:cs typeface="Calibri" pitchFamily="34" charset="-120"/>
+              </a:rPr>
+              <a:t>el</a:t>
+            </a:r>
+            <a:r>
+              <a:rPr lang="en-US" sz="1250" dirty="0">
+                <a:solidFill>
+                  <a:srgbClr val="2D2D2D"/>
+                </a:solidFill>
+                <a:latin typeface="Calibri" pitchFamily="34" charset="0"/>
+                <a:ea typeface="Calibri" pitchFamily="34" charset="-122"/>
+                <a:cs typeface="Calibri" pitchFamily="34" charset="-120"/>
+              </a:rPr>
+              <a:t> niño vive su "primera adolescencia": necesita sentir poder sobre su vida dentro de un marco seguro establecido por el adulto.</a:t>
             </a:r>
             <a:endParaRPr lang="en-US" sz="1250" dirty="0"/>
           </a:p>
@@ -9252,7 +11280,7 @@
                 <a:ea typeface="Calibri" pitchFamily="34" charset="-122"/>
                 <a:cs typeface="Calibri" pitchFamily="34" charset="-120"/>
               </a:rPr>
-              <a:t>El nino decide</a:t>
+              <a:t>El niño decide</a:t>
             </a:r>
             <a:endParaRPr lang="en-US" sz="1150" dirty="0"/>
           </a:p>
@@ -9523,7 +11551,29 @@
                 <a:ea typeface="Calibri" pitchFamily="34" charset="-122"/>
                 <a:cs typeface="Calibri" pitchFamily="34" charset="-120"/>
               </a:rPr>
-              <a:t>el limite: el nino</a:t>
+              <a:t>el limite: </a:t>
+            </a:r>
+            <a:r>
+              <a:rPr lang="en-US" sz="1150" dirty="0" err="1">
+                <a:solidFill>
+                  <a:srgbClr val="2D2D2D"/>
+                </a:solidFill>
+                <a:latin typeface="Calibri" pitchFamily="34" charset="0"/>
+                <a:ea typeface="Calibri" pitchFamily="34" charset="-122"/>
+                <a:cs typeface="Calibri" pitchFamily="34" charset="-120"/>
+              </a:rPr>
+              <a:t>el</a:t>
+            </a:r>
+            <a:r>
+              <a:rPr lang="en-US" sz="1150" dirty="0">
+                <a:solidFill>
+                  <a:srgbClr val="2D2D2D"/>
+                </a:solidFill>
+                <a:latin typeface="Calibri" pitchFamily="34" charset="0"/>
+                <a:ea typeface="Calibri" pitchFamily="34" charset="-122"/>
+                <a:cs typeface="Calibri" pitchFamily="34" charset="-120"/>
+              </a:rPr>
+              <a:t> niño</a:t>
             </a:r>
             <a:endParaRPr lang="en-US" sz="1150" dirty="0"/>
           </a:p>
@@ -9642,7 +11692,7 @@
               <a:buNone/>
             </a:pPr>
             <a:r>
-              <a:rPr lang="en-US" sz="1200" b="1" dirty="0">
+              <a:rPr lang="en-US" sz="1200" b="1" dirty="0" err="1">
                 <a:solidFill>
                   <a:srgbClr val="FFFFFF"/>
                 </a:solidFill>
@@ -9650,7 +11700,18 @@
                 <a:ea typeface="Calibri" pitchFamily="34" charset="-122"/>
                 <a:cs typeface="Calibri" pitchFamily="34" charset="-120"/>
               </a:rPr>
-              <a:t>Conclusion: </a:t>
+              <a:t>Conclusión</a:t>
+            </a:r>
+            <a:r>
+              <a:rPr lang="en-US" sz="1200" b="1" dirty="0">
+                <a:solidFill>
+                  <a:srgbClr val="FFFFFF"/>
+                </a:solidFill>
+                <a:latin typeface="Calibri" pitchFamily="34" charset="0"/>
+                <a:ea typeface="Calibri" pitchFamily="34" charset="-122"/>
+                <a:cs typeface="Calibri" pitchFamily="34" charset="-120"/>
+              </a:rPr>
+              <a:t>: </a:t>
             </a:r>
             <a:r>
               <a:rPr lang="en-US" sz="1200" dirty="0">
@@ -9782,6 +11843,617 @@
   <p:clrMapOvr>
     <a:masterClrMapping/>
   </p:clrMapOvr>
+  <mc:AlternateContent xmlns:mc="http://schemas.openxmlformats.org/markup-compatibility/2006">
+    <mc:Choice xmlns:p14="http://schemas.microsoft.com/office/powerpoint/2010/main" Requires="p14">
+      <p:transition spd="slow" p14:dur="4000">
+        <p14:vortex dir="r"/>
+      </p:transition>
+    </mc:Choice>
+    <mc:Fallback>
+      <p:transition spd="slow">
+        <p:fade/>
+      </p:transition>
+    </mc:Fallback>
+  </mc:AlternateContent>
+  <p:timing>
+    <p:tnLst>
+      <p:par>
+        <p:cTn id="1" dur="indefinite" restart="never" nodeType="tmRoot">
+          <p:childTnLst>
+            <p:seq concurrent="1" nextAc="seek">
+              <p:cTn id="2" dur="indefinite" nodeType="mainSeq">
+                <p:childTnLst>
+                  <p:par>
+                    <p:cTn id="3" fill="hold">
+                      <p:stCondLst>
+                        <p:cond delay="indefinite"/>
+                      </p:stCondLst>
+                      <p:childTnLst>
+                        <p:par>
+                          <p:cTn id="4" fill="hold">
+                            <p:stCondLst>
+                              <p:cond delay="0"/>
+                            </p:stCondLst>
+                            <p:childTnLst>
+                              <p:par>
+                                <p:cTn id="5" presetID="26" presetClass="entr" presetSubtype="0" fill="hold" grpId="0" nodeType="clickEffect">
+                                  <p:stCondLst>
+                                    <p:cond delay="0"/>
+                                  </p:stCondLst>
+                                  <p:childTnLst>
+                                    <p:set>
+                                      <p:cBhvr>
+                                        <p:cTn id="6" dur="1" fill="hold">
+                                          <p:stCondLst>
+                                            <p:cond delay="0"/>
+                                          </p:stCondLst>
+                                        </p:cTn>
+                                        <p:tgtEl>
+                                          <p:spTgt spid="4"/>
+                                        </p:tgtEl>
+                                        <p:attrNameLst>
+                                          <p:attrName>style.visibility</p:attrName>
+                                        </p:attrNameLst>
+                                      </p:cBhvr>
+                                      <p:to>
+                                        <p:strVal val="visible"/>
+                                      </p:to>
+                                    </p:set>
+                                    <p:animEffect transition="in" filter="wipe(down)">
+                                      <p:cBhvr>
+                                        <p:cTn id="7" dur="580">
+                                          <p:stCondLst>
+                                            <p:cond delay="0"/>
+                                          </p:stCondLst>
+                                        </p:cTn>
+                                        <p:tgtEl>
+                                          <p:spTgt spid="4"/>
+                                        </p:tgtEl>
+                                      </p:cBhvr>
+                                    </p:animEffect>
+                                    <p:anim calcmode="lin" valueType="num">
+                                      <p:cBhvr>
+                                        <p:cTn id="8" dur="1822" tmFilter="0,0; 0.14,0.36; 0.43,0.73; 0.71,0.91; 1.0,1.0">
+                                          <p:stCondLst>
+                                            <p:cond delay="0"/>
+                                          </p:stCondLst>
+                                        </p:cTn>
+                                        <p:tgtEl>
+                                          <p:spTgt spid="4"/>
+                                        </p:tgtEl>
+                                        <p:attrNameLst>
+                                          <p:attrName>ppt_x</p:attrName>
+                                        </p:attrNameLst>
+                                      </p:cBhvr>
+                                      <p:tavLst>
+                                        <p:tav tm="0">
+                                          <p:val>
+                                            <p:strVal val="#ppt_x-0.25"/>
+                                          </p:val>
+                                        </p:tav>
+                                        <p:tav tm="100000">
+                                          <p:val>
+                                            <p:strVal val="#ppt_x"/>
+                                          </p:val>
+                                        </p:tav>
+                                      </p:tavLst>
+                                    </p:anim>
+                                    <p:anim calcmode="lin" valueType="num">
+                                      <p:cBhvr>
+                                        <p:cTn id="9" dur="664" tmFilter="0.0,0.0; 0.25,0.07; 0.50,0.2; 0.75,0.467; 1.0,1.0">
+                                          <p:stCondLst>
+                                            <p:cond delay="0"/>
+                                          </p:stCondLst>
+                                        </p:cTn>
+                                        <p:tgtEl>
+                                          <p:spTgt spid="4"/>
+                                        </p:tgtEl>
+                                        <p:attrNameLst>
+                                          <p:attrName>ppt_y</p:attrName>
+                                        </p:attrNameLst>
+                                      </p:cBhvr>
+                                      <p:tavLst>
+                                        <p:tav tm="0" fmla="#ppt_y-sin(pi*$)/3">
+                                          <p:val>
+                                            <p:fltVal val="0.5"/>
+                                          </p:val>
+                                        </p:tav>
+                                        <p:tav tm="100000">
+                                          <p:val>
+                                            <p:fltVal val="1"/>
+                                          </p:val>
+                                        </p:tav>
+                                      </p:tavLst>
+                                    </p:anim>
+                                    <p:anim calcmode="lin" valueType="num">
+                                      <p:cBhvr>
+                                        <p:cTn id="10" dur="664" tmFilter="0, 0; 0.125,0.2665; 0.25,0.4; 0.375,0.465; 0.5,0.5;  0.625,0.535; 0.75,0.6; 0.875,0.7335; 1,1">
+                                          <p:stCondLst>
+                                            <p:cond delay="664"/>
+                                          </p:stCondLst>
+                                        </p:cTn>
+                                        <p:tgtEl>
+                                          <p:spTgt spid="4"/>
+                                        </p:tgtEl>
+                                        <p:attrNameLst>
+                                          <p:attrName>ppt_y</p:attrName>
+                                        </p:attrNameLst>
+                                      </p:cBhvr>
+                                      <p:tavLst>
+                                        <p:tav tm="0" fmla="#ppt_y-sin(pi*$)/9">
+                                          <p:val>
+                                            <p:fltVal val="0"/>
+                                          </p:val>
+                                        </p:tav>
+                                        <p:tav tm="100000">
+                                          <p:val>
+                                            <p:fltVal val="1"/>
+                                          </p:val>
+                                        </p:tav>
+                                      </p:tavLst>
+                                    </p:anim>
+                                    <p:anim calcmode="lin" valueType="num">
+                                      <p:cBhvr>
+                                        <p:cTn id="11" dur="332" tmFilter="0, 0; 0.125,0.2665; 0.25,0.4; 0.375,0.465; 0.5,0.5;  0.625,0.535; 0.75,0.6; 0.875,0.7335; 1,1">
+                                          <p:stCondLst>
+                                            <p:cond delay="1324"/>
+                                          </p:stCondLst>
+                                        </p:cTn>
+                                        <p:tgtEl>
+                                          <p:spTgt spid="4"/>
+                                        </p:tgtEl>
+                                        <p:attrNameLst>
+                                          <p:attrName>ppt_y</p:attrName>
+                                        </p:attrNameLst>
+                                      </p:cBhvr>
+                                      <p:tavLst>
+                                        <p:tav tm="0" fmla="#ppt_y-sin(pi*$)/27">
+                                          <p:val>
+                                            <p:fltVal val="0"/>
+                                          </p:val>
+                                        </p:tav>
+                                        <p:tav tm="100000">
+                                          <p:val>
+                                            <p:fltVal val="1"/>
+                                          </p:val>
+                                        </p:tav>
+                                      </p:tavLst>
+                                    </p:anim>
+                                    <p:anim calcmode="lin" valueType="num">
+                                      <p:cBhvr>
+                                        <p:cTn id="12" dur="164" tmFilter="0, 0; 0.125,0.2665; 0.25,0.4; 0.375,0.465; 0.5,0.5;  0.625,0.535; 0.75,0.6; 0.875,0.7335; 1,1">
+                                          <p:stCondLst>
+                                            <p:cond delay="1656"/>
+                                          </p:stCondLst>
+                                        </p:cTn>
+                                        <p:tgtEl>
+                                          <p:spTgt spid="4"/>
+                                        </p:tgtEl>
+                                        <p:attrNameLst>
+                                          <p:attrName>ppt_y</p:attrName>
+                                        </p:attrNameLst>
+                                      </p:cBhvr>
+                                      <p:tavLst>
+                                        <p:tav tm="0" fmla="#ppt_y-sin(pi*$)/81">
+                                          <p:val>
+                                            <p:fltVal val="0"/>
+                                          </p:val>
+                                        </p:tav>
+                                        <p:tav tm="100000">
+                                          <p:val>
+                                            <p:fltVal val="1"/>
+                                          </p:val>
+                                        </p:tav>
+                                      </p:tavLst>
+                                    </p:anim>
+                                    <p:animScale>
+                                      <p:cBhvr>
+                                        <p:cTn id="13" dur="26">
+                                          <p:stCondLst>
+                                            <p:cond delay="650"/>
+                                          </p:stCondLst>
+                                        </p:cTn>
+                                        <p:tgtEl>
+                                          <p:spTgt spid="4"/>
+                                        </p:tgtEl>
+                                      </p:cBhvr>
+                                      <p:to x="100000" y="60000"/>
+                                    </p:animScale>
+                                    <p:animScale>
+                                      <p:cBhvr>
+                                        <p:cTn id="14" dur="166" decel="50000">
+                                          <p:stCondLst>
+                                            <p:cond delay="676"/>
+                                          </p:stCondLst>
+                                        </p:cTn>
+                                        <p:tgtEl>
+                                          <p:spTgt spid="4"/>
+                                        </p:tgtEl>
+                                      </p:cBhvr>
+                                      <p:to x="100000" y="100000"/>
+                                    </p:animScale>
+                                    <p:animScale>
+                                      <p:cBhvr>
+                                        <p:cTn id="15" dur="26">
+                                          <p:stCondLst>
+                                            <p:cond delay="1312"/>
+                                          </p:stCondLst>
+                                        </p:cTn>
+                                        <p:tgtEl>
+                                          <p:spTgt spid="4"/>
+                                        </p:tgtEl>
+                                      </p:cBhvr>
+                                      <p:to x="100000" y="80000"/>
+                                    </p:animScale>
+                                    <p:animScale>
+                                      <p:cBhvr>
+                                        <p:cTn id="16" dur="166" decel="50000">
+                                          <p:stCondLst>
+                                            <p:cond delay="1338"/>
+                                          </p:stCondLst>
+                                        </p:cTn>
+                                        <p:tgtEl>
+                                          <p:spTgt spid="4"/>
+                                        </p:tgtEl>
+                                      </p:cBhvr>
+                                      <p:to x="100000" y="100000"/>
+                                    </p:animScale>
+                                    <p:animScale>
+                                      <p:cBhvr>
+                                        <p:cTn id="17" dur="26">
+                                          <p:stCondLst>
+                                            <p:cond delay="1642"/>
+                                          </p:stCondLst>
+                                        </p:cTn>
+                                        <p:tgtEl>
+                                          <p:spTgt spid="4"/>
+                                        </p:tgtEl>
+                                      </p:cBhvr>
+                                      <p:to x="100000" y="90000"/>
+                                    </p:animScale>
+                                    <p:animScale>
+                                      <p:cBhvr>
+                                        <p:cTn id="18" dur="166" decel="50000">
+                                          <p:stCondLst>
+                                            <p:cond delay="1668"/>
+                                          </p:stCondLst>
+                                        </p:cTn>
+                                        <p:tgtEl>
+                                          <p:spTgt spid="4"/>
+                                        </p:tgtEl>
+                                      </p:cBhvr>
+                                      <p:to x="100000" y="100000"/>
+                                    </p:animScale>
+                                    <p:animScale>
+                                      <p:cBhvr>
+                                        <p:cTn id="19" dur="26">
+                                          <p:stCondLst>
+                                            <p:cond delay="1808"/>
+                                          </p:stCondLst>
+                                        </p:cTn>
+                                        <p:tgtEl>
+                                          <p:spTgt spid="4"/>
+                                        </p:tgtEl>
+                                      </p:cBhvr>
+                                      <p:to x="100000" y="95000"/>
+                                    </p:animScale>
+                                    <p:animScale>
+                                      <p:cBhvr>
+                                        <p:cTn id="20" dur="166" decel="50000">
+                                          <p:stCondLst>
+                                            <p:cond delay="1834"/>
+                                          </p:stCondLst>
+                                        </p:cTn>
+                                        <p:tgtEl>
+                                          <p:spTgt spid="4"/>
+                                        </p:tgtEl>
+                                      </p:cBhvr>
+                                      <p:to x="100000" y="100000"/>
+                                    </p:animScale>
+                                  </p:childTnLst>
+                                </p:cTn>
+                              </p:par>
+                            </p:childTnLst>
+                          </p:cTn>
+                        </p:par>
+                      </p:childTnLst>
+                    </p:cTn>
+                  </p:par>
+                  <p:par>
+                    <p:cTn id="21" fill="hold">
+                      <p:stCondLst>
+                        <p:cond delay="indefinite"/>
+                      </p:stCondLst>
+                      <p:childTnLst>
+                        <p:par>
+                          <p:cTn id="22" fill="hold">
+                            <p:stCondLst>
+                              <p:cond delay="0"/>
+                            </p:stCondLst>
+                            <p:childTnLst>
+                              <p:par>
+                                <p:cTn id="23" presetID="22" presetClass="entr" presetSubtype="4" fill="hold" grpId="0" nodeType="clickEffect">
+                                  <p:stCondLst>
+                                    <p:cond delay="0"/>
+                                  </p:stCondLst>
+                                  <p:childTnLst>
+                                    <p:set>
+                                      <p:cBhvr>
+                                        <p:cTn id="24" dur="1" fill="hold">
+                                          <p:stCondLst>
+                                            <p:cond delay="0"/>
+                                          </p:stCondLst>
+                                        </p:cTn>
+                                        <p:tgtEl>
+                                          <p:spTgt spid="5"/>
+                                        </p:tgtEl>
+                                        <p:attrNameLst>
+                                          <p:attrName>style.visibility</p:attrName>
+                                        </p:attrNameLst>
+                                      </p:cBhvr>
+                                      <p:to>
+                                        <p:strVal val="visible"/>
+                                      </p:to>
+                                    </p:set>
+                                    <p:animEffect transition="in" filter="wipe(down)">
+                                      <p:cBhvr>
+                                        <p:cTn id="25" dur="500"/>
+                                        <p:tgtEl>
+                                          <p:spTgt spid="5"/>
+                                        </p:tgtEl>
+                                      </p:cBhvr>
+                                    </p:animEffect>
+                                  </p:childTnLst>
+                                </p:cTn>
+                              </p:par>
+                            </p:childTnLst>
+                          </p:cTn>
+                        </p:par>
+                      </p:childTnLst>
+                    </p:cTn>
+                  </p:par>
+                  <p:par>
+                    <p:cTn id="26" fill="hold">
+                      <p:stCondLst>
+                        <p:cond delay="indefinite"/>
+                      </p:stCondLst>
+                      <p:childTnLst>
+                        <p:par>
+                          <p:cTn id="27" fill="hold">
+                            <p:stCondLst>
+                              <p:cond delay="0"/>
+                            </p:stCondLst>
+                            <p:childTnLst>
+                              <p:par>
+                                <p:cTn id="28" presetID="22" presetClass="entr" presetSubtype="4" fill="hold" grpId="0" nodeType="clickEffect">
+                                  <p:stCondLst>
+                                    <p:cond delay="0"/>
+                                  </p:stCondLst>
+                                  <p:childTnLst>
+                                    <p:set>
+                                      <p:cBhvr>
+                                        <p:cTn id="29" dur="1" fill="hold">
+                                          <p:stCondLst>
+                                            <p:cond delay="0"/>
+                                          </p:stCondLst>
+                                        </p:cTn>
+                                        <p:tgtEl>
+                                          <p:spTgt spid="6"/>
+                                        </p:tgtEl>
+                                        <p:attrNameLst>
+                                          <p:attrName>style.visibility</p:attrName>
+                                        </p:attrNameLst>
+                                      </p:cBhvr>
+                                      <p:to>
+                                        <p:strVal val="visible"/>
+                                      </p:to>
+                                    </p:set>
+                                    <p:animEffect transition="in" filter="wipe(down)">
+                                      <p:cBhvr>
+                                        <p:cTn id="30" dur="500"/>
+                                        <p:tgtEl>
+                                          <p:spTgt spid="6"/>
+                                        </p:tgtEl>
+                                      </p:cBhvr>
+                                    </p:animEffect>
+                                  </p:childTnLst>
+                                </p:cTn>
+                              </p:par>
+                            </p:childTnLst>
+                          </p:cTn>
+                        </p:par>
+                      </p:childTnLst>
+                    </p:cTn>
+                  </p:par>
+                  <p:par>
+                    <p:cTn id="31" fill="hold">
+                      <p:stCondLst>
+                        <p:cond delay="indefinite"/>
+                      </p:stCondLst>
+                      <p:childTnLst>
+                        <p:par>
+                          <p:cTn id="32" fill="hold">
+                            <p:stCondLst>
+                              <p:cond delay="0"/>
+                            </p:stCondLst>
+                            <p:childTnLst>
+                              <p:par>
+                                <p:cTn id="33" presetID="22" presetClass="entr" presetSubtype="4" fill="hold" grpId="0" nodeType="clickEffect">
+                                  <p:stCondLst>
+                                    <p:cond delay="0"/>
+                                  </p:stCondLst>
+                                  <p:childTnLst>
+                                    <p:set>
+                                      <p:cBhvr>
+                                        <p:cTn id="34" dur="1" fill="hold">
+                                          <p:stCondLst>
+                                            <p:cond delay="0"/>
+                                          </p:stCondLst>
+                                        </p:cTn>
+                                        <p:tgtEl>
+                                          <p:spTgt spid="12"/>
+                                        </p:tgtEl>
+                                        <p:attrNameLst>
+                                          <p:attrName>style.visibility</p:attrName>
+                                        </p:attrNameLst>
+                                      </p:cBhvr>
+                                      <p:to>
+                                        <p:strVal val="visible"/>
+                                      </p:to>
+                                    </p:set>
+                                    <p:animEffect transition="in" filter="wipe(down)">
+                                      <p:cBhvr>
+                                        <p:cTn id="35" dur="500"/>
+                                        <p:tgtEl>
+                                          <p:spTgt spid="12"/>
+                                        </p:tgtEl>
+                                      </p:cBhvr>
+                                    </p:animEffect>
+                                  </p:childTnLst>
+                                </p:cTn>
+                              </p:par>
+                            </p:childTnLst>
+                          </p:cTn>
+                        </p:par>
+                      </p:childTnLst>
+                    </p:cTn>
+                  </p:par>
+                  <p:par>
+                    <p:cTn id="36" fill="hold">
+                      <p:stCondLst>
+                        <p:cond delay="indefinite"/>
+                      </p:stCondLst>
+                      <p:childTnLst>
+                        <p:par>
+                          <p:cTn id="37" fill="hold">
+                            <p:stCondLst>
+                              <p:cond delay="0"/>
+                            </p:stCondLst>
+                            <p:childTnLst>
+                              <p:par>
+                                <p:cTn id="38" presetID="22" presetClass="entr" presetSubtype="4" fill="hold" grpId="0" nodeType="clickEffect">
+                                  <p:stCondLst>
+                                    <p:cond delay="0"/>
+                                  </p:stCondLst>
+                                  <p:childTnLst>
+                                    <p:set>
+                                      <p:cBhvr>
+                                        <p:cTn id="39" dur="1" fill="hold">
+                                          <p:stCondLst>
+                                            <p:cond delay="0"/>
+                                          </p:stCondLst>
+                                        </p:cTn>
+                                        <p:tgtEl>
+                                          <p:spTgt spid="18"/>
+                                        </p:tgtEl>
+                                        <p:attrNameLst>
+                                          <p:attrName>style.visibility</p:attrName>
+                                        </p:attrNameLst>
+                                      </p:cBhvr>
+                                      <p:to>
+                                        <p:strVal val="visible"/>
+                                      </p:to>
+                                    </p:set>
+                                    <p:animEffect transition="in" filter="wipe(down)">
+                                      <p:cBhvr>
+                                        <p:cTn id="40" dur="500"/>
+                                        <p:tgtEl>
+                                          <p:spTgt spid="18"/>
+                                        </p:tgtEl>
+                                      </p:cBhvr>
+                                    </p:animEffect>
+                                  </p:childTnLst>
+                                </p:cTn>
+                              </p:par>
+                            </p:childTnLst>
+                          </p:cTn>
+                        </p:par>
+                      </p:childTnLst>
+                    </p:cTn>
+                  </p:par>
+                  <p:par>
+                    <p:cTn id="41" fill="hold">
+                      <p:stCondLst>
+                        <p:cond delay="indefinite"/>
+                      </p:stCondLst>
+                      <p:childTnLst>
+                        <p:par>
+                          <p:cTn id="42" fill="hold">
+                            <p:stCondLst>
+                              <p:cond delay="0"/>
+                            </p:stCondLst>
+                            <p:childTnLst>
+                              <p:par>
+                                <p:cTn id="43" presetID="22" presetClass="entr" presetSubtype="4" fill="hold" grpId="0" nodeType="clickEffect">
+                                  <p:stCondLst>
+                                    <p:cond delay="0"/>
+                                  </p:stCondLst>
+                                  <p:childTnLst>
+                                    <p:set>
+                                      <p:cBhvr>
+                                        <p:cTn id="44" dur="1" fill="hold">
+                                          <p:stCondLst>
+                                            <p:cond delay="0"/>
+                                          </p:stCondLst>
+                                        </p:cTn>
+                                        <p:tgtEl>
+                                          <p:spTgt spid="29"/>
+                                        </p:tgtEl>
+                                        <p:attrNameLst>
+                                          <p:attrName>style.visibility</p:attrName>
+                                        </p:attrNameLst>
+                                      </p:cBhvr>
+                                      <p:to>
+                                        <p:strVal val="visible"/>
+                                      </p:to>
+                                    </p:set>
+                                    <p:animEffect transition="in" filter="wipe(down)">
+                                      <p:cBhvr>
+                                        <p:cTn id="45" dur="500"/>
+                                        <p:tgtEl>
+                                          <p:spTgt spid="29"/>
+                                        </p:tgtEl>
+                                      </p:cBhvr>
+                                    </p:animEffect>
+                                  </p:childTnLst>
+                                </p:cTn>
+                              </p:par>
+                            </p:childTnLst>
+                          </p:cTn>
+                        </p:par>
+                      </p:childTnLst>
+                    </p:cTn>
+                  </p:par>
+                </p:childTnLst>
+              </p:cTn>
+              <p:prevCondLst>
+                <p:cond evt="onPrev" delay="0">
+                  <p:tgtEl>
+                    <p:sldTgt/>
+                  </p:tgtEl>
+                </p:cond>
+              </p:prevCondLst>
+              <p:nextCondLst>
+                <p:cond evt="onNext" delay="0">
+                  <p:tgtEl>
+                    <p:sldTgt/>
+                  </p:tgtEl>
+                </p:cond>
+              </p:nextCondLst>
+            </p:seq>
+          </p:childTnLst>
+        </p:cTn>
+      </p:par>
+    </p:tnLst>
+    <p:bldLst>
+      <p:bldP spid="4" grpId="0" animBg="1"/>
+      <p:bldP spid="5" grpId="0" animBg="1"/>
+      <p:bldP spid="6" grpId="0" animBg="1"/>
+      <p:bldP spid="12" grpId="0" animBg="1"/>
+      <p:bldP spid="18" grpId="0" animBg="1"/>
+      <p:bldP spid="29" grpId="0" animBg="1"/>
+    </p:bldLst>
+  </p:timing>
 </p:sld>
 </file>
 
@@ -10139,45 +12811,6 @@
       </p:sp>
       <p:sp>
         <p:nvSpPr>
-          <p:cNvPr id="10" name="Text 8"/>
-          <p:cNvSpPr/>
-          <p:nvPr/>
-        </p:nvSpPr>
-        <p:spPr>
-          <a:xfrm>
-            <a:off x="2286000" y="2971800"/>
-            <a:ext cx="4572000" cy="228600"/>
-          </a:xfrm>
-          <a:prstGeom prst="rect">
-            <a:avLst/>
-          </a:prstGeom>
-          <a:noFill/>
-          <a:ln/>
-        </p:spPr>
-        <p:txBody>
-          <a:bodyPr wrap="square" rtlCol="0" anchor="ctr"/>
-          <a:lstStyle/>
-          <a:p>
-            <a:pPr marL="0" indent="0" algn="ctr">
-              <a:buNone/>
-            </a:pPr>
-            <a:r>
-              <a:rPr lang="en-US" sz="850" i="1" dirty="0">
-                <a:solidFill>
-                  <a:srgbClr val="668866"/>
-                </a:solidFill>
-                <a:latin typeface="Calibri" pitchFamily="34" charset="0"/>
-                <a:ea typeface="Calibri" pitchFamily="34" charset="-122"/>
-                <a:cs typeface="Calibri" pitchFamily="34" charset="-120"/>
-              </a:rPr>
-              <a:t>(Reemplaza este enlace con tu URL real de OneDrive)</a:t>
-            </a:r>
-            <a:endParaRPr lang="en-US" sz="850" dirty="0"/>
-          </a:p>
-        </p:txBody>
-      </p:sp>
-      <p:sp>
-        <p:nvSpPr>
           <p:cNvPr id="11" name="Shape 9"/>
           <p:cNvSpPr/>
           <p:nvPr/>
@@ -10239,14 +12872,12 @@
                 <a:ea typeface="Calibri" pitchFamily="34" charset="-122"/>
                 <a:cs typeface="Calibri" pitchFamily="34" charset="-120"/>
               </a:rPr>
-              <a:t>Nombre del Estudiante</a:t>
+              <a:t>Ginna Paola García Gómez</a:t>
             </a:r>
             <a:endParaRPr lang="en-US" sz="1100" dirty="0"/>
           </a:p>
           <a:p>
-            <a:pPr marL="0" indent="0" algn="ctr">
-              <a:buNone/>
-            </a:pPr>
+            <a:pPr algn="ctr"/>
             <a:r>
               <a:rPr lang="en-US" sz="1100" dirty="0">
                 <a:solidFill>
@@ -10256,46 +12887,89 @@
                 <a:ea typeface="Calibri" pitchFamily="34" charset="-122"/>
                 <a:cs typeface="Calibri" pitchFamily="34" charset="-120"/>
               </a:rPr>
-              <a:t>Nombre del Curso  |  Institucion  |  2025</a:t>
-            </a:r>
-            <a:endParaRPr lang="en-US" sz="1100" dirty="0"/>
-          </a:p>
-        </p:txBody>
-      </p:sp>
-      <p:sp>
-        <p:nvSpPr>
-          <p:cNvPr id="13" name="Text 11"/>
-          <p:cNvSpPr/>
-          <p:nvPr/>
-        </p:nvSpPr>
-        <p:spPr>
-          <a:xfrm>
-            <a:off x="914400" y="4160520"/>
-            <a:ext cx="7315200" cy="640080"/>
-          </a:xfrm>
-          <a:prstGeom prst="rect">
-            <a:avLst/>
-          </a:prstGeom>
-          <a:noFill/>
-          <a:ln/>
-        </p:spPr>
-        <p:txBody>
-          <a:bodyPr wrap="square" rtlCol="0" anchor="ctr"/>
-          <a:lstStyle/>
-          <a:p>
-            <a:pPr marL="0" indent="0" algn="ctr">
-              <a:buNone/>
-            </a:pPr>
-            <a:r>
-              <a:rPr lang="en-US" sz="1250" i="1" dirty="0">
-                <a:solidFill>
-                  <a:srgbClr val="C97D5B"/>
+              <a:t>  </a:t>
+            </a:r>
+            <a:r>
+              <a:rPr lang="en-US" sz="1100" dirty="0">
+                <a:solidFill>
+                  <a:srgbClr val="AABFB0"/>
+                </a:solidFill>
+                <a:ea typeface="Calibri"/>
+                <a:cs typeface="Calibri"/>
+              </a:rPr>
+              <a:t> TIC 1939 UVRE1 1TI – 2026-1T</a:t>
+            </a:r>
+            <a:r>
+              <a:rPr lang="en-US" sz="1100" dirty="0">
+                <a:solidFill>
+                  <a:srgbClr val="AABFB0"/>
                 </a:solidFill>
                 <a:latin typeface="Calibri" pitchFamily="34" charset="0"/>
                 <a:ea typeface="Calibri" pitchFamily="34" charset="-122"/>
                 <a:cs typeface="Calibri" pitchFamily="34" charset="-120"/>
               </a:rPr>
-              <a:t>"Criar con respeto es la inversion mas rentable que existe:</a:t>
+              <a:t>|  Politécnico internacional  |  2026</a:t>
+            </a:r>
+            <a:endParaRPr lang="en-US" sz="1100" dirty="0"/>
+          </a:p>
+        </p:txBody>
+      </p:sp>
+      <p:sp>
+        <p:nvSpPr>
+          <p:cNvPr id="13" name="Text 11"/>
+          <p:cNvSpPr/>
+          <p:nvPr/>
+        </p:nvSpPr>
+        <p:spPr>
+          <a:xfrm>
+            <a:off x="914400" y="4160520"/>
+            <a:ext cx="7315200" cy="640080"/>
+          </a:xfrm>
+          <a:prstGeom prst="rect">
+            <a:avLst/>
+          </a:prstGeom>
+          <a:noFill/>
+          <a:ln/>
+        </p:spPr>
+        <p:txBody>
+          <a:bodyPr wrap="square" rtlCol="0" anchor="ctr"/>
+          <a:lstStyle/>
+          <a:p>
+            <a:pPr marL="0" indent="0" algn="ctr">
+              <a:buNone/>
+            </a:pPr>
+            <a:r>
+              <a:rPr lang="en-US" sz="1250" i="1" dirty="0">
+                <a:solidFill>
+                  <a:srgbClr val="C97D5B"/>
+                </a:solidFill>
+                <a:latin typeface="Calibri" pitchFamily="34" charset="0"/>
+                <a:ea typeface="Calibri" pitchFamily="34" charset="-122"/>
+                <a:cs typeface="Calibri" pitchFamily="34" charset="-120"/>
+              </a:rPr>
+              <a:t>"Criar con respeto es la </a:t>
+            </a:r>
+            <a:r>
+              <a:rPr lang="en-US" sz="1250" i="1" dirty="0" err="1">
+                <a:solidFill>
+                  <a:srgbClr val="C97D5B"/>
+                </a:solidFill>
+                <a:latin typeface="Calibri" pitchFamily="34" charset="0"/>
+                <a:ea typeface="Calibri" pitchFamily="34" charset="-122"/>
+                <a:cs typeface="Calibri" pitchFamily="34" charset="-120"/>
+              </a:rPr>
+              <a:t>inversión</a:t>
+            </a:r>
+            <a:r>
+              <a:rPr lang="en-US" sz="1250" i="1" dirty="0">
+                <a:solidFill>
+                  <a:srgbClr val="C97D5B"/>
+                </a:solidFill>
+                <a:latin typeface="Calibri" pitchFamily="34" charset="0"/>
+                <a:ea typeface="Calibri" pitchFamily="34" charset="-122"/>
+                <a:cs typeface="Calibri" pitchFamily="34" charset="-120"/>
+              </a:rPr>
+              <a:t> mas rentable que existe:</a:t>
             </a:r>
             <a:endParaRPr lang="en-US" sz="1250" dirty="0"/>
           </a:p>
@@ -10433,6 +13107,341 @@
   <p:clrMapOvr>
     <a:masterClrMapping/>
   </p:clrMapOvr>
+  <p:transition spd="slow">
+    <p:comb/>
+  </p:transition>
+  <p:timing>
+    <p:tnLst>
+      <p:par>
+        <p:cTn id="1" dur="indefinite" restart="never" nodeType="tmRoot">
+          <p:childTnLst>
+            <p:seq concurrent="1" nextAc="seek">
+              <p:cTn id="2" dur="indefinite" nodeType="mainSeq">
+                <p:childTnLst>
+                  <p:par>
+                    <p:cTn id="3" fill="hold">
+                      <p:stCondLst>
+                        <p:cond delay="indefinite"/>
+                      </p:stCondLst>
+                      <p:childTnLst>
+                        <p:par>
+                          <p:cTn id="4" fill="hold">
+                            <p:stCondLst>
+                              <p:cond delay="0"/>
+                            </p:stCondLst>
+                            <p:childTnLst>
+                              <p:par>
+                                <p:cTn id="5" presetID="45" presetClass="entr" presetSubtype="0" fill="hold" grpId="0" nodeType="clickEffect">
+                                  <p:stCondLst>
+                                    <p:cond delay="0"/>
+                                  </p:stCondLst>
+                                  <p:childTnLst>
+                                    <p:set>
+                                      <p:cBhvr>
+                                        <p:cTn id="6" dur="1" fill="hold">
+                                          <p:stCondLst>
+                                            <p:cond delay="0"/>
+                                          </p:stCondLst>
+                                        </p:cTn>
+                                        <p:tgtEl>
+                                          <p:spTgt spid="4"/>
+                                        </p:tgtEl>
+                                        <p:attrNameLst>
+                                          <p:attrName>style.visibility</p:attrName>
+                                        </p:attrNameLst>
+                                      </p:cBhvr>
+                                      <p:to>
+                                        <p:strVal val="visible"/>
+                                      </p:to>
+                                    </p:set>
+                                    <p:animEffect transition="in" filter="fade">
+                                      <p:cBhvr>
+                                        <p:cTn id="7" dur="2000"/>
+                                        <p:tgtEl>
+                                          <p:spTgt spid="4"/>
+                                        </p:tgtEl>
+                                      </p:cBhvr>
+                                    </p:animEffect>
+                                    <p:anim calcmode="lin" valueType="num">
+                                      <p:cBhvr>
+                                        <p:cTn id="8" dur="2000" fill="hold"/>
+                                        <p:tgtEl>
+                                          <p:spTgt spid="4"/>
+                                        </p:tgtEl>
+                                        <p:attrNameLst>
+                                          <p:attrName>ppt_w</p:attrName>
+                                        </p:attrNameLst>
+                                      </p:cBhvr>
+                                      <p:tavLst>
+                                        <p:tav tm="0" fmla="#ppt_w*sin(2.5*pi*$)">
+                                          <p:val>
+                                            <p:fltVal val="0"/>
+                                          </p:val>
+                                        </p:tav>
+                                        <p:tav tm="100000">
+                                          <p:val>
+                                            <p:fltVal val="1"/>
+                                          </p:val>
+                                        </p:tav>
+                                      </p:tavLst>
+                                    </p:anim>
+                                    <p:anim calcmode="lin" valueType="num">
+                                      <p:cBhvr>
+                                        <p:cTn id="9" dur="2000" fill="hold"/>
+                                        <p:tgtEl>
+                                          <p:spTgt spid="4"/>
+                                        </p:tgtEl>
+                                        <p:attrNameLst>
+                                          <p:attrName>ppt_h</p:attrName>
+                                        </p:attrNameLst>
+                                      </p:cBhvr>
+                                      <p:tavLst>
+                                        <p:tav tm="0">
+                                          <p:val>
+                                            <p:strVal val="#ppt_h"/>
+                                          </p:val>
+                                        </p:tav>
+                                        <p:tav tm="100000">
+                                          <p:val>
+                                            <p:strVal val="#ppt_h"/>
+                                          </p:val>
+                                        </p:tav>
+                                      </p:tavLst>
+                                    </p:anim>
+                                  </p:childTnLst>
+                                </p:cTn>
+                              </p:par>
+                            </p:childTnLst>
+                          </p:cTn>
+                        </p:par>
+                      </p:childTnLst>
+                    </p:cTn>
+                  </p:par>
+                  <p:par>
+                    <p:cTn id="10" fill="hold">
+                      <p:stCondLst>
+                        <p:cond delay="indefinite"/>
+                      </p:stCondLst>
+                      <p:childTnLst>
+                        <p:par>
+                          <p:cTn id="11" fill="hold">
+                            <p:stCondLst>
+                              <p:cond delay="0"/>
+                            </p:stCondLst>
+                            <p:childTnLst>
+                              <p:par>
+                                <p:cTn id="12" presetID="45" presetClass="entr" presetSubtype="0" fill="hold" grpId="0" nodeType="clickEffect">
+                                  <p:stCondLst>
+                                    <p:cond delay="0"/>
+                                  </p:stCondLst>
+                                  <p:childTnLst>
+                                    <p:set>
+                                      <p:cBhvr>
+                                        <p:cTn id="13" dur="1" fill="hold">
+                                          <p:stCondLst>
+                                            <p:cond delay="0"/>
+                                          </p:stCondLst>
+                                        </p:cTn>
+                                        <p:tgtEl>
+                                          <p:spTgt spid="6"/>
+                                        </p:tgtEl>
+                                        <p:attrNameLst>
+                                          <p:attrName>style.visibility</p:attrName>
+                                        </p:attrNameLst>
+                                      </p:cBhvr>
+                                      <p:to>
+                                        <p:strVal val="visible"/>
+                                      </p:to>
+                                    </p:set>
+                                    <p:animEffect transition="in" filter="fade">
+                                      <p:cBhvr>
+                                        <p:cTn id="14" dur="2000"/>
+                                        <p:tgtEl>
+                                          <p:spTgt spid="6"/>
+                                        </p:tgtEl>
+                                      </p:cBhvr>
+                                    </p:animEffect>
+                                    <p:anim calcmode="lin" valueType="num">
+                                      <p:cBhvr>
+                                        <p:cTn id="15" dur="2000" fill="hold"/>
+                                        <p:tgtEl>
+                                          <p:spTgt spid="6"/>
+                                        </p:tgtEl>
+                                        <p:attrNameLst>
+                                          <p:attrName>ppt_w</p:attrName>
+                                        </p:attrNameLst>
+                                      </p:cBhvr>
+                                      <p:tavLst>
+                                        <p:tav tm="0" fmla="#ppt_w*sin(2.5*pi*$)">
+                                          <p:val>
+                                            <p:fltVal val="0"/>
+                                          </p:val>
+                                        </p:tav>
+                                        <p:tav tm="100000">
+                                          <p:val>
+                                            <p:fltVal val="1"/>
+                                          </p:val>
+                                        </p:tav>
+                                      </p:tavLst>
+                                    </p:anim>
+                                    <p:anim calcmode="lin" valueType="num">
+                                      <p:cBhvr>
+                                        <p:cTn id="16" dur="2000" fill="hold"/>
+                                        <p:tgtEl>
+                                          <p:spTgt spid="6"/>
+                                        </p:tgtEl>
+                                        <p:attrNameLst>
+                                          <p:attrName>ppt_h</p:attrName>
+                                        </p:attrNameLst>
+                                      </p:cBhvr>
+                                      <p:tavLst>
+                                        <p:tav tm="0">
+                                          <p:val>
+                                            <p:strVal val="#ppt_h"/>
+                                          </p:val>
+                                        </p:tav>
+                                        <p:tav tm="100000">
+                                          <p:val>
+                                            <p:strVal val="#ppt_h"/>
+                                          </p:val>
+                                        </p:tav>
+                                      </p:tavLst>
+                                    </p:anim>
+                                  </p:childTnLst>
+                                </p:cTn>
+                              </p:par>
+                            </p:childTnLst>
+                          </p:cTn>
+                        </p:par>
+                      </p:childTnLst>
+                    </p:cTn>
+                  </p:par>
+                  <p:par>
+                    <p:cTn id="17" fill="hold">
+                      <p:stCondLst>
+                        <p:cond delay="indefinite"/>
+                      </p:stCondLst>
+                      <p:childTnLst>
+                        <p:par>
+                          <p:cTn id="18" fill="hold">
+                            <p:stCondLst>
+                              <p:cond delay="0"/>
+                            </p:stCondLst>
+                            <p:childTnLst>
+                              <p:par>
+                                <p:cTn id="19" presetID="45" presetClass="entr" presetSubtype="0" fill="hold" grpId="0" nodeType="clickEffect">
+                                  <p:stCondLst>
+                                    <p:cond delay="0"/>
+                                  </p:stCondLst>
+                                  <p:childTnLst>
+                                    <p:set>
+                                      <p:cBhvr>
+                                        <p:cTn id="20" dur="1" fill="hold">
+                                          <p:stCondLst>
+                                            <p:cond delay="0"/>
+                                          </p:stCondLst>
+                                        </p:cTn>
+                                        <p:tgtEl>
+                                          <p:spTgt spid="9"/>
+                                        </p:tgtEl>
+                                        <p:attrNameLst>
+                                          <p:attrName>style.visibility</p:attrName>
+                                        </p:attrNameLst>
+                                      </p:cBhvr>
+                                      <p:to>
+                                        <p:strVal val="visible"/>
+                                      </p:to>
+                                    </p:set>
+                                    <p:animEffect transition="in" filter="fade">
+                                      <p:cBhvr>
+                                        <p:cTn id="21" dur="2000"/>
+                                        <p:tgtEl>
+                                          <p:spTgt spid="9"/>
+                                        </p:tgtEl>
+                                      </p:cBhvr>
+                                    </p:animEffect>
+                                    <p:anim calcmode="lin" valueType="num">
+                                      <p:cBhvr>
+                                        <p:cTn id="22" dur="2000" fill="hold"/>
+                                        <p:tgtEl>
+                                          <p:spTgt spid="9"/>
+                                        </p:tgtEl>
+                                        <p:attrNameLst>
+                                          <p:attrName>ppt_w</p:attrName>
+                                        </p:attrNameLst>
+                                      </p:cBhvr>
+                                      <p:tavLst>
+                                        <p:tav tm="0" fmla="#ppt_w*sin(2.5*pi*$)">
+                                          <p:val>
+                                            <p:fltVal val="0"/>
+                                          </p:val>
+                                        </p:tav>
+                                        <p:tav tm="100000">
+                                          <p:val>
+                                            <p:fltVal val="1"/>
+                                          </p:val>
+                                        </p:tav>
+                                      </p:tavLst>
+                                    </p:anim>
+                                    <p:anim calcmode="lin" valueType="num">
+                                      <p:cBhvr>
+                                        <p:cTn id="23" dur="2000" fill="hold"/>
+                                        <p:tgtEl>
+                                          <p:spTgt spid="9"/>
+                                        </p:tgtEl>
+                                        <p:attrNameLst>
+                                          <p:attrName>ppt_h</p:attrName>
+                                        </p:attrNameLst>
+                                      </p:cBhvr>
+                                      <p:tavLst>
+                                        <p:tav tm="0">
+                                          <p:val>
+                                            <p:strVal val="#ppt_h"/>
+                                          </p:val>
+                                        </p:tav>
+                                        <p:tav tm="100000">
+                                          <p:val>
+                                            <p:strVal val="#ppt_h"/>
+                                          </p:val>
+                                        </p:tav>
+                                      </p:tavLst>
+                                    </p:anim>
+                                  </p:childTnLst>
+                                </p:cTn>
+                              </p:par>
+                            </p:childTnLst>
+                          </p:cTn>
+                        </p:par>
+                      </p:childTnLst>
+                    </p:cTn>
+                  </p:par>
+                </p:childTnLst>
+              </p:cTn>
+              <p:prevCondLst>
+                <p:cond evt="onPrev" delay="0">
+                  <p:tgtEl>
+                    <p:sldTgt/>
+                  </p:tgtEl>
+                </p:cond>
+              </p:prevCondLst>
+              <p:nextCondLst>
+                <p:cond evt="onNext" delay="0">
+                  <p:tgtEl>
+                    <p:sldTgt/>
+                  </p:tgtEl>
+                </p:cond>
+              </p:nextCondLst>
+            </p:seq>
+          </p:childTnLst>
+        </p:cTn>
+      </p:par>
+    </p:tnLst>
+    <p:bldLst>
+      <p:bldP spid="4" grpId="0" animBg="1"/>
+      <p:bldP spid="6" grpId="0" animBg="1"/>
+      <p:bldP spid="9" grpId="0" animBg="1"/>
+    </p:bldLst>
+  </p:timing>
 </p:sld>
 </file>
 
